--- a/output/presentations/03-anatomy-react.pptx
+++ b/output/presentations/03-anatomy-react.pptx
@@ -2,22 +2,24 @@
 <file path=ppt/presentation.xml><?xml version="1.0" encoding="utf-8"?>
 <p:presentation xmlns:p="http://schemas.openxmlformats.org/presentationml/2006/main">
   <p:sldMasterIdLst>
-    <p:sldMasterId xmlns:r="http://schemas.openxmlformats.org/officeDocument/2006/relationships" id="2147483648" r:id="R5df92c2491f04be4"/>
+    <p:sldMasterId xmlns:r="http://schemas.openxmlformats.org/officeDocument/2006/relationships" id="2147483648" r:id="R4aca94d9897a4271"/>
   </p:sldMasterIdLst>
   <p:notesMasterIdLst>
-    <p:notesMasterId xmlns:r="http://schemas.openxmlformats.org/officeDocument/2006/relationships" r:id="R90184986c46545a8"/>
+    <p:notesMasterId xmlns:r="http://schemas.openxmlformats.org/officeDocument/2006/relationships" r:id="Rd0b7667a7c064ffb"/>
   </p:notesMasterIdLst>
   <p:sldIdLst>
-    <p:sldId xmlns:r="http://schemas.openxmlformats.org/officeDocument/2006/relationships" id="256" r:id="R0656a2b2c81b4a48"/>
-    <p:sldId xmlns:r="http://schemas.openxmlformats.org/officeDocument/2006/relationships" id="257" r:id="R32ae1a0cb8624787"/>
-    <p:sldId xmlns:r="http://schemas.openxmlformats.org/officeDocument/2006/relationships" id="258" r:id="Rab0e677a037b4144"/>
-    <p:sldId xmlns:r="http://schemas.openxmlformats.org/officeDocument/2006/relationships" id="259" r:id="R00ee8ed0d5624862"/>
-    <p:sldId xmlns:r="http://schemas.openxmlformats.org/officeDocument/2006/relationships" id="260" r:id="Rbb26be267cf442f8"/>
-    <p:sldId xmlns:r="http://schemas.openxmlformats.org/officeDocument/2006/relationships" id="261" r:id="R47c78fe87b804fd6"/>
-    <p:sldId xmlns:r="http://schemas.openxmlformats.org/officeDocument/2006/relationships" id="262" r:id="R0fa825770d9a4e98"/>
-    <p:sldId xmlns:r="http://schemas.openxmlformats.org/officeDocument/2006/relationships" id="263" r:id="R6d39dd6282a843b6"/>
-    <p:sldId xmlns:r="http://schemas.openxmlformats.org/officeDocument/2006/relationships" id="264" r:id="R6fe2fdbe35924c04"/>
-    <p:sldId xmlns:r="http://schemas.openxmlformats.org/officeDocument/2006/relationships" id="265" r:id="Rd09c47a72d934dc3"/>
+    <p:sldId xmlns:r="http://schemas.openxmlformats.org/officeDocument/2006/relationships" id="256" r:id="R4540889d54ab4d95"/>
+    <p:sldId xmlns:r="http://schemas.openxmlformats.org/officeDocument/2006/relationships" id="257" r:id="Ra31a3807f2dc408e"/>
+    <p:sldId xmlns:r="http://schemas.openxmlformats.org/officeDocument/2006/relationships" id="258" r:id="R1b5c1130fcec41a3"/>
+    <p:sldId xmlns:r="http://schemas.openxmlformats.org/officeDocument/2006/relationships" id="259" r:id="Rc4bebcd70e7449b0"/>
+    <p:sldId xmlns:r="http://schemas.openxmlformats.org/officeDocument/2006/relationships" id="260" r:id="R20f29df9d9d34a28"/>
+    <p:sldId xmlns:r="http://schemas.openxmlformats.org/officeDocument/2006/relationships" id="261" r:id="R7152654dd8264f48"/>
+    <p:sldId xmlns:r="http://schemas.openxmlformats.org/officeDocument/2006/relationships" id="262" r:id="R4b449e06be674062"/>
+    <p:sldId xmlns:r="http://schemas.openxmlformats.org/officeDocument/2006/relationships" id="263" r:id="R9ad15703ea5343bc"/>
+    <p:sldId xmlns:r="http://schemas.openxmlformats.org/officeDocument/2006/relationships" id="264" r:id="R42f3e058ade840e3"/>
+    <p:sldId xmlns:r="http://schemas.openxmlformats.org/officeDocument/2006/relationships" id="265" r:id="R25365de774a0471f"/>
+    <p:sldId xmlns:r="http://schemas.openxmlformats.org/officeDocument/2006/relationships" id="266" r:id="Rd38b4e4ec26a4c85"/>
+    <p:sldId xmlns:r="http://schemas.openxmlformats.org/officeDocument/2006/relationships" id="267" r:id="Rbb59b03f41c940b4"/>
   </p:sldIdLst>
   <p:sldSz cx="12192000" cy="6858000"/>
   <p:notesSz cx="6858000" cy="9144000"/>
@@ -461,12 +463,52 @@
           </a:p>
           <a:p xmlns:a="http://schemas.openxmlformats.org/drawingml/2006/main">
             <a:r>
+              <a:t>Edition: 2026-09-09</a:t>
+            </a:r>
+          </a:p>
+          <a:p xmlns:a="http://schemas.openxmlformats.org/drawingml/2006/main">
+            <a:r>
+              <a:t/>
+            </a:r>
+          </a:p>
+          <a:p xmlns:a="http://schemas.openxmlformats.org/drawingml/2006/main">
+            <a:r>
               <a:t>[Sources]</a:t>
             </a:r>
           </a:p>
           <a:p xmlns:a="http://schemas.openxmlformats.org/drawingml/2006/main">
             <a:r>
-              <a:t>- Supplied source presentation: 03-anatomy-react.pdf</a:t>
+              <a:t>- Original source presentation: 03-anatomy-react.pdf</a:t>
+            </a:r>
+          </a:p>
+          <a:p xmlns:a="http://schemas.openxmlformats.org/drawingml/2006/main">
+            <a:r>
+              <a:t>- S1: Gemini function calling. Google documentation, accessed, 2026-09-09. https://ai.google.dev/gemini-api/docs/function-calling Check model support and preserve complete model content when returning function responses.</a:t>
+            </a:r>
+          </a:p>
+          <a:p xmlns:a="http://schemas.openxmlformats.org/drawingml/2006/main">
+            <a:r>
+              <a:t/>
+            </a:r>
+          </a:p>
+          <a:p xmlns:a="http://schemas.openxmlformats.org/drawingml/2006/main">
+            <a:r>
+              <a:t>[Assessed practice]</a:t>
+            </a:r>
+          </a:p>
+          <a:p xmlns:a="http://schemas.openxmlformats.org/drawingml/2006/main">
+            <a:r>
+              <a:t>Complete Lab 5. Demonstrate that the second model request contains the executed tool result and its matching ID. Replace the registry with a fake and prove that the replacement runs.</a:t>
+            </a:r>
+          </a:p>
+          <a:p xmlns:a="http://schemas.openxmlformats.org/drawingml/2006/main">
+            <a:r>
+              <a:t>Acceptance: The offline round-trip and replacement-registry tests pass. A missing result or exhausted budget yields an explicit stop reason.</a:t>
+            </a:r>
+          </a:p>
+          <a:p xmlns:a="http://schemas.openxmlformats.org/drawingml/2006/main">
+            <a:r>
+              <a:t>Lab: labs/05_gemini_bounded_tools.ipynb</a:t>
             </a:r>
           </a:p>
         </p:txBody>
@@ -536,6 +578,131 @@
           <a:lstStyle xmlns:a="http://schemas.openxmlformats.org/drawingml/2006/main"/>
           <a:p xmlns:a="http://schemas.openxmlformats.org/drawingml/2006/main">
             <a:r>
+              <a:t>Use as retrieval practice. Ask for an answer that defines, compares, traces, and evaluates.</a:t>
+            </a:r>
+          </a:p>
+          <a:p xmlns:a="http://schemas.openxmlformats.org/drawingml/2006/main">
+            <a:r>
+              <a:t/>
+            </a:r>
+          </a:p>
+          <a:p xmlns:a="http://schemas.openxmlformats.org/drawingml/2006/main">
+            <a:r>
+              <a:t>Edition: 2026-09-09</a:t>
+            </a:r>
+          </a:p>
+          <a:p xmlns:a="http://schemas.openxmlformats.org/drawingml/2006/main">
+            <a:r>
+              <a:t/>
+            </a:r>
+          </a:p>
+          <a:p xmlns:a="http://schemas.openxmlformats.org/drawingml/2006/main">
+            <a:r>
+              <a:t>[Sources]</a:t>
+            </a:r>
+          </a:p>
+          <a:p xmlns:a="http://schemas.openxmlformats.org/drawingml/2006/main">
+            <a:r>
+              <a:t>- Original source presentation: 03-anatomy-react.pdf</a:t>
+            </a:r>
+          </a:p>
+          <a:p xmlns:a="http://schemas.openxmlformats.org/drawingml/2006/main">
+            <a:r>
+              <a:t>- S1: Gemini function calling. Google documentation, accessed, 2026-09-09. https://ai.google.dev/gemini-api/docs/function-calling Check model support and preserve complete model content when returning function responses.</a:t>
+            </a:r>
+          </a:p>
+          <a:p xmlns:a="http://schemas.openxmlformats.org/drawingml/2006/main">
+            <a:r>
+              <a:t/>
+            </a:r>
+          </a:p>
+          <a:p xmlns:a="http://schemas.openxmlformats.org/drawingml/2006/main">
+            <a:r>
+              <a:t>[Assessed practice]</a:t>
+            </a:r>
+          </a:p>
+          <a:p xmlns:a="http://schemas.openxmlformats.org/drawingml/2006/main">
+            <a:r>
+              <a:t>Complete Lab 5. Demonstrate that the second model request contains the executed tool result and its matching ID. Replace the registry with a fake and prove that the replacement runs.</a:t>
+            </a:r>
+          </a:p>
+          <a:p xmlns:a="http://schemas.openxmlformats.org/drawingml/2006/main">
+            <a:r>
+              <a:t>Acceptance: The offline round-trip and replacement-registry tests pass. A missing result or exhausted budget yields an explicit stop reason.</a:t>
+            </a:r>
+          </a:p>
+          <a:p xmlns:a="http://schemas.openxmlformats.org/drawingml/2006/main">
+            <a:r>
+              <a:t>Lab: labs/05_gemini_bounded_tools.ipynb</a:t>
+            </a:r>
+          </a:p>
+        </p:txBody>
+      </p:sp>
+      <p:sp>
+        <p:nvSpPr>
+          <p:cNvPr id="4" name="Slide Number Placeholder 3"/>
+          <p:cNvSpPr>
+            <a:spLocks xmlns:a="http://schemas.openxmlformats.org/drawingml/2006/main" noGrp="1"/>
+          </p:cNvSpPr>
+          <p:nvPr>
+            <p:ph type="sldNum" idx="5"/>
+          </p:nvPr>
+        </p:nvSpPr>
+        <p:spPr/>
+        <p:txBody>
+          <a:bodyPr xmlns:a="http://schemas.openxmlformats.org/drawingml/2006/main"/>
+          <a:lstStyle xmlns:a="http://schemas.openxmlformats.org/drawingml/2006/main"/>
+          <a:p xmlns:a="http://schemas.openxmlformats.org/drawingml/2006/main"/>
+        </p:txBody>
+      </p:sp>
+    </p:spTree>
+  </p:cSld>
+  <p:clrMapOvr>
+    <a:masterClrMapping xmlns:a="http://schemas.openxmlformats.org/drawingml/2006/main"/>
+  </p:clrMapOvr>
+</p:notes>
+</file>
+
+<file path=ppt/notesSlides/notesSlide11.xml><?xml version="1.0" encoding="utf-8"?>
+<p:notes xmlns:p="http://schemas.openxmlformats.org/presentationml/2006/main">
+  <p:cSld>
+    <p:spTree>
+      <p:nvGrpSpPr>
+        <p:cNvPr id="1" name=""/>
+        <p:cNvGrpSpPr/>
+        <p:nvPr/>
+      </p:nvGrpSpPr>
+      <p:grpSpPr>
+        <a:xfrm xmlns:a="http://schemas.openxmlformats.org/drawingml/2006/main"/>
+      </p:grpSpPr>
+      <p:sp>
+        <p:nvSpPr>
+          <p:cNvPr id="2" name="Slide Image Placeholder 1"/>
+          <p:cNvSpPr>
+            <a:spLocks xmlns:a="http://schemas.openxmlformats.org/drawingml/2006/main" noGrp="1"/>
+          </p:cNvSpPr>
+          <p:nvPr>
+            <p:ph type="sldImg" idx="0"/>
+          </p:nvPr>
+        </p:nvSpPr>
+        <p:spPr/>
+      </p:sp>
+      <p:sp>
+        <p:nvSpPr>
+          <p:cNvPr id="3" name="Notes Placeholder 2"/>
+          <p:cNvSpPr>
+            <a:spLocks xmlns:a="http://schemas.openxmlformats.org/drawingml/2006/main" noGrp="1"/>
+          </p:cNvSpPr>
+          <p:nvPr>
+            <p:ph type="body" idx="1"/>
+          </p:nvPr>
+        </p:nvSpPr>
+        <p:spPr/>
+        <p:txBody>
+          <a:bodyPr xmlns:a="http://schemas.openxmlformats.org/drawingml/2006/main"/>
+          <a:lstStyle xmlns:a="http://schemas.openxmlformats.org/drawingml/2006/main"/>
+          <a:p xmlns:a="http://schemas.openxmlformats.org/drawingml/2006/main">
+            <a:r>
               <a:t>Close by restating the four durable ideas and linking forward to the next chapter.</a:t>
             </a:r>
           </a:p>
@@ -546,12 +713,177 @@
           </a:p>
           <a:p xmlns:a="http://schemas.openxmlformats.org/drawingml/2006/main">
             <a:r>
+              <a:t>Edition: 2026-09-09</a:t>
+            </a:r>
+          </a:p>
+          <a:p xmlns:a="http://schemas.openxmlformats.org/drawingml/2006/main">
+            <a:r>
+              <a:t/>
+            </a:r>
+          </a:p>
+          <a:p xmlns:a="http://schemas.openxmlformats.org/drawingml/2006/main">
+            <a:r>
               <a:t>[Sources]</a:t>
             </a:r>
           </a:p>
           <a:p xmlns:a="http://schemas.openxmlformats.org/drawingml/2006/main">
             <a:r>
-              <a:t>- Supplied source presentation: 03-anatomy-react.pdf</a:t>
+              <a:t>- Original source presentation: 03-anatomy-react.pdf</a:t>
+            </a:r>
+          </a:p>
+          <a:p xmlns:a="http://schemas.openxmlformats.org/drawingml/2006/main">
+            <a:r>
+              <a:t>- S1: Gemini function calling. Google documentation, accessed, 2026-09-09. https://ai.google.dev/gemini-api/docs/function-calling Check model support and preserve complete model content when returning function responses.</a:t>
+            </a:r>
+          </a:p>
+          <a:p xmlns:a="http://schemas.openxmlformats.org/drawingml/2006/main">
+            <a:r>
+              <a:t/>
+            </a:r>
+          </a:p>
+          <a:p xmlns:a="http://schemas.openxmlformats.org/drawingml/2006/main">
+            <a:r>
+              <a:t>[Assessed practice]</a:t>
+            </a:r>
+          </a:p>
+          <a:p xmlns:a="http://schemas.openxmlformats.org/drawingml/2006/main">
+            <a:r>
+              <a:t>Complete Lab 5. Demonstrate that the second model request contains the executed tool result and its matching ID. Replace the registry with a fake and prove that the replacement runs.</a:t>
+            </a:r>
+          </a:p>
+          <a:p xmlns:a="http://schemas.openxmlformats.org/drawingml/2006/main">
+            <a:r>
+              <a:t>Acceptance: The offline round-trip and replacement-registry tests pass. A missing result or exhausted budget yields an explicit stop reason.</a:t>
+            </a:r>
+          </a:p>
+          <a:p xmlns:a="http://schemas.openxmlformats.org/drawingml/2006/main">
+            <a:r>
+              <a:t>Lab: labs/05_gemini_bounded_tools.ipynb</a:t>
+            </a:r>
+          </a:p>
+        </p:txBody>
+      </p:sp>
+      <p:sp>
+        <p:nvSpPr>
+          <p:cNvPr id="4" name="Slide Number Placeholder 3"/>
+          <p:cNvSpPr>
+            <a:spLocks xmlns:a="http://schemas.openxmlformats.org/drawingml/2006/main" noGrp="1"/>
+          </p:cNvSpPr>
+          <p:nvPr>
+            <p:ph type="sldNum" idx="5"/>
+          </p:nvPr>
+        </p:nvSpPr>
+        <p:spPr/>
+        <p:txBody>
+          <a:bodyPr xmlns:a="http://schemas.openxmlformats.org/drawingml/2006/main"/>
+          <a:lstStyle xmlns:a="http://schemas.openxmlformats.org/drawingml/2006/main"/>
+          <a:p xmlns:a="http://schemas.openxmlformats.org/drawingml/2006/main"/>
+        </p:txBody>
+      </p:sp>
+    </p:spTree>
+  </p:cSld>
+  <p:clrMapOvr>
+    <a:masterClrMapping xmlns:a="http://schemas.openxmlformats.org/drawingml/2006/main"/>
+  </p:clrMapOvr>
+</p:notes>
+</file>
+
+<file path=ppt/notesSlides/notesSlide12.xml><?xml version="1.0" encoding="utf-8"?>
+<p:notes xmlns:p="http://schemas.openxmlformats.org/presentationml/2006/main">
+  <p:cSld>
+    <p:spTree>
+      <p:nvGrpSpPr>
+        <p:cNvPr id="1" name=""/>
+        <p:cNvGrpSpPr/>
+        <p:nvPr/>
+      </p:nvGrpSpPr>
+      <p:grpSpPr>
+        <a:xfrm xmlns:a="http://schemas.openxmlformats.org/drawingml/2006/main"/>
+      </p:grpSpPr>
+      <p:sp>
+        <p:nvSpPr>
+          <p:cNvPr id="2" name="Slide Image Placeholder 1"/>
+          <p:cNvSpPr>
+            <a:spLocks xmlns:a="http://schemas.openxmlformats.org/drawingml/2006/main" noGrp="1"/>
+          </p:cNvSpPr>
+          <p:nvPr>
+            <p:ph type="sldImg" idx="0"/>
+          </p:nvPr>
+        </p:nvSpPr>
+        <p:spPr/>
+      </p:sp>
+      <p:sp>
+        <p:nvSpPr>
+          <p:cNvPr id="3" name="Notes Placeholder 2"/>
+          <p:cNvSpPr>
+            <a:spLocks xmlns:a="http://schemas.openxmlformats.org/drawingml/2006/main" noGrp="1"/>
+          </p:cNvSpPr>
+          <p:nvPr>
+            <p:ph type="body" idx="1"/>
+          </p:nvPr>
+        </p:nvSpPr>
+        <p:spPr/>
+        <p:txBody>
+          <a:bodyPr xmlns:a="http://schemas.openxmlformats.org/drawingml/2006/main"/>
+          <a:lstStyle xmlns:a="http://schemas.openxmlformats.org/drawingml/2006/main"/>
+          <a:p xmlns:a="http://schemas.openxmlformats.org/drawingml/2006/main">
+            <a:r>
+              <a:t>Assess the submitted evidence with the stated acceptance check. Reading links and limitations follow.</a:t>
+            </a:r>
+          </a:p>
+          <a:p xmlns:a="http://schemas.openxmlformats.org/drawingml/2006/main">
+            <a:r>
+              <a:t/>
+            </a:r>
+          </a:p>
+          <a:p xmlns:a="http://schemas.openxmlformats.org/drawingml/2006/main">
+            <a:r>
+              <a:t>Edition: 2026-09-09</a:t>
+            </a:r>
+          </a:p>
+          <a:p xmlns:a="http://schemas.openxmlformats.org/drawingml/2006/main">
+            <a:r>
+              <a:t/>
+            </a:r>
+          </a:p>
+          <a:p xmlns:a="http://schemas.openxmlformats.org/drawingml/2006/main">
+            <a:r>
+              <a:t>[Sources]</a:t>
+            </a:r>
+          </a:p>
+          <a:p xmlns:a="http://schemas.openxmlformats.org/drawingml/2006/main">
+            <a:r>
+              <a:t>- Original source presentation: 03-anatomy-react.pdf</a:t>
+            </a:r>
+          </a:p>
+          <a:p xmlns:a="http://schemas.openxmlformats.org/drawingml/2006/main">
+            <a:r>
+              <a:t>- S1: Gemini function calling. Google documentation, accessed, 2026-09-09. https://ai.google.dev/gemini-api/docs/function-calling Check model support and preserve complete model content when returning function responses.</a:t>
+            </a:r>
+          </a:p>
+          <a:p xmlns:a="http://schemas.openxmlformats.org/drawingml/2006/main">
+            <a:r>
+              <a:t/>
+            </a:r>
+          </a:p>
+          <a:p xmlns:a="http://schemas.openxmlformats.org/drawingml/2006/main">
+            <a:r>
+              <a:t>[Assessed practice]</a:t>
+            </a:r>
+          </a:p>
+          <a:p xmlns:a="http://schemas.openxmlformats.org/drawingml/2006/main">
+            <a:r>
+              <a:t>Complete Lab 5. Demonstrate that the second model request contains the executed tool result and its matching ID. Replace the registry with a fake and prove that the replacement runs.</a:t>
+            </a:r>
+          </a:p>
+          <a:p xmlns:a="http://schemas.openxmlformats.org/drawingml/2006/main">
+            <a:r>
+              <a:t>Acceptance: The offline round-trip and replacement-registry tests pass. A missing result or exhausted budget yields an explicit stop reason.</a:t>
+            </a:r>
+          </a:p>
+          <a:p xmlns:a="http://schemas.openxmlformats.org/drawingml/2006/main">
+            <a:r>
+              <a:t>Lab: labs/05_gemini_bounded_tools.ipynb</a:t>
             </a:r>
           </a:p>
         </p:txBody>
@@ -631,12 +963,52 @@
           </a:p>
           <a:p xmlns:a="http://schemas.openxmlformats.org/drawingml/2006/main">
             <a:r>
+              <a:t>Edition: 2026-09-09</a:t>
+            </a:r>
+          </a:p>
+          <a:p xmlns:a="http://schemas.openxmlformats.org/drawingml/2006/main">
+            <a:r>
+              <a:t/>
+            </a:r>
+          </a:p>
+          <a:p xmlns:a="http://schemas.openxmlformats.org/drawingml/2006/main">
+            <a:r>
               <a:t>[Sources]</a:t>
             </a:r>
           </a:p>
           <a:p xmlns:a="http://schemas.openxmlformats.org/drawingml/2006/main">
             <a:r>
-              <a:t>- Supplied source presentation: 03-anatomy-react.pdf</a:t>
+              <a:t>- Original source presentation: 03-anatomy-react.pdf</a:t>
+            </a:r>
+          </a:p>
+          <a:p xmlns:a="http://schemas.openxmlformats.org/drawingml/2006/main">
+            <a:r>
+              <a:t>- S1: Gemini function calling. Google documentation, accessed, 2026-09-09. https://ai.google.dev/gemini-api/docs/function-calling Check model support and preserve complete model content when returning function responses.</a:t>
+            </a:r>
+          </a:p>
+          <a:p xmlns:a="http://schemas.openxmlformats.org/drawingml/2006/main">
+            <a:r>
+              <a:t/>
+            </a:r>
+          </a:p>
+          <a:p xmlns:a="http://schemas.openxmlformats.org/drawingml/2006/main">
+            <a:r>
+              <a:t>[Assessed practice]</a:t>
+            </a:r>
+          </a:p>
+          <a:p xmlns:a="http://schemas.openxmlformats.org/drawingml/2006/main">
+            <a:r>
+              <a:t>Complete Lab 5. Demonstrate that the second model request contains the executed tool result and its matching ID. Replace the registry with a fake and prove that the replacement runs.</a:t>
+            </a:r>
+          </a:p>
+          <a:p xmlns:a="http://schemas.openxmlformats.org/drawingml/2006/main">
+            <a:r>
+              <a:t>Acceptance: The offline round-trip and replacement-registry tests pass. A missing result or exhausted budget yields an explicit stop reason.</a:t>
+            </a:r>
+          </a:p>
+          <a:p xmlns:a="http://schemas.openxmlformats.org/drawingml/2006/main">
+            <a:r>
+              <a:t>Lab: labs/05_gemini_bounded_tools.ipynb</a:t>
             </a:r>
           </a:p>
         </p:txBody>
@@ -716,12 +1088,52 @@
           </a:p>
           <a:p xmlns:a="http://schemas.openxmlformats.org/drawingml/2006/main">
             <a:r>
+              <a:t>Edition: 2026-09-09</a:t>
+            </a:r>
+          </a:p>
+          <a:p xmlns:a="http://schemas.openxmlformats.org/drawingml/2006/main">
+            <a:r>
+              <a:t/>
+            </a:r>
+          </a:p>
+          <a:p xmlns:a="http://schemas.openxmlformats.org/drawingml/2006/main">
+            <a:r>
               <a:t>[Sources]</a:t>
             </a:r>
           </a:p>
           <a:p xmlns:a="http://schemas.openxmlformats.org/drawingml/2006/main">
             <a:r>
-              <a:t>- Supplied source presentation: 03-anatomy-react.pdf</a:t>
+              <a:t>- Original source presentation: 03-anatomy-react.pdf</a:t>
+            </a:r>
+          </a:p>
+          <a:p xmlns:a="http://schemas.openxmlformats.org/drawingml/2006/main">
+            <a:r>
+              <a:t>- S1: Gemini function calling. Google documentation, accessed, 2026-09-09. https://ai.google.dev/gemini-api/docs/function-calling Check model support and preserve complete model content when returning function responses.</a:t>
+            </a:r>
+          </a:p>
+          <a:p xmlns:a="http://schemas.openxmlformats.org/drawingml/2006/main">
+            <a:r>
+              <a:t/>
+            </a:r>
+          </a:p>
+          <a:p xmlns:a="http://schemas.openxmlformats.org/drawingml/2006/main">
+            <a:r>
+              <a:t>[Assessed practice]</a:t>
+            </a:r>
+          </a:p>
+          <a:p xmlns:a="http://schemas.openxmlformats.org/drawingml/2006/main">
+            <a:r>
+              <a:t>Complete Lab 5. Demonstrate that the second model request contains the executed tool result and its matching ID. Replace the registry with a fake and prove that the replacement runs.</a:t>
+            </a:r>
+          </a:p>
+          <a:p xmlns:a="http://schemas.openxmlformats.org/drawingml/2006/main">
+            <a:r>
+              <a:t>Acceptance: The offline round-trip and replacement-registry tests pass. A missing result or exhausted budget yields an explicit stop reason.</a:t>
+            </a:r>
+          </a:p>
+          <a:p xmlns:a="http://schemas.openxmlformats.org/drawingml/2006/main">
+            <a:r>
+              <a:t>Lab: labs/05_gemini_bounded_tools.ipynb</a:t>
             </a:r>
           </a:p>
         </p:txBody>
@@ -801,12 +1213,52 @@
           </a:p>
           <a:p xmlns:a="http://schemas.openxmlformats.org/drawingml/2006/main">
             <a:r>
+              <a:t>Edition: 2026-09-09</a:t>
+            </a:r>
+          </a:p>
+          <a:p xmlns:a="http://schemas.openxmlformats.org/drawingml/2006/main">
+            <a:r>
+              <a:t/>
+            </a:r>
+          </a:p>
+          <a:p xmlns:a="http://schemas.openxmlformats.org/drawingml/2006/main">
+            <a:r>
               <a:t>[Sources]</a:t>
             </a:r>
           </a:p>
           <a:p xmlns:a="http://schemas.openxmlformats.org/drawingml/2006/main">
             <a:r>
-              <a:t>- Supplied source presentation: 03-anatomy-react.pdf</a:t>
+              <a:t>- Original source presentation: 03-anatomy-react.pdf</a:t>
+            </a:r>
+          </a:p>
+          <a:p xmlns:a="http://schemas.openxmlformats.org/drawingml/2006/main">
+            <a:r>
+              <a:t>- S1: Gemini function calling. Google documentation, accessed, 2026-09-09. https://ai.google.dev/gemini-api/docs/function-calling Check model support and preserve complete model content when returning function responses.</a:t>
+            </a:r>
+          </a:p>
+          <a:p xmlns:a="http://schemas.openxmlformats.org/drawingml/2006/main">
+            <a:r>
+              <a:t/>
+            </a:r>
+          </a:p>
+          <a:p xmlns:a="http://schemas.openxmlformats.org/drawingml/2006/main">
+            <a:r>
+              <a:t>[Assessed practice]</a:t>
+            </a:r>
+          </a:p>
+          <a:p xmlns:a="http://schemas.openxmlformats.org/drawingml/2006/main">
+            <a:r>
+              <a:t>Complete Lab 5. Demonstrate that the second model request contains the executed tool result and its matching ID. Replace the registry with a fake and prove that the replacement runs.</a:t>
+            </a:r>
+          </a:p>
+          <a:p xmlns:a="http://schemas.openxmlformats.org/drawingml/2006/main">
+            <a:r>
+              <a:t>Acceptance: The offline round-trip and replacement-registry tests pass. A missing result or exhausted budget yields an explicit stop reason.</a:t>
+            </a:r>
+          </a:p>
+          <a:p xmlns:a="http://schemas.openxmlformats.org/drawingml/2006/main">
+            <a:r>
+              <a:t>Lab: labs/05_gemini_bounded_tools.ipynb</a:t>
             </a:r>
           </a:p>
         </p:txBody>
@@ -886,12 +1338,52 @@
           </a:p>
           <a:p xmlns:a="http://schemas.openxmlformats.org/drawingml/2006/main">
             <a:r>
+              <a:t>Edition: 2026-09-09</a:t>
+            </a:r>
+          </a:p>
+          <a:p xmlns:a="http://schemas.openxmlformats.org/drawingml/2006/main">
+            <a:r>
+              <a:t/>
+            </a:r>
+          </a:p>
+          <a:p xmlns:a="http://schemas.openxmlformats.org/drawingml/2006/main">
+            <a:r>
               <a:t>[Sources]</a:t>
             </a:r>
           </a:p>
           <a:p xmlns:a="http://schemas.openxmlformats.org/drawingml/2006/main">
             <a:r>
-              <a:t>- Supplied source presentation: 03-anatomy-react.pdf</a:t>
+              <a:t>- Original source presentation: 03-anatomy-react.pdf</a:t>
+            </a:r>
+          </a:p>
+          <a:p xmlns:a="http://schemas.openxmlformats.org/drawingml/2006/main">
+            <a:r>
+              <a:t>- S1: Gemini function calling. Google documentation, accessed, 2026-09-09. https://ai.google.dev/gemini-api/docs/function-calling Check model support and preserve complete model content when returning function responses.</a:t>
+            </a:r>
+          </a:p>
+          <a:p xmlns:a="http://schemas.openxmlformats.org/drawingml/2006/main">
+            <a:r>
+              <a:t/>
+            </a:r>
+          </a:p>
+          <a:p xmlns:a="http://schemas.openxmlformats.org/drawingml/2006/main">
+            <a:r>
+              <a:t>[Assessed practice]</a:t>
+            </a:r>
+          </a:p>
+          <a:p xmlns:a="http://schemas.openxmlformats.org/drawingml/2006/main">
+            <a:r>
+              <a:t>Complete Lab 5. Demonstrate that the second model request contains the executed tool result and its matching ID. Replace the registry with a fake and prove that the replacement runs.</a:t>
+            </a:r>
+          </a:p>
+          <a:p xmlns:a="http://schemas.openxmlformats.org/drawingml/2006/main">
+            <a:r>
+              <a:t>Acceptance: The offline round-trip and replacement-registry tests pass. A missing result or exhausted budget yields an explicit stop reason.</a:t>
+            </a:r>
+          </a:p>
+          <a:p xmlns:a="http://schemas.openxmlformats.org/drawingml/2006/main">
+            <a:r>
+              <a:t>Lab: labs/05_gemini_bounded_tools.ipynb</a:t>
             </a:r>
           </a:p>
         </p:txBody>
@@ -971,12 +1463,52 @@
           </a:p>
           <a:p xmlns:a="http://schemas.openxmlformats.org/drawingml/2006/main">
             <a:r>
+              <a:t>Edition: 2026-09-09</a:t>
+            </a:r>
+          </a:p>
+          <a:p xmlns:a="http://schemas.openxmlformats.org/drawingml/2006/main">
+            <a:r>
+              <a:t/>
+            </a:r>
+          </a:p>
+          <a:p xmlns:a="http://schemas.openxmlformats.org/drawingml/2006/main">
+            <a:r>
               <a:t>[Sources]</a:t>
             </a:r>
           </a:p>
           <a:p xmlns:a="http://schemas.openxmlformats.org/drawingml/2006/main">
             <a:r>
-              <a:t>- Supplied source presentation: 03-anatomy-react.pdf</a:t>
+              <a:t>- Original source presentation: 03-anatomy-react.pdf</a:t>
+            </a:r>
+          </a:p>
+          <a:p xmlns:a="http://schemas.openxmlformats.org/drawingml/2006/main">
+            <a:r>
+              <a:t>- S1: Gemini function calling. Google documentation, accessed, 2026-09-09. https://ai.google.dev/gemini-api/docs/function-calling Check model support and preserve complete model content when returning function responses.</a:t>
+            </a:r>
+          </a:p>
+          <a:p xmlns:a="http://schemas.openxmlformats.org/drawingml/2006/main">
+            <a:r>
+              <a:t/>
+            </a:r>
+          </a:p>
+          <a:p xmlns:a="http://schemas.openxmlformats.org/drawingml/2006/main">
+            <a:r>
+              <a:t>[Assessed practice]</a:t>
+            </a:r>
+          </a:p>
+          <a:p xmlns:a="http://schemas.openxmlformats.org/drawingml/2006/main">
+            <a:r>
+              <a:t>Complete Lab 5. Demonstrate that the second model request contains the executed tool result and its matching ID. Replace the registry with a fake and prove that the replacement runs.</a:t>
+            </a:r>
+          </a:p>
+          <a:p xmlns:a="http://schemas.openxmlformats.org/drawingml/2006/main">
+            <a:r>
+              <a:t>Acceptance: The offline round-trip and replacement-registry tests pass. A missing result or exhausted budget yields an explicit stop reason.</a:t>
+            </a:r>
+          </a:p>
+          <a:p xmlns:a="http://schemas.openxmlformats.org/drawingml/2006/main">
+            <a:r>
+              <a:t>Lab: labs/05_gemini_bounded_tools.ipynb</a:t>
             </a:r>
           </a:p>
         </p:txBody>
@@ -1056,12 +1588,52 @@
           </a:p>
           <a:p xmlns:a="http://schemas.openxmlformats.org/drawingml/2006/main">
             <a:r>
+              <a:t>Edition: 2026-09-09</a:t>
+            </a:r>
+          </a:p>
+          <a:p xmlns:a="http://schemas.openxmlformats.org/drawingml/2006/main">
+            <a:r>
+              <a:t/>
+            </a:r>
+          </a:p>
+          <a:p xmlns:a="http://schemas.openxmlformats.org/drawingml/2006/main">
+            <a:r>
               <a:t>[Sources]</a:t>
             </a:r>
           </a:p>
           <a:p xmlns:a="http://schemas.openxmlformats.org/drawingml/2006/main">
             <a:r>
-              <a:t>- Supplied source presentation: 03-anatomy-react.pdf</a:t>
+              <a:t>- Original source presentation: 03-anatomy-react.pdf</a:t>
+            </a:r>
+          </a:p>
+          <a:p xmlns:a="http://schemas.openxmlformats.org/drawingml/2006/main">
+            <a:r>
+              <a:t>- S1: Gemini function calling. Google documentation, accessed, 2026-09-09. https://ai.google.dev/gemini-api/docs/function-calling Check model support and preserve complete model content when returning function responses.</a:t>
+            </a:r>
+          </a:p>
+          <a:p xmlns:a="http://schemas.openxmlformats.org/drawingml/2006/main">
+            <a:r>
+              <a:t/>
+            </a:r>
+          </a:p>
+          <a:p xmlns:a="http://schemas.openxmlformats.org/drawingml/2006/main">
+            <a:r>
+              <a:t>[Assessed practice]</a:t>
+            </a:r>
+          </a:p>
+          <a:p xmlns:a="http://schemas.openxmlformats.org/drawingml/2006/main">
+            <a:r>
+              <a:t>Complete Lab 5. Demonstrate that the second model request contains the executed tool result and its matching ID. Replace the registry with a fake and prove that the replacement runs.</a:t>
+            </a:r>
+          </a:p>
+          <a:p xmlns:a="http://schemas.openxmlformats.org/drawingml/2006/main">
+            <a:r>
+              <a:t>Acceptance: The offline round-trip and replacement-registry tests pass. A missing result or exhausted budget yields an explicit stop reason.</a:t>
+            </a:r>
+          </a:p>
+          <a:p xmlns:a="http://schemas.openxmlformats.org/drawingml/2006/main">
+            <a:r>
+              <a:t>Lab: labs/05_gemini_bounded_tools.ipynb</a:t>
             </a:r>
           </a:p>
         </p:txBody>
@@ -1141,12 +1713,52 @@
           </a:p>
           <a:p xmlns:a="http://schemas.openxmlformats.org/drawingml/2006/main">
             <a:r>
+              <a:t>Edition: 2026-09-09</a:t>
+            </a:r>
+          </a:p>
+          <a:p xmlns:a="http://schemas.openxmlformats.org/drawingml/2006/main">
+            <a:r>
+              <a:t/>
+            </a:r>
+          </a:p>
+          <a:p xmlns:a="http://schemas.openxmlformats.org/drawingml/2006/main">
+            <a:r>
               <a:t>[Sources]</a:t>
             </a:r>
           </a:p>
           <a:p xmlns:a="http://schemas.openxmlformats.org/drawingml/2006/main">
             <a:r>
-              <a:t>- Supplied source presentation: 03-anatomy-react.pdf</a:t>
+              <a:t>- Original source presentation: 03-anatomy-react.pdf</a:t>
+            </a:r>
+          </a:p>
+          <a:p xmlns:a="http://schemas.openxmlformats.org/drawingml/2006/main">
+            <a:r>
+              <a:t>- S1: Gemini function calling. Google documentation, accessed, 2026-09-09. https://ai.google.dev/gemini-api/docs/function-calling Check model support and preserve complete model content when returning function responses.</a:t>
+            </a:r>
+          </a:p>
+          <a:p xmlns:a="http://schemas.openxmlformats.org/drawingml/2006/main">
+            <a:r>
+              <a:t/>
+            </a:r>
+          </a:p>
+          <a:p xmlns:a="http://schemas.openxmlformats.org/drawingml/2006/main">
+            <a:r>
+              <a:t>[Assessed practice]</a:t>
+            </a:r>
+          </a:p>
+          <a:p xmlns:a="http://schemas.openxmlformats.org/drawingml/2006/main">
+            <a:r>
+              <a:t>Complete Lab 5. Demonstrate that the second model request contains the executed tool result and its matching ID. Replace the registry with a fake and prove that the replacement runs.</a:t>
+            </a:r>
+          </a:p>
+          <a:p xmlns:a="http://schemas.openxmlformats.org/drawingml/2006/main">
+            <a:r>
+              <a:t>Acceptance: The offline round-trip and replacement-registry tests pass. A missing result or exhausted budget yields an explicit stop reason.</a:t>
+            </a:r>
+          </a:p>
+          <a:p xmlns:a="http://schemas.openxmlformats.org/drawingml/2006/main">
+            <a:r>
+              <a:t>Lab: labs/05_gemini_bounded_tools.ipynb</a:t>
             </a:r>
           </a:p>
         </p:txBody>
@@ -1216,7 +1828,7 @@
           <a:lstStyle xmlns:a="http://schemas.openxmlformats.org/drawingml/2006/main"/>
           <a:p xmlns:a="http://schemas.openxmlformats.org/drawingml/2006/main">
             <a:r>
-              <a:t>Use as retrieval practice. Ask for an answer that defines, compares, traces, and evaluates.</a:t>
+              <a:t>Explain the claim first, then use the numbered points as evidence and design consequences.</a:t>
             </a:r>
           </a:p>
           <a:p xmlns:a="http://schemas.openxmlformats.org/drawingml/2006/main">
@@ -1226,12 +1838,52 @@
           </a:p>
           <a:p xmlns:a="http://schemas.openxmlformats.org/drawingml/2006/main">
             <a:r>
+              <a:t>Edition: 2026-09-09</a:t>
+            </a:r>
+          </a:p>
+          <a:p xmlns:a="http://schemas.openxmlformats.org/drawingml/2006/main">
+            <a:r>
+              <a:t/>
+            </a:r>
+          </a:p>
+          <a:p xmlns:a="http://schemas.openxmlformats.org/drawingml/2006/main">
+            <a:r>
               <a:t>[Sources]</a:t>
             </a:r>
           </a:p>
           <a:p xmlns:a="http://schemas.openxmlformats.org/drawingml/2006/main">
             <a:r>
-              <a:t>- Supplied source presentation: 03-anatomy-react.pdf</a:t>
+              <a:t>- Original source presentation: 03-anatomy-react.pdf</a:t>
+            </a:r>
+          </a:p>
+          <a:p xmlns:a="http://schemas.openxmlformats.org/drawingml/2006/main">
+            <a:r>
+              <a:t>- S1: Gemini function calling. Google documentation, accessed, 2026-09-09. https://ai.google.dev/gemini-api/docs/function-calling Check model support and preserve complete model content when returning function responses.</a:t>
+            </a:r>
+          </a:p>
+          <a:p xmlns:a="http://schemas.openxmlformats.org/drawingml/2006/main">
+            <a:r>
+              <a:t/>
+            </a:r>
+          </a:p>
+          <a:p xmlns:a="http://schemas.openxmlformats.org/drawingml/2006/main">
+            <a:r>
+              <a:t>[Assessed practice]</a:t>
+            </a:r>
+          </a:p>
+          <a:p xmlns:a="http://schemas.openxmlformats.org/drawingml/2006/main">
+            <a:r>
+              <a:t>Complete Lab 5. Demonstrate that the second model request contains the executed tool result and its matching ID. Replace the registry with a fake and prove that the replacement runs.</a:t>
+            </a:r>
+          </a:p>
+          <a:p xmlns:a="http://schemas.openxmlformats.org/drawingml/2006/main">
+            <a:r>
+              <a:t>Acceptance: The offline round-trip and replacement-registry tests pass. A missing result or exhausted budget yields an explicit stop reason.</a:t>
+            </a:r>
+          </a:p>
+          <a:p xmlns:a="http://schemas.openxmlformats.org/drawingml/2006/main">
+            <a:r>
+              <a:t>Lab: labs/05_gemini_bounded_tools.ipynb</a:t>
             </a:r>
           </a:p>
         </p:txBody>
@@ -1299,7 +1951,7 @@
   </p:cSld>
   <p:clrMap bg1="lt1" tx1="dk1" bg2="lt2" tx2="dk2" accent1="accent1" accent2="accent2" accent3="accent3" accent4="accent4" accent5="accent5" accent6="accent6" hlink="hlink" folHlink="folHlink"/>
   <p:sldLayoutIdLst>
-    <p:sldLayoutId xmlns:r="http://schemas.openxmlformats.org/officeDocument/2006/relationships" id="2147483649" r:id="R05192503b12e4115"/>
+    <p:sldLayoutId xmlns:r="http://schemas.openxmlformats.org/officeDocument/2006/relationships" id="2147483649" r:id="R1d0c47c171434388"/>
   </p:sldLayoutIdLst>
   <p:txStyles>
     <p:titleStyle>
@@ -1850,7 +2502,7 @@
           <p:cNvPr id="8" name="title-accent">
             <a:extLst xmlns:a="http://schemas.openxmlformats.org/drawingml/2006/main">
               <a:ext uri="{FF2B5EF4-FFF2-40B4-BE49-F238E27FC236}">
-                <a16:creationId xmlns:a16="http://schemas.microsoft.com/office/drawing/2014/main" id="{0EBA46F7-1BB3-4D5E-A763-FE19C55AA15C}"/>
+                <a16:creationId xmlns:a16="http://schemas.microsoft.com/office/drawing/2014/main" id="{84283530-DD73-4BDD-9091-496838C149B4}"/>
               </a:ext>
             </a:extLst>
           </p:cNvPr>
@@ -1883,7 +2535,7 @@
           <p:cNvPr id="2" name="course-title">
             <a:extLst xmlns:a="http://schemas.openxmlformats.org/drawingml/2006/main">
               <a:ext uri="{FF2B5EF4-FFF2-40B4-BE49-F238E27FC236}">
-                <a16:creationId xmlns:a16="http://schemas.microsoft.com/office/drawing/2014/main" id="{16A1CBEA-7D3E-4CDB-98D3-565A5951D876}"/>
+                <a16:creationId xmlns:a16="http://schemas.microsoft.com/office/drawing/2014/main" id="{DA844D16-5F0E-4250-ACDA-64EE1B1E1F3E}"/>
               </a:ext>
             </a:extLst>
           </p:cNvPr>
@@ -1941,7 +2593,7 @@
           <p:cNvPr id="3" name="chapter-number">
             <a:extLst xmlns:a="http://schemas.openxmlformats.org/drawingml/2006/main">
               <a:ext uri="{FF2B5EF4-FFF2-40B4-BE49-F238E27FC236}">
-                <a16:creationId xmlns:a16="http://schemas.microsoft.com/office/drawing/2014/main" id="{6A6F6A1B-A794-4F0A-A65D-50206CBDA70C}"/>
+                <a16:creationId xmlns:a16="http://schemas.microsoft.com/office/drawing/2014/main" id="{98C5E2E0-E874-426E-9A7C-737FD51731DF}"/>
               </a:ext>
             </a:extLst>
           </p:cNvPr>
@@ -1999,7 +2651,7 @@
           <p:cNvPr id="4" name="deck-title">
             <a:extLst xmlns:a="http://schemas.openxmlformats.org/drawingml/2006/main">
               <a:ext uri="{FF2B5EF4-FFF2-40B4-BE49-F238E27FC236}">
-                <a16:creationId xmlns:a16="http://schemas.microsoft.com/office/drawing/2014/main" id="{29757BEC-B291-4C95-81B2-8AC5E8EE229B}"/>
+                <a16:creationId xmlns:a16="http://schemas.microsoft.com/office/drawing/2014/main" id="{7F367C95-F75A-4C83-9CF2-29813624A46A}"/>
               </a:ext>
             </a:extLst>
           </p:cNvPr>
@@ -2057,7 +2709,7 @@
           <p:cNvPr id="5" name="deck-thesis">
             <a:extLst xmlns:a="http://schemas.openxmlformats.org/drawingml/2006/main">
               <a:ext uri="{FF2B5EF4-FFF2-40B4-BE49-F238E27FC236}">
-                <a16:creationId xmlns:a16="http://schemas.microsoft.com/office/drawing/2014/main" id="{2899B9CA-B30B-4792-B0A6-04C904CF7F4F}"/>
+                <a16:creationId xmlns:a16="http://schemas.microsoft.com/office/drawing/2014/main" id="{5E004D0E-904A-43B6-AF87-BCA4DFF91869}"/>
               </a:ext>
             </a:extLst>
           </p:cNvPr>
@@ -2115,7 +2767,7 @@
           <p:cNvPr id="6" name="title-marker">
             <a:extLst xmlns:a="http://schemas.openxmlformats.org/drawingml/2006/main">
               <a:ext uri="{FF2B5EF4-FFF2-40B4-BE49-F238E27FC236}">
-                <a16:creationId xmlns:a16="http://schemas.microsoft.com/office/drawing/2014/main" id="{A44BC852-3BB9-4167-B788-D54D2EC16063}"/>
+                <a16:creationId xmlns:a16="http://schemas.microsoft.com/office/drawing/2014/main" id="{75E7A7C1-2693-4679-9F57-03A1B96DC417}"/>
               </a:ext>
             </a:extLst>
           </p:cNvPr>
@@ -2148,7 +2800,7 @@
           <p:cNvPr id="7" name="title-marker-text">
             <a:extLst xmlns:a="http://schemas.openxmlformats.org/drawingml/2006/main">
               <a:ext uri="{FF2B5EF4-FFF2-40B4-BE49-F238E27FC236}">
-                <a16:creationId xmlns:a16="http://schemas.microsoft.com/office/drawing/2014/main" id="{3849F12C-1D5F-4265-BB08-402F9E25E3A2}"/>
+                <a16:creationId xmlns:a16="http://schemas.microsoft.com/office/drawing/2014/main" id="{143C015E-EABA-44B1-9DDA-DA568CA0221D}"/>
               </a:ext>
             </a:extLst>
           </p:cNvPr>
@@ -2227,7 +2879,7 @@
     </p:spTree>
     <p:extLst>
       <p:ext uri="{BB962C8B-B14F-4D97-AF65-F5344CB8AC3E}">
-        <p14:creationId xmlns:p14="http://schemas.microsoft.com/office/powerpoint/2010/main" val="113253355"/>
+        <p14:creationId xmlns:p14="http://schemas.microsoft.com/office/powerpoint/2010/main" val="21790116"/>
       </p:ext>
     </p:extLst>
   </p:cSld>
@@ -2235,6 +2887,996 @@
 </file>
 
 <file path=ppt/slides/slide10.xml><?xml version="1.0" encoding="utf-8"?>
+<p:sld xmlns:p="http://schemas.openxmlformats.org/presentationml/2006/main">
+  <p:cSld>
+    <p:bg>
+      <p:bgPr>
+        <a:solidFill xmlns:a="http://schemas.openxmlformats.org/drawingml/2006/main">
+          <a:srgbClr val="FFFFFF"/>
+        </a:solidFill>
+      </p:bgPr>
+    </p:bg>
+    <p:spTree>
+      <p:nvGrpSpPr>
+        <p:cNvPr id="1" name=""/>
+        <p:cNvGrpSpPr/>
+        <p:nvPr/>
+      </p:nvGrpSpPr>
+      <p:grpSpPr>
+        <a:xfrm xmlns:a="http://schemas.openxmlformats.org/drawingml/2006/main"/>
+      </p:grpSpPr>
+      <p:sp>
+        <p:nvSpPr>
+          <p:cNvPr id="18" name="accent-line">
+            <a:extLst xmlns:a="http://schemas.openxmlformats.org/drawingml/2006/main">
+              <a:ext uri="{FF2B5EF4-FFF2-40B4-BE49-F238E27FC236}">
+                <a16:creationId xmlns:a16="http://schemas.microsoft.com/office/drawing/2014/main" id="{0D6D154A-A5F0-4A19-875C-ACFA6B892034}"/>
+              </a:ext>
+            </a:extLst>
+          </p:cNvPr>
+          <p:cNvSpPr>
+            <a:spLocks xmlns:a="http://schemas.openxmlformats.org/drawingml/2006/main" noGrp="1"/>
+          </p:cNvSpPr>
+          <p:nvPr/>
+        </p:nvSpPr>
+        <p:spPr>
+          <a:xfrm xmlns:a="http://schemas.openxmlformats.org/drawingml/2006/main">
+            <a:off x="390525" y="304800"/>
+            <a:ext cx="11410950" cy="66675"/>
+          </a:xfrm>
+          <a:prstGeom xmlns:a="http://schemas.openxmlformats.org/drawingml/2006/main" prst="rect">
+            <a:avLst/>
+          </a:prstGeom>
+          <a:solidFill xmlns:a="http://schemas.openxmlformats.org/drawingml/2006/main">
+            <a:srgbClr val="B9F15B"/>
+          </a:solidFill>
+          <a:ln xmlns:a="http://schemas.openxmlformats.org/drawingml/2006/main" w="0">
+            <a:solidFill>
+              <a:srgbClr val="B9F15B"/>
+            </a:solidFill>
+            <a:prstDash val="solid"/>
+          </a:ln>
+        </p:spPr>
+      </p:sp>
+      <p:sp>
+        <p:nvSpPr>
+          <p:cNvPr id="2" name="chapter-label">
+            <a:extLst xmlns:a="http://schemas.openxmlformats.org/drawingml/2006/main">
+              <a:ext uri="{FF2B5EF4-FFF2-40B4-BE49-F238E27FC236}">
+                <a16:creationId xmlns:a16="http://schemas.microsoft.com/office/drawing/2014/main" id="{C82D0368-F1FF-4B4F-BEB7-BBAA77BAD7FF}"/>
+              </a:ext>
+            </a:extLst>
+          </p:cNvPr>
+          <p:cNvSpPr>
+            <a:spLocks xmlns:a="http://schemas.openxmlformats.org/drawingml/2006/main" noGrp="1"/>
+          </p:cNvSpPr>
+          <p:nvPr/>
+        </p:nvSpPr>
+        <p:spPr>
+          <a:xfrm xmlns:a="http://schemas.openxmlformats.org/drawingml/2006/main">
+            <a:off x="390525" y="466725"/>
+            <a:ext cx="4953000" cy="323850"/>
+          </a:xfrm>
+          <a:prstGeom xmlns:a="http://schemas.openxmlformats.org/drawingml/2006/main" prst="rect">
+            <a:avLst/>
+          </a:prstGeom>
+          <a:noFill xmlns:a="http://schemas.openxmlformats.org/drawingml/2006/main"/>
+          <a:ln xmlns:a="http://schemas.openxmlformats.org/drawingml/2006/main" w="0">
+            <a:noFill/>
+            <a:prstDash val="solid"/>
+          </a:ln>
+        </p:spPr>
+        <p:txBody>
+          <a:bodyPr xmlns:a="http://schemas.openxmlformats.org/drawingml/2006/main" anchor="t">
+            <a:noAutofit/>
+          </a:bodyPr>
+          <a:lstStyle xmlns:a="http://schemas.openxmlformats.org/drawingml/2006/main"/>
+          <a:p xmlns:a="http://schemas.openxmlformats.org/drawingml/2006/main">
+            <a:pPr algn="l">
+              <a:defRPr sz="1275" b="1">
+                <a:solidFill>
+                  <a:srgbClr val="5B5B57"/>
+                </a:solidFill>
+                <a:latin typeface="Helvetica Neue"/>
+                <a:ea typeface="Helvetica Neue"/>
+                <a:cs typeface="Helvetica Neue"/>
+              </a:defRPr>
+            </a:pPr>
+            <a:r>
+              <a:rPr sz="1275" b="1">
+                <a:solidFill>
+                  <a:srgbClr val="5B5B57"/>
+                </a:solidFill>
+                <a:latin typeface="Helvetica Neue"/>
+                <a:ea typeface="Helvetica Neue"/>
+                <a:cs typeface="Helvetica Neue"/>
+              </a:rPr>
+              <a:t>EXAM CHECK  /  03</a:t>
+            </a:r>
+          </a:p>
+        </p:txBody>
+      </p:sp>
+      <p:sp>
+        <p:nvSpPr>
+          <p:cNvPr id="3" name="slide-number">
+            <a:extLst xmlns:a="http://schemas.openxmlformats.org/drawingml/2006/main">
+              <a:ext uri="{FF2B5EF4-FFF2-40B4-BE49-F238E27FC236}">
+                <a16:creationId xmlns:a16="http://schemas.microsoft.com/office/drawing/2014/main" id="{676E0803-4E65-44BB-A7FD-2D14F4C23847}"/>
+              </a:ext>
+            </a:extLst>
+          </p:cNvPr>
+          <p:cNvSpPr>
+            <a:spLocks xmlns:a="http://schemas.openxmlformats.org/drawingml/2006/main" noGrp="1"/>
+          </p:cNvSpPr>
+          <p:nvPr/>
+        </p:nvSpPr>
+        <p:spPr>
+          <a:xfrm xmlns:a="http://schemas.openxmlformats.org/drawingml/2006/main">
+            <a:off x="11049000" y="6286500"/>
+            <a:ext cx="742950" cy="266700"/>
+          </a:xfrm>
+          <a:prstGeom xmlns:a="http://schemas.openxmlformats.org/drawingml/2006/main" prst="rect">
+            <a:avLst/>
+          </a:prstGeom>
+          <a:noFill xmlns:a="http://schemas.openxmlformats.org/drawingml/2006/main"/>
+          <a:ln xmlns:a="http://schemas.openxmlformats.org/drawingml/2006/main" w="0">
+            <a:noFill/>
+            <a:prstDash val="solid"/>
+          </a:ln>
+        </p:spPr>
+        <p:txBody>
+          <a:bodyPr xmlns:a="http://schemas.openxmlformats.org/drawingml/2006/main" anchor="t">
+            <a:noAutofit/>
+          </a:bodyPr>
+          <a:lstStyle xmlns:a="http://schemas.openxmlformats.org/drawingml/2006/main"/>
+          <a:p xmlns:a="http://schemas.openxmlformats.org/drawingml/2006/main">
+            <a:pPr algn="r">
+              <a:defRPr sz="1200" b="0">
+                <a:solidFill>
+                  <a:srgbClr val="5B5B57"/>
+                </a:solidFill>
+                <a:latin typeface="Helvetica Neue"/>
+                <a:ea typeface="Helvetica Neue"/>
+                <a:cs typeface="Helvetica Neue"/>
+              </a:defRPr>
+            </a:pPr>
+            <a:r>
+              <a:rPr sz="1200" b="0">
+                <a:solidFill>
+                  <a:srgbClr val="5B5B57"/>
+                </a:solidFill>
+                <a:latin typeface="Helvetica Neue"/>
+                <a:ea typeface="Helvetica Neue"/>
+                <a:cs typeface="Helvetica Neue"/>
+              </a:rPr>
+              <a:t>10</a:t>
+            </a:r>
+          </a:p>
+        </p:txBody>
+      </p:sp>
+      <p:sp>
+        <p:nvSpPr>
+          <p:cNvPr id="4" name="chapter-footer">
+            <a:extLst xmlns:a="http://schemas.openxmlformats.org/drawingml/2006/main">
+              <a:ext uri="{FF2B5EF4-FFF2-40B4-BE49-F238E27FC236}">
+                <a16:creationId xmlns:a16="http://schemas.microsoft.com/office/drawing/2014/main" id="{C83816AD-6607-49B1-B0F5-89345D2619C4}"/>
+              </a:ext>
+            </a:extLst>
+          </p:cNvPr>
+          <p:cNvSpPr>
+            <a:spLocks xmlns:a="http://schemas.openxmlformats.org/drawingml/2006/main" noGrp="1"/>
+          </p:cNvSpPr>
+          <p:nvPr/>
+        </p:nvSpPr>
+        <p:spPr>
+          <a:xfrm xmlns:a="http://schemas.openxmlformats.org/drawingml/2006/main">
+            <a:off x="390525" y="6286500"/>
+            <a:ext cx="8191500" cy="266700"/>
+          </a:xfrm>
+          <a:prstGeom xmlns:a="http://schemas.openxmlformats.org/drawingml/2006/main" prst="rect">
+            <a:avLst/>
+          </a:prstGeom>
+          <a:noFill xmlns:a="http://schemas.openxmlformats.org/drawingml/2006/main"/>
+          <a:ln xmlns:a="http://schemas.openxmlformats.org/drawingml/2006/main" w="0">
+            <a:noFill/>
+            <a:prstDash val="solid"/>
+          </a:ln>
+        </p:spPr>
+        <p:txBody>
+          <a:bodyPr xmlns:a="http://schemas.openxmlformats.org/drawingml/2006/main" anchor="t">
+            <a:noAutofit/>
+          </a:bodyPr>
+          <a:lstStyle xmlns:a="http://schemas.openxmlformats.org/drawingml/2006/main"/>
+          <a:p xmlns:a="http://schemas.openxmlformats.org/drawingml/2006/main">
+            <a:pPr algn="l">
+              <a:defRPr sz="1125" b="0">
+                <a:solidFill>
+                  <a:srgbClr val="5B5B57"/>
+                </a:solidFill>
+                <a:latin typeface="Helvetica Neue"/>
+                <a:ea typeface="Helvetica Neue"/>
+                <a:cs typeface="Helvetica Neue"/>
+              </a:defRPr>
+            </a:pPr>
+            <a:r>
+              <a:rPr sz="1125" b="0">
+                <a:solidFill>
+                  <a:srgbClr val="5B5B57"/>
+                </a:solidFill>
+                <a:latin typeface="Helvetica Neue"/>
+                <a:ea typeface="Helvetica Neue"/>
+                <a:cs typeface="Helvetica Neue"/>
+              </a:rPr>
+              <a:t>Agent Anatomy and ReAct</a:t>
+            </a:r>
+          </a:p>
+        </p:txBody>
+      </p:sp>
+      <p:sp>
+        <p:nvSpPr>
+          <p:cNvPr id="5" name="exam-title">
+            <a:extLst xmlns:a="http://schemas.openxmlformats.org/drawingml/2006/main">
+              <a:ext uri="{FF2B5EF4-FFF2-40B4-BE49-F238E27FC236}">
+                <a16:creationId xmlns:a16="http://schemas.microsoft.com/office/drawing/2014/main" id="{E2B1C125-017F-4FBE-B912-1DE0BDECC8B3}"/>
+              </a:ext>
+            </a:extLst>
+          </p:cNvPr>
+          <p:cNvSpPr>
+            <a:spLocks xmlns:a="http://schemas.openxmlformats.org/drawingml/2006/main" noGrp="1"/>
+          </p:cNvSpPr>
+          <p:nvPr/>
+        </p:nvSpPr>
+        <p:spPr>
+          <a:xfrm xmlns:a="http://schemas.openxmlformats.org/drawingml/2006/main">
+            <a:off x="390525" y="981075"/>
+            <a:ext cx="10668000" cy="781050"/>
+          </a:xfrm>
+          <a:prstGeom xmlns:a="http://schemas.openxmlformats.org/drawingml/2006/main" prst="rect">
+            <a:avLst/>
+          </a:prstGeom>
+          <a:noFill xmlns:a="http://schemas.openxmlformats.org/drawingml/2006/main"/>
+          <a:ln xmlns:a="http://schemas.openxmlformats.org/drawingml/2006/main" w="0">
+            <a:noFill/>
+            <a:prstDash val="solid"/>
+          </a:ln>
+        </p:spPr>
+        <p:txBody>
+          <a:bodyPr xmlns:a="http://schemas.openxmlformats.org/drawingml/2006/main" anchor="t">
+            <a:noAutofit/>
+          </a:bodyPr>
+          <a:lstStyle xmlns:a="http://schemas.openxmlformats.org/drawingml/2006/main"/>
+          <a:p xmlns:a="http://schemas.openxmlformats.org/drawingml/2006/main">
+            <a:pPr algn="l">
+              <a:defRPr sz="3150" b="1">
+                <a:solidFill>
+                  <a:srgbClr val="111111"/>
+                </a:solidFill>
+                <a:latin typeface="Helvetica Neue"/>
+                <a:ea typeface="Helvetica Neue"/>
+                <a:cs typeface="Helvetica Neue"/>
+              </a:defRPr>
+            </a:pPr>
+            <a:r>
+              <a:rPr sz="3150" b="1">
+                <a:solidFill>
+                  <a:srgbClr val="111111"/>
+                </a:solidFill>
+                <a:latin typeface="Helvetica Neue"/>
+                <a:ea typeface="Helvetica Neue"/>
+                <a:cs typeface="Helvetica Neue"/>
+              </a:rPr>
+              <a:t>Can you answer these without notes?</a:t>
+            </a:r>
+          </a:p>
+        </p:txBody>
+      </p:sp>
+      <p:sp>
+        <p:nvSpPr>
+          <p:cNvPr id="6" name="exam-number-1">
+            <a:extLst xmlns:a="http://schemas.openxmlformats.org/drawingml/2006/main">
+              <a:ext uri="{FF2B5EF4-FFF2-40B4-BE49-F238E27FC236}">
+                <a16:creationId xmlns:a16="http://schemas.microsoft.com/office/drawing/2014/main" id="{ECA5F5CC-7DBB-497D-B882-16499CD11BCA}"/>
+              </a:ext>
+            </a:extLst>
+          </p:cNvPr>
+          <p:cNvSpPr>
+            <a:spLocks xmlns:a="http://schemas.openxmlformats.org/drawingml/2006/main" noGrp="1"/>
+          </p:cNvSpPr>
+          <p:nvPr/>
+        </p:nvSpPr>
+        <p:spPr>
+          <a:xfrm xmlns:a="http://schemas.openxmlformats.org/drawingml/2006/main">
+            <a:off x="390525" y="2238375"/>
+            <a:ext cx="590550" cy="400050"/>
+          </a:xfrm>
+          <a:prstGeom xmlns:a="http://schemas.openxmlformats.org/drawingml/2006/main" prst="rect">
+            <a:avLst/>
+          </a:prstGeom>
+          <a:noFill xmlns:a="http://schemas.openxmlformats.org/drawingml/2006/main"/>
+          <a:ln xmlns:a="http://schemas.openxmlformats.org/drawingml/2006/main" w="0">
+            <a:noFill/>
+            <a:prstDash val="solid"/>
+          </a:ln>
+        </p:spPr>
+        <p:txBody>
+          <a:bodyPr xmlns:a="http://schemas.openxmlformats.org/drawingml/2006/main" anchor="t">
+            <a:noAutofit/>
+          </a:bodyPr>
+          <a:lstStyle xmlns:a="http://schemas.openxmlformats.org/drawingml/2006/main"/>
+          <a:p xmlns:a="http://schemas.openxmlformats.org/drawingml/2006/main">
+            <a:pPr algn="l">
+              <a:defRPr sz="1725" b="1">
+                <a:solidFill>
+                  <a:srgbClr val="B9F15B"/>
+                </a:solidFill>
+                <a:latin typeface="Helvetica Neue"/>
+                <a:ea typeface="Helvetica Neue"/>
+                <a:cs typeface="Helvetica Neue"/>
+              </a:defRPr>
+            </a:pPr>
+            <a:r>
+              <a:rPr sz="1725" b="1">
+                <a:solidFill>
+                  <a:srgbClr val="B9F15B"/>
+                </a:solidFill>
+                <a:latin typeface="Helvetica Neue"/>
+                <a:ea typeface="Helvetica Neue"/>
+                <a:cs typeface="Helvetica Neue"/>
+              </a:rPr>
+              <a:t>01</a:t>
+            </a:r>
+          </a:p>
+        </p:txBody>
+      </p:sp>
+      <p:sp>
+        <p:nvSpPr>
+          <p:cNvPr id="7" name="exam-question-1">
+            <a:extLst xmlns:a="http://schemas.openxmlformats.org/drawingml/2006/main">
+              <a:ext uri="{FF2B5EF4-FFF2-40B4-BE49-F238E27FC236}">
+                <a16:creationId xmlns:a16="http://schemas.microsoft.com/office/drawing/2014/main" id="{57DC60AD-0BC8-4F41-82BD-F656C24E747F}"/>
+              </a:ext>
+            </a:extLst>
+          </p:cNvPr>
+          <p:cNvSpPr>
+            <a:spLocks xmlns:a="http://schemas.openxmlformats.org/drawingml/2006/main" noGrp="1"/>
+          </p:cNvSpPr>
+          <p:nvPr/>
+        </p:nvSpPr>
+        <p:spPr>
+          <a:xfrm xmlns:a="http://schemas.openxmlformats.org/drawingml/2006/main">
+            <a:off x="1076325" y="2238375"/>
+            <a:ext cx="4762500" cy="895350"/>
+          </a:xfrm>
+          <a:prstGeom xmlns:a="http://schemas.openxmlformats.org/drawingml/2006/main" prst="rect">
+            <a:avLst/>
+          </a:prstGeom>
+          <a:noFill xmlns:a="http://schemas.openxmlformats.org/drawingml/2006/main"/>
+          <a:ln xmlns:a="http://schemas.openxmlformats.org/drawingml/2006/main" w="0">
+            <a:noFill/>
+            <a:prstDash val="solid"/>
+          </a:ln>
+        </p:spPr>
+        <p:txBody>
+          <a:bodyPr xmlns:a="http://schemas.openxmlformats.org/drawingml/2006/main" anchor="t">
+            <a:normAutofit fontScale="100000"/>
+          </a:bodyPr>
+          <a:lstStyle xmlns:a="http://schemas.openxmlformats.org/drawingml/2006/main"/>
+          <a:p xmlns:a="http://schemas.openxmlformats.org/drawingml/2006/main">
+            <a:pPr algn="l">
+              <a:defRPr sz="1575" b="1">
+                <a:solidFill>
+                  <a:srgbClr val="111111"/>
+                </a:solidFill>
+                <a:latin typeface="Helvetica Neue"/>
+                <a:ea typeface="Helvetica Neue"/>
+                <a:cs typeface="Helvetica Neue"/>
+              </a:defRPr>
+            </a:pPr>
+            <a:r>
+              <a:rPr sz="1575" b="1">
+                <a:solidFill>
+                  <a:srgbClr val="111111"/>
+                </a:solidFill>
+                <a:latin typeface="Helvetica Neue"/>
+                <a:ea typeface="Helvetica Neue"/>
+                <a:cs typeface="Helvetica Neue"/>
+              </a:rPr>
+              <a:t>What belongs in a robust agent profile?</a:t>
+            </a:r>
+          </a:p>
+        </p:txBody>
+      </p:sp>
+      <p:sp>
+        <p:nvSpPr>
+          <p:cNvPr id="8" name="exam-number-2">
+            <a:extLst xmlns:a="http://schemas.openxmlformats.org/drawingml/2006/main">
+              <a:ext uri="{FF2B5EF4-FFF2-40B4-BE49-F238E27FC236}">
+                <a16:creationId xmlns:a16="http://schemas.microsoft.com/office/drawing/2014/main" id="{B02C4B93-B1D0-4EDC-B065-FF7B21AB2292}"/>
+              </a:ext>
+            </a:extLst>
+          </p:cNvPr>
+          <p:cNvSpPr>
+            <a:spLocks xmlns:a="http://schemas.openxmlformats.org/drawingml/2006/main" noGrp="1"/>
+          </p:cNvSpPr>
+          <p:nvPr/>
+        </p:nvSpPr>
+        <p:spPr>
+          <a:xfrm xmlns:a="http://schemas.openxmlformats.org/drawingml/2006/main">
+            <a:off x="6191250" y="2238375"/>
+            <a:ext cx="590550" cy="400050"/>
+          </a:xfrm>
+          <a:prstGeom xmlns:a="http://schemas.openxmlformats.org/drawingml/2006/main" prst="rect">
+            <a:avLst/>
+          </a:prstGeom>
+          <a:noFill xmlns:a="http://schemas.openxmlformats.org/drawingml/2006/main"/>
+          <a:ln xmlns:a="http://schemas.openxmlformats.org/drawingml/2006/main" w="0">
+            <a:noFill/>
+            <a:prstDash val="solid"/>
+          </a:ln>
+        </p:spPr>
+        <p:txBody>
+          <a:bodyPr xmlns:a="http://schemas.openxmlformats.org/drawingml/2006/main" anchor="t">
+            <a:noAutofit/>
+          </a:bodyPr>
+          <a:lstStyle xmlns:a="http://schemas.openxmlformats.org/drawingml/2006/main"/>
+          <a:p xmlns:a="http://schemas.openxmlformats.org/drawingml/2006/main">
+            <a:pPr algn="l">
+              <a:defRPr sz="1725" b="1">
+                <a:solidFill>
+                  <a:srgbClr val="B9F15B"/>
+                </a:solidFill>
+                <a:latin typeface="Helvetica Neue"/>
+                <a:ea typeface="Helvetica Neue"/>
+                <a:cs typeface="Helvetica Neue"/>
+              </a:defRPr>
+            </a:pPr>
+            <a:r>
+              <a:rPr sz="1725" b="1">
+                <a:solidFill>
+                  <a:srgbClr val="B9F15B"/>
+                </a:solidFill>
+                <a:latin typeface="Helvetica Neue"/>
+                <a:ea typeface="Helvetica Neue"/>
+                <a:cs typeface="Helvetica Neue"/>
+              </a:rPr>
+              <a:t>02</a:t>
+            </a:r>
+          </a:p>
+        </p:txBody>
+      </p:sp>
+      <p:sp>
+        <p:nvSpPr>
+          <p:cNvPr id="9" name="exam-question-2">
+            <a:extLst xmlns:a="http://schemas.openxmlformats.org/drawingml/2006/main">
+              <a:ext uri="{FF2B5EF4-FFF2-40B4-BE49-F238E27FC236}">
+                <a16:creationId xmlns:a16="http://schemas.microsoft.com/office/drawing/2014/main" id="{493C9E95-7197-4AA2-97B0-17BD5C3C0843}"/>
+              </a:ext>
+            </a:extLst>
+          </p:cNvPr>
+          <p:cNvSpPr>
+            <a:spLocks xmlns:a="http://schemas.openxmlformats.org/drawingml/2006/main" noGrp="1"/>
+          </p:cNvSpPr>
+          <p:nvPr/>
+        </p:nvSpPr>
+        <p:spPr>
+          <a:xfrm xmlns:a="http://schemas.openxmlformats.org/drawingml/2006/main">
+            <a:off x="6877050" y="2238375"/>
+            <a:ext cx="4762500" cy="895350"/>
+          </a:xfrm>
+          <a:prstGeom xmlns:a="http://schemas.openxmlformats.org/drawingml/2006/main" prst="rect">
+            <a:avLst/>
+          </a:prstGeom>
+          <a:noFill xmlns:a="http://schemas.openxmlformats.org/drawingml/2006/main"/>
+          <a:ln xmlns:a="http://schemas.openxmlformats.org/drawingml/2006/main" w="0">
+            <a:noFill/>
+            <a:prstDash val="solid"/>
+          </a:ln>
+        </p:spPr>
+        <p:txBody>
+          <a:bodyPr xmlns:a="http://schemas.openxmlformats.org/drawingml/2006/main" anchor="t">
+            <a:normAutofit fontScale="100000"/>
+          </a:bodyPr>
+          <a:lstStyle xmlns:a="http://schemas.openxmlformats.org/drawingml/2006/main"/>
+          <a:p xmlns:a="http://schemas.openxmlformats.org/drawingml/2006/main">
+            <a:pPr algn="l">
+              <a:defRPr sz="1575" b="1">
+                <a:solidFill>
+                  <a:srgbClr val="111111"/>
+                </a:solidFill>
+                <a:latin typeface="Helvetica Neue"/>
+                <a:ea typeface="Helvetica Neue"/>
+                <a:cs typeface="Helvetica Neue"/>
+              </a:defRPr>
+            </a:pPr>
+            <a:r>
+              <a:rPr sz="1575" b="1">
+                <a:solidFill>
+                  <a:srgbClr val="111111"/>
+                </a:solidFill>
+                <a:latin typeface="Helvetica Neue"/>
+                <a:ea typeface="Helvetica Neue"/>
+                <a:cs typeface="Helvetica Neue"/>
+              </a:rPr>
+              <a:t>Who produces each part of Thought-Action-Observation?</a:t>
+            </a:r>
+          </a:p>
+        </p:txBody>
+      </p:sp>
+      <p:sp>
+        <p:nvSpPr>
+          <p:cNvPr id="10" name="exam-number-3">
+            <a:extLst xmlns:a="http://schemas.openxmlformats.org/drawingml/2006/main">
+              <a:ext uri="{FF2B5EF4-FFF2-40B4-BE49-F238E27FC236}">
+                <a16:creationId xmlns:a16="http://schemas.microsoft.com/office/drawing/2014/main" id="{F0C9B5EE-E02B-4C37-8D32-386FE05DB806}"/>
+              </a:ext>
+            </a:extLst>
+          </p:cNvPr>
+          <p:cNvSpPr>
+            <a:spLocks xmlns:a="http://schemas.openxmlformats.org/drawingml/2006/main" noGrp="1"/>
+          </p:cNvSpPr>
+          <p:nvPr/>
+        </p:nvSpPr>
+        <p:spPr>
+          <a:xfrm xmlns:a="http://schemas.openxmlformats.org/drawingml/2006/main">
+            <a:off x="390525" y="3495675"/>
+            <a:ext cx="590550" cy="400050"/>
+          </a:xfrm>
+          <a:prstGeom xmlns:a="http://schemas.openxmlformats.org/drawingml/2006/main" prst="rect">
+            <a:avLst/>
+          </a:prstGeom>
+          <a:noFill xmlns:a="http://schemas.openxmlformats.org/drawingml/2006/main"/>
+          <a:ln xmlns:a="http://schemas.openxmlformats.org/drawingml/2006/main" w="0">
+            <a:noFill/>
+            <a:prstDash val="solid"/>
+          </a:ln>
+        </p:spPr>
+        <p:txBody>
+          <a:bodyPr xmlns:a="http://schemas.openxmlformats.org/drawingml/2006/main" anchor="t">
+            <a:noAutofit/>
+          </a:bodyPr>
+          <a:lstStyle xmlns:a="http://schemas.openxmlformats.org/drawingml/2006/main"/>
+          <a:p xmlns:a="http://schemas.openxmlformats.org/drawingml/2006/main">
+            <a:pPr algn="l">
+              <a:defRPr sz="1725" b="1">
+                <a:solidFill>
+                  <a:srgbClr val="B9F15B"/>
+                </a:solidFill>
+                <a:latin typeface="Helvetica Neue"/>
+                <a:ea typeface="Helvetica Neue"/>
+                <a:cs typeface="Helvetica Neue"/>
+              </a:defRPr>
+            </a:pPr>
+            <a:r>
+              <a:rPr sz="1725" b="1">
+                <a:solidFill>
+                  <a:srgbClr val="B9F15B"/>
+                </a:solidFill>
+                <a:latin typeface="Helvetica Neue"/>
+                <a:ea typeface="Helvetica Neue"/>
+                <a:cs typeface="Helvetica Neue"/>
+              </a:rPr>
+              <a:t>03</a:t>
+            </a:r>
+          </a:p>
+        </p:txBody>
+      </p:sp>
+      <p:sp>
+        <p:nvSpPr>
+          <p:cNvPr id="11" name="exam-question-3">
+            <a:extLst xmlns:a="http://schemas.openxmlformats.org/drawingml/2006/main">
+              <a:ext uri="{FF2B5EF4-FFF2-40B4-BE49-F238E27FC236}">
+                <a16:creationId xmlns:a16="http://schemas.microsoft.com/office/drawing/2014/main" id="{C95830C2-5DDC-49B9-BEB1-B7F511A3FE50}"/>
+              </a:ext>
+            </a:extLst>
+          </p:cNvPr>
+          <p:cNvSpPr>
+            <a:spLocks xmlns:a="http://schemas.openxmlformats.org/drawingml/2006/main" noGrp="1"/>
+          </p:cNvSpPr>
+          <p:nvPr/>
+        </p:nvSpPr>
+        <p:spPr>
+          <a:xfrm xmlns:a="http://schemas.openxmlformats.org/drawingml/2006/main">
+            <a:off x="1076325" y="3495675"/>
+            <a:ext cx="4762500" cy="895350"/>
+          </a:xfrm>
+          <a:prstGeom xmlns:a="http://schemas.openxmlformats.org/drawingml/2006/main" prst="rect">
+            <a:avLst/>
+          </a:prstGeom>
+          <a:noFill xmlns:a="http://schemas.openxmlformats.org/drawingml/2006/main"/>
+          <a:ln xmlns:a="http://schemas.openxmlformats.org/drawingml/2006/main" w="0">
+            <a:noFill/>
+            <a:prstDash val="solid"/>
+          </a:ln>
+        </p:spPr>
+        <p:txBody>
+          <a:bodyPr xmlns:a="http://schemas.openxmlformats.org/drawingml/2006/main" anchor="t">
+            <a:normAutofit fontScale="100000"/>
+          </a:bodyPr>
+          <a:lstStyle xmlns:a="http://schemas.openxmlformats.org/drawingml/2006/main"/>
+          <a:p xmlns:a="http://schemas.openxmlformats.org/drawingml/2006/main">
+            <a:pPr algn="l">
+              <a:defRPr sz="1575" b="1">
+                <a:solidFill>
+                  <a:srgbClr val="111111"/>
+                </a:solidFill>
+                <a:latin typeface="Helvetica Neue"/>
+                <a:ea typeface="Helvetica Neue"/>
+                <a:cs typeface="Helvetica Neue"/>
+              </a:defRPr>
+            </a:pPr>
+            <a:r>
+              <a:rPr sz="1575" b="1">
+                <a:solidFill>
+                  <a:srgbClr val="111111"/>
+                </a:solidFill>
+                <a:latin typeface="Helvetica Neue"/>
+                <a:ea typeface="Helvetica Neue"/>
+                <a:cs typeface="Helvetica Neue"/>
+              </a:rPr>
+              <a:t>What can a supported stop sequence prevent, and what must the runtime still check?</a:t>
+            </a:r>
+          </a:p>
+        </p:txBody>
+      </p:sp>
+      <p:sp>
+        <p:nvSpPr>
+          <p:cNvPr id="12" name="exam-number-4">
+            <a:extLst xmlns:a="http://schemas.openxmlformats.org/drawingml/2006/main">
+              <a:ext uri="{FF2B5EF4-FFF2-40B4-BE49-F238E27FC236}">
+                <a16:creationId xmlns:a16="http://schemas.microsoft.com/office/drawing/2014/main" id="{D35FA9B2-C710-43A1-902F-831DE28B2B89}"/>
+              </a:ext>
+            </a:extLst>
+          </p:cNvPr>
+          <p:cNvSpPr>
+            <a:spLocks xmlns:a="http://schemas.openxmlformats.org/drawingml/2006/main" noGrp="1"/>
+          </p:cNvSpPr>
+          <p:nvPr/>
+        </p:nvSpPr>
+        <p:spPr>
+          <a:xfrm xmlns:a="http://schemas.openxmlformats.org/drawingml/2006/main">
+            <a:off x="6191250" y="3495675"/>
+            <a:ext cx="590550" cy="400050"/>
+          </a:xfrm>
+          <a:prstGeom xmlns:a="http://schemas.openxmlformats.org/drawingml/2006/main" prst="rect">
+            <a:avLst/>
+          </a:prstGeom>
+          <a:noFill xmlns:a="http://schemas.openxmlformats.org/drawingml/2006/main"/>
+          <a:ln xmlns:a="http://schemas.openxmlformats.org/drawingml/2006/main" w="0">
+            <a:noFill/>
+            <a:prstDash val="solid"/>
+          </a:ln>
+        </p:spPr>
+        <p:txBody>
+          <a:bodyPr xmlns:a="http://schemas.openxmlformats.org/drawingml/2006/main" anchor="t">
+            <a:noAutofit/>
+          </a:bodyPr>
+          <a:lstStyle xmlns:a="http://schemas.openxmlformats.org/drawingml/2006/main"/>
+          <a:p xmlns:a="http://schemas.openxmlformats.org/drawingml/2006/main">
+            <a:pPr algn="l">
+              <a:defRPr sz="1725" b="1">
+                <a:solidFill>
+                  <a:srgbClr val="B9F15B"/>
+                </a:solidFill>
+                <a:latin typeface="Helvetica Neue"/>
+                <a:ea typeface="Helvetica Neue"/>
+                <a:cs typeface="Helvetica Neue"/>
+              </a:defRPr>
+            </a:pPr>
+            <a:r>
+              <a:rPr sz="1725" b="1">
+                <a:solidFill>
+                  <a:srgbClr val="B9F15B"/>
+                </a:solidFill>
+                <a:latin typeface="Helvetica Neue"/>
+                <a:ea typeface="Helvetica Neue"/>
+                <a:cs typeface="Helvetica Neue"/>
+              </a:rPr>
+              <a:t>04</a:t>
+            </a:r>
+          </a:p>
+        </p:txBody>
+      </p:sp>
+      <p:sp>
+        <p:nvSpPr>
+          <p:cNvPr id="13" name="exam-question-4">
+            <a:extLst xmlns:a="http://schemas.openxmlformats.org/drawingml/2006/main">
+              <a:ext uri="{FF2B5EF4-FFF2-40B4-BE49-F238E27FC236}">
+                <a16:creationId xmlns:a16="http://schemas.microsoft.com/office/drawing/2014/main" id="{47625426-F50B-4CFD-97C4-1F66B993A732}"/>
+              </a:ext>
+            </a:extLst>
+          </p:cNvPr>
+          <p:cNvSpPr>
+            <a:spLocks xmlns:a="http://schemas.openxmlformats.org/drawingml/2006/main" noGrp="1"/>
+          </p:cNvSpPr>
+          <p:nvPr/>
+        </p:nvSpPr>
+        <p:spPr>
+          <a:xfrm xmlns:a="http://schemas.openxmlformats.org/drawingml/2006/main">
+            <a:off x="6877050" y="3495675"/>
+            <a:ext cx="4762500" cy="895350"/>
+          </a:xfrm>
+          <a:prstGeom xmlns:a="http://schemas.openxmlformats.org/drawingml/2006/main" prst="rect">
+            <a:avLst/>
+          </a:prstGeom>
+          <a:noFill xmlns:a="http://schemas.openxmlformats.org/drawingml/2006/main"/>
+          <a:ln xmlns:a="http://schemas.openxmlformats.org/drawingml/2006/main" w="0">
+            <a:noFill/>
+            <a:prstDash val="solid"/>
+          </a:ln>
+        </p:spPr>
+        <p:txBody>
+          <a:bodyPr xmlns:a="http://schemas.openxmlformats.org/drawingml/2006/main" anchor="t">
+            <a:normAutofit fontScale="100000"/>
+          </a:bodyPr>
+          <a:lstStyle xmlns:a="http://schemas.openxmlformats.org/drawingml/2006/main"/>
+          <a:p xmlns:a="http://schemas.openxmlformats.org/drawingml/2006/main">
+            <a:pPr algn="l">
+              <a:defRPr sz="1575" b="1">
+                <a:solidFill>
+                  <a:srgbClr val="111111"/>
+                </a:solidFill>
+                <a:latin typeface="Helvetica Neue"/>
+                <a:ea typeface="Helvetica Neue"/>
+                <a:cs typeface="Helvetica Neue"/>
+              </a:defRPr>
+            </a:pPr>
+            <a:r>
+              <a:rPr sz="1575" b="1">
+                <a:solidFill>
+                  <a:srgbClr val="111111"/>
+                </a:solidFill>
+                <a:latin typeface="Helvetica Neue"/>
+                <a:ea typeface="Helvetica Neue"/>
+                <a:cs typeface="Helvetica Neue"/>
+              </a:rPr>
+              <a:t>Compare text parsing with native function calling.</a:t>
+            </a:r>
+          </a:p>
+        </p:txBody>
+      </p:sp>
+      <p:sp>
+        <p:nvSpPr>
+          <p:cNvPr id="14" name="exam-number-5">
+            <a:extLst xmlns:a="http://schemas.openxmlformats.org/drawingml/2006/main">
+              <a:ext uri="{FF2B5EF4-FFF2-40B4-BE49-F238E27FC236}">
+                <a16:creationId xmlns:a16="http://schemas.microsoft.com/office/drawing/2014/main" id="{6C9D70DF-63AA-443C-B45A-CCC3591AE00A}"/>
+              </a:ext>
+            </a:extLst>
+          </p:cNvPr>
+          <p:cNvSpPr>
+            <a:spLocks xmlns:a="http://schemas.openxmlformats.org/drawingml/2006/main" noGrp="1"/>
+          </p:cNvSpPr>
+          <p:nvPr/>
+        </p:nvSpPr>
+        <p:spPr>
+          <a:xfrm xmlns:a="http://schemas.openxmlformats.org/drawingml/2006/main">
+            <a:off x="390525" y="4752975"/>
+            <a:ext cx="590550" cy="400050"/>
+          </a:xfrm>
+          <a:prstGeom xmlns:a="http://schemas.openxmlformats.org/drawingml/2006/main" prst="rect">
+            <a:avLst/>
+          </a:prstGeom>
+          <a:noFill xmlns:a="http://schemas.openxmlformats.org/drawingml/2006/main"/>
+          <a:ln xmlns:a="http://schemas.openxmlformats.org/drawingml/2006/main" w="0">
+            <a:noFill/>
+            <a:prstDash val="solid"/>
+          </a:ln>
+        </p:spPr>
+        <p:txBody>
+          <a:bodyPr xmlns:a="http://schemas.openxmlformats.org/drawingml/2006/main" anchor="t">
+            <a:noAutofit/>
+          </a:bodyPr>
+          <a:lstStyle xmlns:a="http://schemas.openxmlformats.org/drawingml/2006/main"/>
+          <a:p xmlns:a="http://schemas.openxmlformats.org/drawingml/2006/main">
+            <a:pPr algn="l">
+              <a:defRPr sz="1725" b="1">
+                <a:solidFill>
+                  <a:srgbClr val="B9F15B"/>
+                </a:solidFill>
+                <a:latin typeface="Helvetica Neue"/>
+                <a:ea typeface="Helvetica Neue"/>
+                <a:cs typeface="Helvetica Neue"/>
+              </a:defRPr>
+            </a:pPr>
+            <a:r>
+              <a:rPr sz="1725" b="1">
+                <a:solidFill>
+                  <a:srgbClr val="B9F15B"/>
+                </a:solidFill>
+                <a:latin typeface="Helvetica Neue"/>
+                <a:ea typeface="Helvetica Neue"/>
+                <a:cs typeface="Helvetica Neue"/>
+              </a:rPr>
+              <a:t>05</a:t>
+            </a:r>
+          </a:p>
+        </p:txBody>
+      </p:sp>
+      <p:sp>
+        <p:nvSpPr>
+          <p:cNvPr id="15" name="exam-question-5">
+            <a:extLst xmlns:a="http://schemas.openxmlformats.org/drawingml/2006/main">
+              <a:ext uri="{FF2B5EF4-FFF2-40B4-BE49-F238E27FC236}">
+                <a16:creationId xmlns:a16="http://schemas.microsoft.com/office/drawing/2014/main" id="{CA4281FA-8D0B-4A82-9840-9C42EEC5B229}"/>
+              </a:ext>
+            </a:extLst>
+          </p:cNvPr>
+          <p:cNvSpPr>
+            <a:spLocks xmlns:a="http://schemas.openxmlformats.org/drawingml/2006/main" noGrp="1"/>
+          </p:cNvSpPr>
+          <p:nvPr/>
+        </p:nvSpPr>
+        <p:spPr>
+          <a:xfrm xmlns:a="http://schemas.openxmlformats.org/drawingml/2006/main">
+            <a:off x="1076325" y="4752975"/>
+            <a:ext cx="4762500" cy="895350"/>
+          </a:xfrm>
+          <a:prstGeom xmlns:a="http://schemas.openxmlformats.org/drawingml/2006/main" prst="rect">
+            <a:avLst/>
+          </a:prstGeom>
+          <a:noFill xmlns:a="http://schemas.openxmlformats.org/drawingml/2006/main"/>
+          <a:ln xmlns:a="http://schemas.openxmlformats.org/drawingml/2006/main" w="0">
+            <a:noFill/>
+            <a:prstDash val="solid"/>
+          </a:ln>
+        </p:spPr>
+        <p:txBody>
+          <a:bodyPr xmlns:a="http://schemas.openxmlformats.org/drawingml/2006/main" anchor="t">
+            <a:normAutofit fontScale="100000"/>
+          </a:bodyPr>
+          <a:lstStyle xmlns:a="http://schemas.openxmlformats.org/drawingml/2006/main"/>
+          <a:p xmlns:a="http://schemas.openxmlformats.org/drawingml/2006/main">
+            <a:pPr algn="l">
+              <a:defRPr sz="1575" b="1">
+                <a:solidFill>
+                  <a:srgbClr val="111111"/>
+                </a:solidFill>
+                <a:latin typeface="Helvetica Neue"/>
+                <a:ea typeface="Helvetica Neue"/>
+                <a:cs typeface="Helvetica Neue"/>
+              </a:defRPr>
+            </a:pPr>
+            <a:r>
+              <a:rPr sz="1575" b="1">
+                <a:solidFill>
+                  <a:srgbClr val="111111"/>
+                </a:solidFill>
+                <a:latin typeface="Helvetica Neue"/>
+                <a:ea typeface="Helvetica Neue"/>
+                <a:cs typeface="Helvetica Neue"/>
+              </a:rPr>
+              <a:t>List the required termination conditions for a safe loop.</a:t>
+            </a:r>
+          </a:p>
+        </p:txBody>
+      </p:sp>
+      <p:sp>
+        <p:nvSpPr>
+          <p:cNvPr id="16" name="exam-number-6">
+            <a:extLst xmlns:a="http://schemas.openxmlformats.org/drawingml/2006/main">
+              <a:ext uri="{FF2B5EF4-FFF2-40B4-BE49-F238E27FC236}">
+                <a16:creationId xmlns:a16="http://schemas.microsoft.com/office/drawing/2014/main" id="{6AF31780-4889-454D-848F-D9CB7C120D4C}"/>
+              </a:ext>
+            </a:extLst>
+          </p:cNvPr>
+          <p:cNvSpPr>
+            <a:spLocks xmlns:a="http://schemas.openxmlformats.org/drawingml/2006/main" noGrp="1"/>
+          </p:cNvSpPr>
+          <p:nvPr/>
+        </p:nvSpPr>
+        <p:spPr>
+          <a:xfrm xmlns:a="http://schemas.openxmlformats.org/drawingml/2006/main">
+            <a:off x="6191250" y="4752975"/>
+            <a:ext cx="590550" cy="400050"/>
+          </a:xfrm>
+          <a:prstGeom xmlns:a="http://schemas.openxmlformats.org/drawingml/2006/main" prst="rect">
+            <a:avLst/>
+          </a:prstGeom>
+          <a:noFill xmlns:a="http://schemas.openxmlformats.org/drawingml/2006/main"/>
+          <a:ln xmlns:a="http://schemas.openxmlformats.org/drawingml/2006/main" w="0">
+            <a:noFill/>
+            <a:prstDash val="solid"/>
+          </a:ln>
+        </p:spPr>
+        <p:txBody>
+          <a:bodyPr xmlns:a="http://schemas.openxmlformats.org/drawingml/2006/main" anchor="t">
+            <a:noAutofit/>
+          </a:bodyPr>
+          <a:lstStyle xmlns:a="http://schemas.openxmlformats.org/drawingml/2006/main"/>
+          <a:p xmlns:a="http://schemas.openxmlformats.org/drawingml/2006/main">
+            <a:pPr algn="l">
+              <a:defRPr sz="1725" b="1">
+                <a:solidFill>
+                  <a:srgbClr val="B9F15B"/>
+                </a:solidFill>
+                <a:latin typeface="Helvetica Neue"/>
+                <a:ea typeface="Helvetica Neue"/>
+                <a:cs typeface="Helvetica Neue"/>
+              </a:defRPr>
+            </a:pPr>
+            <a:r>
+              <a:rPr sz="1725" b="1">
+                <a:solidFill>
+                  <a:srgbClr val="B9F15B"/>
+                </a:solidFill>
+                <a:latin typeface="Helvetica Neue"/>
+                <a:ea typeface="Helvetica Neue"/>
+                <a:cs typeface="Helvetica Neue"/>
+              </a:rPr>
+              <a:t>06</a:t>
+            </a:r>
+          </a:p>
+        </p:txBody>
+      </p:sp>
+      <p:sp>
+        <p:nvSpPr>
+          <p:cNvPr id="17" name="exam-question-6">
+            <a:extLst xmlns:a="http://schemas.openxmlformats.org/drawingml/2006/main">
+              <a:ext uri="{FF2B5EF4-FFF2-40B4-BE49-F238E27FC236}">
+                <a16:creationId xmlns:a16="http://schemas.microsoft.com/office/drawing/2014/main" id="{5F540418-E924-43F3-86F3-2432EBBDD4EC}"/>
+              </a:ext>
+            </a:extLst>
+          </p:cNvPr>
+          <p:cNvSpPr>
+            <a:spLocks xmlns:a="http://schemas.openxmlformats.org/drawingml/2006/main" noGrp="1"/>
+          </p:cNvSpPr>
+          <p:nvPr/>
+        </p:nvSpPr>
+        <p:spPr>
+          <a:xfrm xmlns:a="http://schemas.openxmlformats.org/drawingml/2006/main">
+            <a:off x="6877050" y="4752975"/>
+            <a:ext cx="4762500" cy="895350"/>
+          </a:xfrm>
+          <a:prstGeom xmlns:a="http://schemas.openxmlformats.org/drawingml/2006/main" prst="rect">
+            <a:avLst/>
+          </a:prstGeom>
+          <a:noFill xmlns:a="http://schemas.openxmlformats.org/drawingml/2006/main"/>
+          <a:ln xmlns:a="http://schemas.openxmlformats.org/drawingml/2006/main" w="0">
+            <a:noFill/>
+            <a:prstDash val="solid"/>
+          </a:ln>
+        </p:spPr>
+        <p:txBody>
+          <a:bodyPr xmlns:a="http://schemas.openxmlformats.org/drawingml/2006/main" anchor="t">
+            <a:normAutofit fontScale="100000"/>
+          </a:bodyPr>
+          <a:lstStyle xmlns:a="http://schemas.openxmlformats.org/drawingml/2006/main"/>
+          <a:p xmlns:a="http://schemas.openxmlformats.org/drawingml/2006/main">
+            <a:pPr algn="l">
+              <a:defRPr sz="1575" b="1">
+                <a:solidFill>
+                  <a:srgbClr val="111111"/>
+                </a:solidFill>
+                <a:latin typeface="Helvetica Neue"/>
+                <a:ea typeface="Helvetica Neue"/>
+                <a:cs typeface="Helvetica Neue"/>
+              </a:defRPr>
+            </a:pPr>
+            <a:r>
+              <a:rPr sz="1575" b="1">
+                <a:solidFill>
+                  <a:srgbClr val="111111"/>
+                </a:solidFill>
+                <a:latin typeface="Helvetica Neue"/>
+                <a:ea typeface="Helvetica Neue"/>
+                <a:cs typeface="Helvetica Neue"/>
+              </a:rPr>
+              <a:t>Which state must survive the model, tool, and model round-trip?</a:t>
+            </a:r>
+          </a:p>
+        </p:txBody>
+      </p:sp>
+    </p:spTree>
+    <p:extLst>
+      <p:ext uri="{BB962C8B-B14F-4D97-AF65-F5344CB8AC3E}">
+        <p14:creationId xmlns:p14="http://schemas.microsoft.com/office/powerpoint/2010/main" val="1781387024"/>
+      </p:ext>
+    </p:extLst>
+  </p:cSld>
+</p:sld>
+</file>
+
+<file path=ppt/slides/slide11.xml><?xml version="1.0" encoding="utf-8"?>
 <p:sld xmlns:p="http://schemas.openxmlformats.org/presentationml/2006/main">
   <p:cSld>
     <p:bg>
@@ -2258,7 +3900,7 @@
           <p:cNvPr id="14" name="accent-line">
             <a:extLst xmlns:a="http://schemas.openxmlformats.org/drawingml/2006/main">
               <a:ext uri="{FF2B5EF4-FFF2-40B4-BE49-F238E27FC236}">
-                <a16:creationId xmlns:a16="http://schemas.microsoft.com/office/drawing/2014/main" id="{38A0BE04-AD85-4235-9B04-0EBA7AAFD0B2}"/>
+                <a16:creationId xmlns:a16="http://schemas.microsoft.com/office/drawing/2014/main" id="{86CAAA06-A39C-4305-882B-A68E1A2E6821}"/>
               </a:ext>
             </a:extLst>
           </p:cNvPr>
@@ -2291,7 +3933,7 @@
           <p:cNvPr id="2" name="chapter-label">
             <a:extLst xmlns:a="http://schemas.openxmlformats.org/drawingml/2006/main">
               <a:ext uri="{FF2B5EF4-FFF2-40B4-BE49-F238E27FC236}">
-                <a16:creationId xmlns:a16="http://schemas.microsoft.com/office/drawing/2014/main" id="{93B9A2A3-D62D-4BD6-9FA6-668B69E19511}"/>
+                <a16:creationId xmlns:a16="http://schemas.microsoft.com/office/drawing/2014/main" id="{43CCBC49-FEB4-47CE-86F7-516CB560FBE9}"/>
               </a:ext>
             </a:extLst>
           </p:cNvPr>
@@ -2349,7 +3991,7 @@
           <p:cNvPr id="3" name="slide-number">
             <a:extLst xmlns:a="http://schemas.openxmlformats.org/drawingml/2006/main">
               <a:ext uri="{FF2B5EF4-FFF2-40B4-BE49-F238E27FC236}">
-                <a16:creationId xmlns:a16="http://schemas.microsoft.com/office/drawing/2014/main" id="{0CC3CE41-1922-4869-ADFE-B70294731FC8}"/>
+                <a16:creationId xmlns:a16="http://schemas.microsoft.com/office/drawing/2014/main" id="{1FD10332-92DC-4E90-AE1C-CA234660F588}"/>
               </a:ext>
             </a:extLst>
           </p:cNvPr>
@@ -2397,7 +4039,7 @@
                 <a:ea typeface="Helvetica Neue"/>
                 <a:cs typeface="Helvetica Neue"/>
               </a:rPr>
-              <a:t>10</a:t>
+              <a:t>11</a:t>
             </a:r>
           </a:p>
         </p:txBody>
@@ -2407,7 +4049,7 @@
           <p:cNvPr id="4" name="chapter-footer">
             <a:extLst xmlns:a="http://schemas.openxmlformats.org/drawingml/2006/main">
               <a:ext uri="{FF2B5EF4-FFF2-40B4-BE49-F238E27FC236}">
-                <a16:creationId xmlns:a16="http://schemas.microsoft.com/office/drawing/2014/main" id="{14C17764-8B82-4878-AEAA-8C5C09BC5DC1}"/>
+                <a16:creationId xmlns:a16="http://schemas.microsoft.com/office/drawing/2014/main" id="{750AF3EC-33BD-48F9-AE89-A8C8248C45ED}"/>
               </a:ext>
             </a:extLst>
           </p:cNvPr>
@@ -2465,7 +4107,7 @@
           <p:cNvPr id="5" name="closing-title">
             <a:extLst xmlns:a="http://schemas.openxmlformats.org/drawingml/2006/main">
               <a:ext uri="{FF2B5EF4-FFF2-40B4-BE49-F238E27FC236}">
-                <a16:creationId xmlns:a16="http://schemas.microsoft.com/office/drawing/2014/main" id="{847F674C-574E-453A-AC0C-719235B182E8}"/>
+                <a16:creationId xmlns:a16="http://schemas.microsoft.com/office/drawing/2014/main" id="{486B2331-381F-4D8A-A3C5-5FB885A5E5ED}"/>
               </a:ext>
             </a:extLst>
           </p:cNvPr>
@@ -2523,7 +4165,7 @@
           <p:cNvPr id="6" name="takeaway-number-1">
             <a:extLst xmlns:a="http://schemas.openxmlformats.org/drawingml/2006/main">
               <a:ext uri="{FF2B5EF4-FFF2-40B4-BE49-F238E27FC236}">
-                <a16:creationId xmlns:a16="http://schemas.microsoft.com/office/drawing/2014/main" id="{F4664660-2C7F-40F1-8A01-929449A8EC27}"/>
+                <a16:creationId xmlns:a16="http://schemas.microsoft.com/office/drawing/2014/main" id="{841097A3-A310-420D-979E-3C8A3C35A723}"/>
               </a:ext>
             </a:extLst>
           </p:cNvPr>
@@ -2581,7 +4223,7 @@
           <p:cNvPr id="7" name="takeaway-1">
             <a:extLst xmlns:a="http://schemas.openxmlformats.org/drawingml/2006/main">
               <a:ext uri="{FF2B5EF4-FFF2-40B4-BE49-F238E27FC236}">
-                <a16:creationId xmlns:a16="http://schemas.microsoft.com/office/drawing/2014/main" id="{833A86AB-AB68-43B5-B9F3-58F3E0B02687}"/>
+                <a16:creationId xmlns:a16="http://schemas.microsoft.com/office/drawing/2014/main" id="{944B1765-AB4C-4D88-989D-B12E4D3D8387}"/>
               </a:ext>
             </a:extLst>
           </p:cNvPr>
@@ -2639,7 +4281,7 @@
           <p:cNvPr id="8" name="takeaway-number-2">
             <a:extLst xmlns:a="http://schemas.openxmlformats.org/drawingml/2006/main">
               <a:ext uri="{FF2B5EF4-FFF2-40B4-BE49-F238E27FC236}">
-                <a16:creationId xmlns:a16="http://schemas.microsoft.com/office/drawing/2014/main" id="{CA63FB5A-6074-44E5-A2A5-AF86456BF2B5}"/>
+                <a16:creationId xmlns:a16="http://schemas.microsoft.com/office/drawing/2014/main" id="{6ACDE9A5-809F-491C-AEF9-CA430286F14C}"/>
               </a:ext>
             </a:extLst>
           </p:cNvPr>
@@ -2697,7 +4339,7 @@
           <p:cNvPr id="9" name="takeaway-2">
             <a:extLst xmlns:a="http://schemas.openxmlformats.org/drawingml/2006/main">
               <a:ext uri="{FF2B5EF4-FFF2-40B4-BE49-F238E27FC236}">
-                <a16:creationId xmlns:a16="http://schemas.microsoft.com/office/drawing/2014/main" id="{B2020530-6B30-4EE7-9A7C-733095104AA2}"/>
+                <a16:creationId xmlns:a16="http://schemas.microsoft.com/office/drawing/2014/main" id="{388710CF-4374-460B-965E-3E4E86EB5D6C}"/>
               </a:ext>
             </a:extLst>
           </p:cNvPr>
@@ -2755,7 +4397,7 @@
           <p:cNvPr id="10" name="takeaway-number-3">
             <a:extLst xmlns:a="http://schemas.openxmlformats.org/drawingml/2006/main">
               <a:ext uri="{FF2B5EF4-FFF2-40B4-BE49-F238E27FC236}">
-                <a16:creationId xmlns:a16="http://schemas.microsoft.com/office/drawing/2014/main" id="{33DE702B-294E-4B7E-8657-5013CBAF631D}"/>
+                <a16:creationId xmlns:a16="http://schemas.microsoft.com/office/drawing/2014/main" id="{E6A81008-32D6-4794-9953-7DB559831D8B}"/>
               </a:ext>
             </a:extLst>
           </p:cNvPr>
@@ -2813,7 +4455,7 @@
           <p:cNvPr id="11" name="takeaway-3">
             <a:extLst xmlns:a="http://schemas.openxmlformats.org/drawingml/2006/main">
               <a:ext uri="{FF2B5EF4-FFF2-40B4-BE49-F238E27FC236}">
-                <a16:creationId xmlns:a16="http://schemas.microsoft.com/office/drawing/2014/main" id="{27C8748D-ECDD-44FE-B009-F99CA77C1363}"/>
+                <a16:creationId xmlns:a16="http://schemas.microsoft.com/office/drawing/2014/main" id="{CE512534-C7EB-4E58-BF03-2A3367D78ED1}"/>
               </a:ext>
             </a:extLst>
           </p:cNvPr>
@@ -2861,7 +4503,7 @@
                 <a:ea typeface="Helvetica Neue"/>
                 <a:cs typeface="Helvetica Neue"/>
               </a:rPr>
-              <a:t>Stop sequences and budgets are correctness features.</a:t>
+              <a:t>Validate the complete protocol and enforce runtime budgets.</a:t>
             </a:r>
           </a:p>
         </p:txBody>
@@ -2871,7 +4513,7 @@
           <p:cNvPr id="12" name="takeaway-number-4">
             <a:extLst xmlns:a="http://schemas.openxmlformats.org/drawingml/2006/main">
               <a:ext uri="{FF2B5EF4-FFF2-40B4-BE49-F238E27FC236}">
-                <a16:creationId xmlns:a16="http://schemas.microsoft.com/office/drawing/2014/main" id="{F248F9C9-47CC-4305-A981-01AE8CF2540F}"/>
+                <a16:creationId xmlns:a16="http://schemas.microsoft.com/office/drawing/2014/main" id="{173EEEF7-2C43-4A0E-BE24-2B4C75E5A0ED}"/>
               </a:ext>
             </a:extLst>
           </p:cNvPr>
@@ -2929,7 +4571,7 @@
           <p:cNvPr id="13" name="takeaway-4">
             <a:extLst xmlns:a="http://schemas.openxmlformats.org/drawingml/2006/main">
               <a:ext uri="{FF2B5EF4-FFF2-40B4-BE49-F238E27FC236}">
-                <a16:creationId xmlns:a16="http://schemas.microsoft.com/office/drawing/2014/main" id="{65C7EAB3-E7EE-4A80-9768-F762A97C3500}"/>
+                <a16:creationId xmlns:a16="http://schemas.microsoft.com/office/drawing/2014/main" id="{1511915A-1B16-485B-8945-292AC48E87C8}"/>
               </a:ext>
             </a:extLst>
           </p:cNvPr>
@@ -2985,7 +4627,533 @@
     </p:spTree>
     <p:extLst>
       <p:ext uri="{BB962C8B-B14F-4D97-AF65-F5344CB8AC3E}">
-        <p14:creationId xmlns:p14="http://schemas.microsoft.com/office/powerpoint/2010/main" val="826423022"/>
+        <p14:creationId xmlns:p14="http://schemas.microsoft.com/office/powerpoint/2010/main" val="2132782642"/>
+      </p:ext>
+    </p:extLst>
+  </p:cSld>
+</p:sld>
+</file>
+
+<file path=ppt/slides/slide12.xml><?xml version="1.0" encoding="utf-8"?>
+<p:sld xmlns:p="http://schemas.openxmlformats.org/presentationml/2006/main">
+  <p:cSld>
+    <p:bg>
+      <p:bgPr>
+        <a:solidFill xmlns:a="http://schemas.openxmlformats.org/drawingml/2006/main">
+          <a:srgbClr val="FFFFFF"/>
+        </a:solidFill>
+      </p:bgPr>
+    </p:bg>
+    <p:spTree>
+      <p:nvGrpSpPr>
+        <p:cNvPr id="1" name=""/>
+        <p:cNvGrpSpPr/>
+        <p:nvPr/>
+      </p:nvGrpSpPr>
+      <p:grpSpPr>
+        <a:xfrm xmlns:a="http://schemas.openxmlformats.org/drawingml/2006/main"/>
+      </p:grpSpPr>
+      <p:sp>
+        <p:nvSpPr>
+          <p:cNvPr id="10" name="accent-line">
+            <a:extLst xmlns:a="http://schemas.openxmlformats.org/drawingml/2006/main">
+              <a:ext uri="{FF2B5EF4-FFF2-40B4-BE49-F238E27FC236}">
+                <a16:creationId xmlns:a16="http://schemas.microsoft.com/office/drawing/2014/main" id="{A9EAD2E8-DAC4-45DE-8416-A4F0485F3316}"/>
+              </a:ext>
+            </a:extLst>
+          </p:cNvPr>
+          <p:cNvSpPr>
+            <a:spLocks xmlns:a="http://schemas.openxmlformats.org/drawingml/2006/main" noGrp="1"/>
+          </p:cNvSpPr>
+          <p:nvPr/>
+        </p:nvSpPr>
+        <p:spPr>
+          <a:xfrm xmlns:a="http://schemas.openxmlformats.org/drawingml/2006/main">
+            <a:off x="390525" y="304800"/>
+            <a:ext cx="11410950" cy="66675"/>
+          </a:xfrm>
+          <a:prstGeom xmlns:a="http://schemas.openxmlformats.org/drawingml/2006/main" prst="rect">
+            <a:avLst/>
+          </a:prstGeom>
+          <a:solidFill xmlns:a="http://schemas.openxmlformats.org/drawingml/2006/main">
+            <a:srgbClr val="B9F15B"/>
+          </a:solidFill>
+          <a:ln xmlns:a="http://schemas.openxmlformats.org/drawingml/2006/main" w="0">
+            <a:solidFill>
+              <a:srgbClr val="B9F15B"/>
+            </a:solidFill>
+            <a:prstDash val="solid"/>
+          </a:ln>
+        </p:spPr>
+      </p:sp>
+      <p:sp>
+        <p:nvSpPr>
+          <p:cNvPr id="2" name="chapter-label">
+            <a:extLst xmlns:a="http://schemas.openxmlformats.org/drawingml/2006/main">
+              <a:ext uri="{FF2B5EF4-FFF2-40B4-BE49-F238E27FC236}">
+                <a16:creationId xmlns:a16="http://schemas.microsoft.com/office/drawing/2014/main" id="{2CA1CF34-8F70-4EDC-A5CE-129647FCFDB9}"/>
+              </a:ext>
+            </a:extLst>
+          </p:cNvPr>
+          <p:cNvSpPr>
+            <a:spLocks xmlns:a="http://schemas.openxmlformats.org/drawingml/2006/main" noGrp="1"/>
+          </p:cNvSpPr>
+          <p:nvPr/>
+        </p:nvSpPr>
+        <p:spPr>
+          <a:xfrm xmlns:a="http://schemas.openxmlformats.org/drawingml/2006/main">
+            <a:off x="390525" y="466725"/>
+            <a:ext cx="4953000" cy="323850"/>
+          </a:xfrm>
+          <a:prstGeom xmlns:a="http://schemas.openxmlformats.org/drawingml/2006/main" prst="rect">
+            <a:avLst/>
+          </a:prstGeom>
+          <a:noFill xmlns:a="http://schemas.openxmlformats.org/drawingml/2006/main"/>
+          <a:ln xmlns:a="http://schemas.openxmlformats.org/drawingml/2006/main" w="0">
+            <a:noFill/>
+            <a:prstDash val="solid"/>
+          </a:ln>
+        </p:spPr>
+        <p:txBody>
+          <a:bodyPr xmlns:a="http://schemas.openxmlformats.org/drawingml/2006/main" anchor="t">
+            <a:noAutofit/>
+          </a:bodyPr>
+          <a:lstStyle xmlns:a="http://schemas.openxmlformats.org/drawingml/2006/main"/>
+          <a:p xmlns:a="http://schemas.openxmlformats.org/drawingml/2006/main">
+            <a:pPr algn="l">
+              <a:defRPr sz="1275" b="1">
+                <a:solidFill>
+                  <a:srgbClr val="5B5B57"/>
+                </a:solidFill>
+                <a:latin typeface="Helvetica Neue"/>
+                <a:ea typeface="Helvetica Neue"/>
+                <a:cs typeface="Helvetica Neue"/>
+              </a:defRPr>
+            </a:pPr>
+            <a:r>
+              <a:rPr sz="1275" b="1">
+                <a:solidFill>
+                  <a:srgbClr val="5B5B57"/>
+                </a:solidFill>
+                <a:latin typeface="Helvetica Neue"/>
+                <a:ea typeface="Helvetica Neue"/>
+                <a:cs typeface="Helvetica Neue"/>
+              </a:rPr>
+              <a:t>PRACTICE AND READING  /  03</a:t>
+            </a:r>
+          </a:p>
+        </p:txBody>
+      </p:sp>
+      <p:sp>
+        <p:nvSpPr>
+          <p:cNvPr id="3" name="slide-number">
+            <a:extLst xmlns:a="http://schemas.openxmlformats.org/drawingml/2006/main">
+              <a:ext uri="{FF2B5EF4-FFF2-40B4-BE49-F238E27FC236}">
+                <a16:creationId xmlns:a16="http://schemas.microsoft.com/office/drawing/2014/main" id="{CB09336E-8D7A-49A0-AB23-1EE6FD7399DC}"/>
+              </a:ext>
+            </a:extLst>
+          </p:cNvPr>
+          <p:cNvSpPr>
+            <a:spLocks xmlns:a="http://schemas.openxmlformats.org/drawingml/2006/main" noGrp="1"/>
+          </p:cNvSpPr>
+          <p:nvPr/>
+        </p:nvSpPr>
+        <p:spPr>
+          <a:xfrm xmlns:a="http://schemas.openxmlformats.org/drawingml/2006/main">
+            <a:off x="11049000" y="6286500"/>
+            <a:ext cx="742950" cy="266700"/>
+          </a:xfrm>
+          <a:prstGeom xmlns:a="http://schemas.openxmlformats.org/drawingml/2006/main" prst="rect">
+            <a:avLst/>
+          </a:prstGeom>
+          <a:noFill xmlns:a="http://schemas.openxmlformats.org/drawingml/2006/main"/>
+          <a:ln xmlns:a="http://schemas.openxmlformats.org/drawingml/2006/main" w="0">
+            <a:noFill/>
+            <a:prstDash val="solid"/>
+          </a:ln>
+        </p:spPr>
+        <p:txBody>
+          <a:bodyPr xmlns:a="http://schemas.openxmlformats.org/drawingml/2006/main" anchor="t">
+            <a:noAutofit/>
+          </a:bodyPr>
+          <a:lstStyle xmlns:a="http://schemas.openxmlformats.org/drawingml/2006/main"/>
+          <a:p xmlns:a="http://schemas.openxmlformats.org/drawingml/2006/main">
+            <a:pPr algn="r">
+              <a:defRPr sz="1200" b="0">
+                <a:solidFill>
+                  <a:srgbClr val="5B5B57"/>
+                </a:solidFill>
+                <a:latin typeface="Helvetica Neue"/>
+                <a:ea typeface="Helvetica Neue"/>
+                <a:cs typeface="Helvetica Neue"/>
+              </a:defRPr>
+            </a:pPr>
+            <a:r>
+              <a:rPr sz="1200" b="0">
+                <a:solidFill>
+                  <a:srgbClr val="5B5B57"/>
+                </a:solidFill>
+                <a:latin typeface="Helvetica Neue"/>
+                <a:ea typeface="Helvetica Neue"/>
+                <a:cs typeface="Helvetica Neue"/>
+              </a:rPr>
+              <a:t>12</a:t>
+            </a:r>
+          </a:p>
+        </p:txBody>
+      </p:sp>
+      <p:sp>
+        <p:nvSpPr>
+          <p:cNvPr id="4" name="chapter-footer">
+            <a:extLst xmlns:a="http://schemas.openxmlformats.org/drawingml/2006/main">
+              <a:ext uri="{FF2B5EF4-FFF2-40B4-BE49-F238E27FC236}">
+                <a16:creationId xmlns:a16="http://schemas.microsoft.com/office/drawing/2014/main" id="{E057BBBA-4638-44AE-87F9-E6C9E29E3420}"/>
+              </a:ext>
+            </a:extLst>
+          </p:cNvPr>
+          <p:cNvSpPr>
+            <a:spLocks xmlns:a="http://schemas.openxmlformats.org/drawingml/2006/main" noGrp="1"/>
+          </p:cNvSpPr>
+          <p:nvPr/>
+        </p:nvSpPr>
+        <p:spPr>
+          <a:xfrm xmlns:a="http://schemas.openxmlformats.org/drawingml/2006/main">
+            <a:off x="390525" y="6286500"/>
+            <a:ext cx="8191500" cy="266700"/>
+          </a:xfrm>
+          <a:prstGeom xmlns:a="http://schemas.openxmlformats.org/drawingml/2006/main" prst="rect">
+            <a:avLst/>
+          </a:prstGeom>
+          <a:noFill xmlns:a="http://schemas.openxmlformats.org/drawingml/2006/main"/>
+          <a:ln xmlns:a="http://schemas.openxmlformats.org/drawingml/2006/main" w="0">
+            <a:noFill/>
+            <a:prstDash val="solid"/>
+          </a:ln>
+        </p:spPr>
+        <p:txBody>
+          <a:bodyPr xmlns:a="http://schemas.openxmlformats.org/drawingml/2006/main" anchor="t">
+            <a:noAutofit/>
+          </a:bodyPr>
+          <a:lstStyle xmlns:a="http://schemas.openxmlformats.org/drawingml/2006/main"/>
+          <a:p xmlns:a="http://schemas.openxmlformats.org/drawingml/2006/main">
+            <a:pPr algn="l">
+              <a:defRPr sz="1125" b="0">
+                <a:solidFill>
+                  <a:srgbClr val="5B5B57"/>
+                </a:solidFill>
+                <a:latin typeface="Helvetica Neue"/>
+                <a:ea typeface="Helvetica Neue"/>
+                <a:cs typeface="Helvetica Neue"/>
+              </a:defRPr>
+            </a:pPr>
+            <a:r>
+              <a:rPr sz="1125" b="0">
+                <a:solidFill>
+                  <a:srgbClr val="5B5B57"/>
+                </a:solidFill>
+                <a:latin typeface="Helvetica Neue"/>
+                <a:ea typeface="Helvetica Neue"/>
+                <a:cs typeface="Helvetica Neue"/>
+              </a:rPr>
+              <a:t>Agent Anatomy and ReAct</a:t>
+            </a:r>
+          </a:p>
+        </p:txBody>
+      </p:sp>
+      <p:sp>
+        <p:nvSpPr>
+          <p:cNvPr id="5" name="practice-title">
+            <a:extLst xmlns:a="http://schemas.openxmlformats.org/drawingml/2006/main">
+              <a:ext uri="{FF2B5EF4-FFF2-40B4-BE49-F238E27FC236}">
+                <a16:creationId xmlns:a16="http://schemas.microsoft.com/office/drawing/2014/main" id="{79E82916-1E0E-416D-A85B-E2B02AD81E42}"/>
+              </a:ext>
+            </a:extLst>
+          </p:cNvPr>
+          <p:cNvSpPr>
+            <a:spLocks xmlns:a="http://schemas.openxmlformats.org/drawingml/2006/main" noGrp="1"/>
+          </p:cNvSpPr>
+          <p:nvPr/>
+        </p:nvSpPr>
+        <p:spPr>
+          <a:xfrm xmlns:a="http://schemas.openxmlformats.org/drawingml/2006/main">
+            <a:off x="390525" y="1000125"/>
+            <a:ext cx="11144250" cy="666750"/>
+          </a:xfrm>
+          <a:prstGeom xmlns:a="http://schemas.openxmlformats.org/drawingml/2006/main" prst="rect">
+            <a:avLst/>
+          </a:prstGeom>
+          <a:noFill xmlns:a="http://schemas.openxmlformats.org/drawingml/2006/main"/>
+          <a:ln xmlns:a="http://schemas.openxmlformats.org/drawingml/2006/main" w="0">
+            <a:noFill/>
+            <a:prstDash val="solid"/>
+          </a:ln>
+        </p:spPr>
+        <p:txBody>
+          <a:bodyPr xmlns:a="http://schemas.openxmlformats.org/drawingml/2006/main" anchor="t">
+            <a:normAutofit fontScale="100000"/>
+          </a:bodyPr>
+          <a:lstStyle xmlns:a="http://schemas.openxmlformats.org/drawingml/2006/main"/>
+          <a:p xmlns:a="http://schemas.openxmlformats.org/drawingml/2006/main">
+            <a:pPr algn="l">
+              <a:defRPr sz="3000" b="1">
+                <a:solidFill>
+                  <a:srgbClr val="111111"/>
+                </a:solidFill>
+                <a:latin typeface="Helvetica Neue"/>
+                <a:ea typeface="Helvetica Neue"/>
+                <a:cs typeface="Helvetica Neue"/>
+              </a:defRPr>
+            </a:pPr>
+            <a:r>
+              <a:rPr sz="3000" b="1">
+                <a:solidFill>
+                  <a:srgbClr val="111111"/>
+                </a:solidFill>
+                <a:latin typeface="Helvetica Neue"/>
+                <a:ea typeface="Helvetica Neue"/>
+                <a:cs typeface="Helvetica Neue"/>
+              </a:rPr>
+              <a:t>Evidence to submit</a:t>
+            </a:r>
+          </a:p>
+        </p:txBody>
+      </p:sp>
+      <p:sp>
+        <p:nvSpPr>
+          <p:cNvPr id="6" name="practice-task">
+            <a:extLst xmlns:a="http://schemas.openxmlformats.org/drawingml/2006/main">
+              <a:ext uri="{FF2B5EF4-FFF2-40B4-BE49-F238E27FC236}">
+                <a16:creationId xmlns:a16="http://schemas.microsoft.com/office/drawing/2014/main" id="{F07AA6CB-DAC9-4573-998B-0C8E84A4FEB2}"/>
+              </a:ext>
+            </a:extLst>
+          </p:cNvPr>
+          <p:cNvSpPr>
+            <a:spLocks xmlns:a="http://schemas.openxmlformats.org/drawingml/2006/main" noGrp="1"/>
+          </p:cNvSpPr>
+          <p:nvPr/>
+        </p:nvSpPr>
+        <p:spPr>
+          <a:xfrm xmlns:a="http://schemas.openxmlformats.org/drawingml/2006/main">
+            <a:off x="390525" y="2000250"/>
+            <a:ext cx="10953750" cy="1238250"/>
+          </a:xfrm>
+          <a:prstGeom xmlns:a="http://schemas.openxmlformats.org/drawingml/2006/main" prst="rect">
+            <a:avLst/>
+          </a:prstGeom>
+          <a:noFill xmlns:a="http://schemas.openxmlformats.org/drawingml/2006/main"/>
+          <a:ln xmlns:a="http://schemas.openxmlformats.org/drawingml/2006/main" w="0">
+            <a:noFill/>
+            <a:prstDash val="solid"/>
+          </a:ln>
+        </p:spPr>
+        <p:txBody>
+          <a:bodyPr xmlns:a="http://schemas.openxmlformats.org/drawingml/2006/main" anchor="t">
+            <a:normAutofit fontScale="100000"/>
+          </a:bodyPr>
+          <a:lstStyle xmlns:a="http://schemas.openxmlformats.org/drawingml/2006/main"/>
+          <a:p xmlns:a="http://schemas.openxmlformats.org/drawingml/2006/main">
+            <a:pPr algn="l">
+              <a:defRPr sz="1950" b="0">
+                <a:solidFill>
+                  <a:srgbClr val="111111"/>
+                </a:solidFill>
+                <a:latin typeface="Helvetica Neue"/>
+                <a:ea typeface="Helvetica Neue"/>
+                <a:cs typeface="Helvetica Neue"/>
+              </a:defRPr>
+            </a:pPr>
+            <a:r>
+              <a:rPr sz="1950" b="0">
+                <a:solidFill>
+                  <a:srgbClr val="111111"/>
+                </a:solidFill>
+                <a:latin typeface="Helvetica Neue"/>
+                <a:ea typeface="Helvetica Neue"/>
+                <a:cs typeface="Helvetica Neue"/>
+              </a:rPr>
+              <a:t>Complete Lab 5. Demonstrate that the second model request contains the executed tool result and its matching ID. Replace the registry with a fake and prove that the replacement runs.</a:t>
+            </a:r>
+          </a:p>
+        </p:txBody>
+      </p:sp>
+      <p:sp>
+        <p:nvSpPr>
+          <p:cNvPr id="7" name="practice-check">
+            <a:extLst xmlns:a="http://schemas.openxmlformats.org/drawingml/2006/main">
+              <a:ext uri="{FF2B5EF4-FFF2-40B4-BE49-F238E27FC236}">
+                <a16:creationId xmlns:a16="http://schemas.microsoft.com/office/drawing/2014/main" id="{DA955275-DBFF-463D-9950-A356D71CD114}"/>
+              </a:ext>
+            </a:extLst>
+          </p:cNvPr>
+          <p:cNvSpPr>
+            <a:spLocks xmlns:a="http://schemas.openxmlformats.org/drawingml/2006/main" noGrp="1"/>
+          </p:cNvSpPr>
+          <p:nvPr/>
+        </p:nvSpPr>
+        <p:spPr>
+          <a:xfrm xmlns:a="http://schemas.openxmlformats.org/drawingml/2006/main">
+            <a:off x="390525" y="3381375"/>
+            <a:ext cx="10953750" cy="1095375"/>
+          </a:xfrm>
+          <a:prstGeom xmlns:a="http://schemas.openxmlformats.org/drawingml/2006/main" prst="rect">
+            <a:avLst/>
+          </a:prstGeom>
+          <a:noFill xmlns:a="http://schemas.openxmlformats.org/drawingml/2006/main"/>
+          <a:ln xmlns:a="http://schemas.openxmlformats.org/drawingml/2006/main" w="0">
+            <a:noFill/>
+            <a:prstDash val="solid"/>
+          </a:ln>
+        </p:spPr>
+        <p:txBody>
+          <a:bodyPr xmlns:a="http://schemas.openxmlformats.org/drawingml/2006/main" anchor="t">
+            <a:normAutofit fontScale="100000"/>
+          </a:bodyPr>
+          <a:lstStyle xmlns:a="http://schemas.openxmlformats.org/drawingml/2006/main"/>
+          <a:p xmlns:a="http://schemas.openxmlformats.org/drawingml/2006/main">
+            <a:pPr algn="l">
+              <a:defRPr sz="1800" b="0">
+                <a:solidFill>
+                  <a:srgbClr val="5B5B57"/>
+                </a:solidFill>
+                <a:latin typeface="Helvetica Neue"/>
+                <a:ea typeface="Helvetica Neue"/>
+                <a:cs typeface="Helvetica Neue"/>
+              </a:defRPr>
+            </a:pPr>
+            <a:r>
+              <a:rPr sz="1800" b="0">
+                <a:solidFill>
+                  <a:srgbClr val="5B5B57"/>
+                </a:solidFill>
+                <a:latin typeface="Helvetica Neue"/>
+                <a:ea typeface="Helvetica Neue"/>
+                <a:cs typeface="Helvetica Neue"/>
+              </a:rPr>
+              <a:t>The offline round-trip and replacement-registry tests pass. A missing result or exhausted budget yields an explicit stop reason.</a:t>
+            </a:r>
+          </a:p>
+        </p:txBody>
+      </p:sp>
+      <p:sp>
+        <p:nvSpPr>
+          <p:cNvPr id="8" name="practice-readings">
+            <a:extLst xmlns:a="http://schemas.openxmlformats.org/drawingml/2006/main">
+              <a:ext uri="{FF2B5EF4-FFF2-40B4-BE49-F238E27FC236}">
+                <a16:creationId xmlns:a16="http://schemas.microsoft.com/office/drawing/2014/main" id="{48E701A3-177B-4AD4-BA80-5DCAD00A5A08}"/>
+              </a:ext>
+            </a:extLst>
+          </p:cNvPr>
+          <p:cNvSpPr>
+            <a:spLocks xmlns:a="http://schemas.openxmlformats.org/drawingml/2006/main" noGrp="1"/>
+          </p:cNvSpPr>
+          <p:nvPr/>
+        </p:nvSpPr>
+        <p:spPr>
+          <a:xfrm xmlns:a="http://schemas.openxmlformats.org/drawingml/2006/main">
+            <a:off x="390525" y="4667250"/>
+            <a:ext cx="10953750" cy="1000125"/>
+          </a:xfrm>
+          <a:prstGeom xmlns:a="http://schemas.openxmlformats.org/drawingml/2006/main" prst="rect">
+            <a:avLst/>
+          </a:prstGeom>
+          <a:noFill xmlns:a="http://schemas.openxmlformats.org/drawingml/2006/main"/>
+          <a:ln xmlns:a="http://schemas.openxmlformats.org/drawingml/2006/main" w="0">
+            <a:noFill/>
+            <a:prstDash val="solid"/>
+          </a:ln>
+        </p:spPr>
+        <p:txBody>
+          <a:bodyPr xmlns:a="http://schemas.openxmlformats.org/drawingml/2006/main" anchor="t">
+            <a:normAutofit fontScale="100000"/>
+          </a:bodyPr>
+          <a:lstStyle xmlns:a="http://schemas.openxmlformats.org/drawingml/2006/main"/>
+          <a:p xmlns:a="http://schemas.openxmlformats.org/drawingml/2006/main">
+            <a:pPr algn="l">
+              <a:defRPr sz="1425" b="0">
+                <a:solidFill>
+                  <a:srgbClr val="111111"/>
+                </a:solidFill>
+                <a:latin typeface="Helvetica Neue"/>
+                <a:ea typeface="Helvetica Neue"/>
+                <a:cs typeface="Helvetica Neue"/>
+              </a:defRPr>
+            </a:pPr>
+            <a:r>
+              <a:rPr sz="1425" b="0">
+                <a:solidFill>
+                  <a:srgbClr val="111111"/>
+                </a:solidFill>
+                <a:latin typeface="Helvetica Neue"/>
+                <a:ea typeface="Helvetica Neue"/>
+                <a:cs typeface="Helvetica Neue"/>
+              </a:rPr>
+              <a:t>S1  Gemini function calling</a:t>
+            </a:r>
+          </a:p>
+        </p:txBody>
+      </p:sp>
+      <p:sp>
+        <p:nvSpPr>
+          <p:cNvPr id="9" name="practice-lab">
+            <a:extLst xmlns:a="http://schemas.openxmlformats.org/drawingml/2006/main">
+              <a:ext uri="{FF2B5EF4-FFF2-40B4-BE49-F238E27FC236}">
+                <a16:creationId xmlns:a16="http://schemas.microsoft.com/office/drawing/2014/main" id="{033A0B54-CD05-4F59-84EB-49C85E98B18E}"/>
+              </a:ext>
+            </a:extLst>
+          </p:cNvPr>
+          <p:cNvSpPr>
+            <a:spLocks xmlns:a="http://schemas.openxmlformats.org/drawingml/2006/main" noGrp="1"/>
+          </p:cNvSpPr>
+          <p:nvPr/>
+        </p:nvSpPr>
+        <p:spPr>
+          <a:xfrm xmlns:a="http://schemas.openxmlformats.org/drawingml/2006/main">
+            <a:off x="390525" y="5857875"/>
+            <a:ext cx="10953750" cy="266700"/>
+          </a:xfrm>
+          <a:prstGeom xmlns:a="http://schemas.openxmlformats.org/drawingml/2006/main" prst="rect">
+            <a:avLst/>
+          </a:prstGeom>
+          <a:noFill xmlns:a="http://schemas.openxmlformats.org/drawingml/2006/main"/>
+          <a:ln xmlns:a="http://schemas.openxmlformats.org/drawingml/2006/main" w="0">
+            <a:noFill/>
+            <a:prstDash val="solid"/>
+          </a:ln>
+        </p:spPr>
+        <p:txBody>
+          <a:bodyPr xmlns:a="http://schemas.openxmlformats.org/drawingml/2006/main" anchor="t">
+            <a:normAutofit fontScale="90196"/>
+          </a:bodyPr>
+          <a:lstStyle xmlns:a="http://schemas.openxmlformats.org/drawingml/2006/main"/>
+          <a:p xmlns:a="http://schemas.openxmlformats.org/drawingml/2006/main">
+            <a:pPr algn="l">
+              <a:defRPr sz="1275" b="0">
+                <a:solidFill>
+                  <a:srgbClr val="5B5B57"/>
+                </a:solidFill>
+                <a:latin typeface="Helvetica Neue"/>
+                <a:ea typeface="Helvetica Neue"/>
+                <a:cs typeface="Helvetica Neue"/>
+              </a:defRPr>
+            </a:pPr>
+            <a:r>
+              <a:rPr sz="1275" b="0">
+                <a:solidFill>
+                  <a:srgbClr val="5B5B57"/>
+                </a:solidFill>
+                <a:latin typeface="Helvetica Neue"/>
+                <a:ea typeface="Helvetica Neue"/>
+                <a:cs typeface="Helvetica Neue"/>
+              </a:rPr>
+              <a:t>labs/05_gemini_bounded_tools.ipynb</a:t>
+            </a:r>
+          </a:p>
+        </p:txBody>
+      </p:sp>
+    </p:spTree>
+    <p:extLst>
+      <p:ext uri="{BB962C8B-B14F-4D97-AF65-F5344CB8AC3E}">
+        <p14:creationId xmlns:p14="http://schemas.microsoft.com/office/powerpoint/2010/main" val="1159982495"/>
       </p:ext>
     </p:extLst>
   </p:cSld>
@@ -3016,7 +5184,7 @@
           <p:cNvPr id="14" name="accent-line">
             <a:extLst xmlns:a="http://schemas.openxmlformats.org/drawingml/2006/main">
               <a:ext uri="{FF2B5EF4-FFF2-40B4-BE49-F238E27FC236}">
-                <a16:creationId xmlns:a16="http://schemas.microsoft.com/office/drawing/2014/main" id="{B1845606-CCA2-46B0-9628-CDEBD0A77552}"/>
+                <a16:creationId xmlns:a16="http://schemas.microsoft.com/office/drawing/2014/main" id="{E6AA25E5-25E5-473A-9A38-4E83AB4A5BF5}"/>
               </a:ext>
             </a:extLst>
           </p:cNvPr>
@@ -3049,7 +5217,7 @@
           <p:cNvPr id="2" name="chapter-label">
             <a:extLst xmlns:a="http://schemas.openxmlformats.org/drawingml/2006/main">
               <a:ext uri="{FF2B5EF4-FFF2-40B4-BE49-F238E27FC236}">
-                <a16:creationId xmlns:a16="http://schemas.microsoft.com/office/drawing/2014/main" id="{F5F384DB-0A54-41F9-9DBA-F34629267CB3}"/>
+                <a16:creationId xmlns:a16="http://schemas.microsoft.com/office/drawing/2014/main" id="{833164C6-EE0E-4D27-A3C5-A4108D6D1D96}"/>
               </a:ext>
             </a:extLst>
           </p:cNvPr>
@@ -3107,7 +5275,7 @@
           <p:cNvPr id="3" name="slide-number">
             <a:extLst xmlns:a="http://schemas.openxmlformats.org/drawingml/2006/main">
               <a:ext uri="{FF2B5EF4-FFF2-40B4-BE49-F238E27FC236}">
-                <a16:creationId xmlns:a16="http://schemas.microsoft.com/office/drawing/2014/main" id="{D1E761F8-8987-481D-B470-4962CA100657}"/>
+                <a16:creationId xmlns:a16="http://schemas.microsoft.com/office/drawing/2014/main" id="{348702F5-789D-4B17-BA15-752CA6825603}"/>
               </a:ext>
             </a:extLst>
           </p:cNvPr>
@@ -3165,7 +5333,7 @@
           <p:cNvPr id="4" name="chapter-footer">
             <a:extLst xmlns:a="http://schemas.openxmlformats.org/drawingml/2006/main">
               <a:ext uri="{FF2B5EF4-FFF2-40B4-BE49-F238E27FC236}">
-                <a16:creationId xmlns:a16="http://schemas.microsoft.com/office/drawing/2014/main" id="{ECDB84F8-9A39-43F4-B310-356F1C80016B}"/>
+                <a16:creationId xmlns:a16="http://schemas.microsoft.com/office/drawing/2014/main" id="{9AACBCE9-1590-44AA-B78C-1360D68D9E2E}"/>
               </a:ext>
             </a:extLst>
           </p:cNvPr>
@@ -3223,7 +5391,7 @@
           <p:cNvPr id="5" name="objectives-title">
             <a:extLst xmlns:a="http://schemas.openxmlformats.org/drawingml/2006/main">
               <a:ext uri="{FF2B5EF4-FFF2-40B4-BE49-F238E27FC236}">
-                <a16:creationId xmlns:a16="http://schemas.microsoft.com/office/drawing/2014/main" id="{BE45C003-06F6-49A5-BEBB-325BBE7D752B}"/>
+                <a16:creationId xmlns:a16="http://schemas.microsoft.com/office/drawing/2014/main" id="{3F429A03-0320-4EFD-85DC-A2F6C8475D87}"/>
               </a:ext>
             </a:extLst>
           </p:cNvPr>
@@ -3281,7 +5449,7 @@
           <p:cNvPr id="6" name="objective-number-1">
             <a:extLst xmlns:a="http://schemas.openxmlformats.org/drawingml/2006/main">
               <a:ext uri="{FF2B5EF4-FFF2-40B4-BE49-F238E27FC236}">
-                <a16:creationId xmlns:a16="http://schemas.microsoft.com/office/drawing/2014/main" id="{0DF52602-EAC0-4648-B4A8-E8ED2866A56E}"/>
+                <a16:creationId xmlns:a16="http://schemas.microsoft.com/office/drawing/2014/main" id="{62158EF3-DDB8-4A3E-8482-12472BDD6935}"/>
               </a:ext>
             </a:extLst>
           </p:cNvPr>
@@ -3339,7 +5507,7 @@
           <p:cNvPr id="7" name="objective-1">
             <a:extLst xmlns:a="http://schemas.openxmlformats.org/drawingml/2006/main">
               <a:ext uri="{FF2B5EF4-FFF2-40B4-BE49-F238E27FC236}">
-                <a16:creationId xmlns:a16="http://schemas.microsoft.com/office/drawing/2014/main" id="{A178F4EF-F817-423C-9B86-805920815140}"/>
+                <a16:creationId xmlns:a16="http://schemas.microsoft.com/office/drawing/2014/main" id="{6B73C5DF-1447-4334-92DE-804E3CC732CD}"/>
               </a:ext>
             </a:extLst>
           </p:cNvPr>
@@ -3397,7 +5565,7 @@
           <p:cNvPr id="8" name="objective-number-2">
             <a:extLst xmlns:a="http://schemas.openxmlformats.org/drawingml/2006/main">
               <a:ext uri="{FF2B5EF4-FFF2-40B4-BE49-F238E27FC236}">
-                <a16:creationId xmlns:a16="http://schemas.microsoft.com/office/drawing/2014/main" id="{C0C2848D-BB67-4E59-BFC9-902D1B4E3740}"/>
+                <a16:creationId xmlns:a16="http://schemas.microsoft.com/office/drawing/2014/main" id="{F07468B5-9E3C-45B4-A6C0-D9FAD96A40DC}"/>
               </a:ext>
             </a:extLst>
           </p:cNvPr>
@@ -3455,7 +5623,7 @@
           <p:cNvPr id="9" name="objective-2">
             <a:extLst xmlns:a="http://schemas.openxmlformats.org/drawingml/2006/main">
               <a:ext uri="{FF2B5EF4-FFF2-40B4-BE49-F238E27FC236}">
-                <a16:creationId xmlns:a16="http://schemas.microsoft.com/office/drawing/2014/main" id="{A260B025-EC81-4658-9E76-62F1E1103096}"/>
+                <a16:creationId xmlns:a16="http://schemas.microsoft.com/office/drawing/2014/main" id="{6ABC73E7-519D-419E-859B-3B5AF1C5BA05}"/>
               </a:ext>
             </a:extLst>
           </p:cNvPr>
@@ -3513,7 +5681,7 @@
           <p:cNvPr id="10" name="objective-number-3">
             <a:extLst xmlns:a="http://schemas.openxmlformats.org/drawingml/2006/main">
               <a:ext uri="{FF2B5EF4-FFF2-40B4-BE49-F238E27FC236}">
-                <a16:creationId xmlns:a16="http://schemas.microsoft.com/office/drawing/2014/main" id="{F476F3E6-967B-452D-98EA-5008EB88529D}"/>
+                <a16:creationId xmlns:a16="http://schemas.microsoft.com/office/drawing/2014/main" id="{03D3E965-35A8-4D92-9EB3-6DE5794C6D2D}"/>
               </a:ext>
             </a:extLst>
           </p:cNvPr>
@@ -3571,7 +5739,7 @@
           <p:cNvPr id="11" name="objective-3">
             <a:extLst xmlns:a="http://schemas.openxmlformats.org/drawingml/2006/main">
               <a:ext uri="{FF2B5EF4-FFF2-40B4-BE49-F238E27FC236}">
-                <a16:creationId xmlns:a16="http://schemas.microsoft.com/office/drawing/2014/main" id="{9667861A-8143-471F-9EF8-1111FE9EE57E}"/>
+                <a16:creationId xmlns:a16="http://schemas.microsoft.com/office/drawing/2014/main" id="{A0F11154-24CD-45CE-AE8B-D8386714F9FE}"/>
               </a:ext>
             </a:extLst>
           </p:cNvPr>
@@ -3629,7 +5797,7 @@
           <p:cNvPr id="12" name="objective-number-4">
             <a:extLst xmlns:a="http://schemas.openxmlformats.org/drawingml/2006/main">
               <a:ext uri="{FF2B5EF4-FFF2-40B4-BE49-F238E27FC236}">
-                <a16:creationId xmlns:a16="http://schemas.microsoft.com/office/drawing/2014/main" id="{3879E46F-6A38-4002-AE2C-CB9538142CD6}"/>
+                <a16:creationId xmlns:a16="http://schemas.microsoft.com/office/drawing/2014/main" id="{BCE61821-E720-499F-869A-242EA927CD76}"/>
               </a:ext>
             </a:extLst>
           </p:cNvPr>
@@ -3687,7 +5855,7 @@
           <p:cNvPr id="13" name="objective-4">
             <a:extLst xmlns:a="http://schemas.openxmlformats.org/drawingml/2006/main">
               <a:ext uri="{FF2B5EF4-FFF2-40B4-BE49-F238E27FC236}">
-                <a16:creationId xmlns:a16="http://schemas.microsoft.com/office/drawing/2014/main" id="{D6ABD711-9C2A-49A2-A569-0584025604D7}"/>
+                <a16:creationId xmlns:a16="http://schemas.microsoft.com/office/drawing/2014/main" id="{854F2625-7512-46D6-85EE-FA02511714E1}"/>
               </a:ext>
             </a:extLst>
           </p:cNvPr>
@@ -3743,7 +5911,7 @@
     </p:spTree>
     <p:extLst>
       <p:ext uri="{BB962C8B-B14F-4D97-AF65-F5344CB8AC3E}">
-        <p14:creationId xmlns:p14="http://schemas.microsoft.com/office/powerpoint/2010/main" val="127289244"/>
+        <p14:creationId xmlns:p14="http://schemas.microsoft.com/office/powerpoint/2010/main" val="1887204223"/>
       </p:ext>
     </p:extLst>
   </p:cSld>
@@ -3774,7 +5942,7 @@
           <p:cNvPr id="9" name="accent-line">
             <a:extLst xmlns:a="http://schemas.openxmlformats.org/drawingml/2006/main">
               <a:ext uri="{FF2B5EF4-FFF2-40B4-BE49-F238E27FC236}">
-                <a16:creationId xmlns:a16="http://schemas.microsoft.com/office/drawing/2014/main" id="{61A380A0-42D8-4747-BFFF-071AB5D135BE}"/>
+                <a16:creationId xmlns:a16="http://schemas.microsoft.com/office/drawing/2014/main" id="{5D66CD5B-B5DA-40EA-BEBC-DFD0C33E704B}"/>
               </a:ext>
             </a:extLst>
           </p:cNvPr>
@@ -3807,7 +5975,7 @@
           <p:cNvPr id="2" name="chapter-label">
             <a:extLst xmlns:a="http://schemas.openxmlformats.org/drawingml/2006/main">
               <a:ext uri="{FF2B5EF4-FFF2-40B4-BE49-F238E27FC236}">
-                <a16:creationId xmlns:a16="http://schemas.microsoft.com/office/drawing/2014/main" id="{1D0619DE-F5AB-40AC-9EBC-9B86317D65FB}"/>
+                <a16:creationId xmlns:a16="http://schemas.microsoft.com/office/drawing/2014/main" id="{6B3C348A-0B6C-464F-8EEF-ECAB238E8B7E}"/>
               </a:ext>
             </a:extLst>
           </p:cNvPr>
@@ -3865,7 +6033,7 @@
           <p:cNvPr id="3" name="slide-number">
             <a:extLst xmlns:a="http://schemas.openxmlformats.org/drawingml/2006/main">
               <a:ext uri="{FF2B5EF4-FFF2-40B4-BE49-F238E27FC236}">
-                <a16:creationId xmlns:a16="http://schemas.microsoft.com/office/drawing/2014/main" id="{700CEADE-6C08-4BBD-8DAA-E576E7805CF4}"/>
+                <a16:creationId xmlns:a16="http://schemas.microsoft.com/office/drawing/2014/main" id="{BE816626-44E1-4CE4-AEF4-86335B7253D3}"/>
               </a:ext>
             </a:extLst>
           </p:cNvPr>
@@ -3923,7 +6091,7 @@
           <p:cNvPr id="4" name="chapter-footer">
             <a:extLst xmlns:a="http://schemas.openxmlformats.org/drawingml/2006/main">
               <a:ext uri="{FF2B5EF4-FFF2-40B4-BE49-F238E27FC236}">
-                <a16:creationId xmlns:a16="http://schemas.microsoft.com/office/drawing/2014/main" id="{F6905C74-1C6B-4047-8B42-5AA91F7996B7}"/>
+                <a16:creationId xmlns:a16="http://schemas.microsoft.com/office/drawing/2014/main" id="{4C2F0053-534B-42F1-8646-72B6623458A7}"/>
               </a:ext>
             </a:extLst>
           </p:cNvPr>
@@ -3981,7 +6149,7 @@
           <p:cNvPr id="5" name="section-title">
             <a:extLst xmlns:a="http://schemas.openxmlformats.org/drawingml/2006/main">
               <a:ext uri="{FF2B5EF4-FFF2-40B4-BE49-F238E27FC236}">
-                <a16:creationId xmlns:a16="http://schemas.microsoft.com/office/drawing/2014/main" id="{7AFDF7EA-FBCE-44B9-A413-933DDB371C5C}"/>
+                <a16:creationId xmlns:a16="http://schemas.microsoft.com/office/drawing/2014/main" id="{0E415F56-CFC2-4CAF-A95C-D05A15C4A22D}"/>
               </a:ext>
             </a:extLst>
           </p:cNvPr>
@@ -4039,7 +6207,7 @@
           <p:cNvPr id="6" name="section-explanation">
             <a:extLst xmlns:a="http://schemas.openxmlformats.org/drawingml/2006/main">
               <a:ext uri="{FF2B5EF4-FFF2-40B4-BE49-F238E27FC236}">
-                <a16:creationId xmlns:a16="http://schemas.microsoft.com/office/drawing/2014/main" id="{FBA38B4B-10AC-4D32-895B-561F9A3B2D4E}"/>
+                <a16:creationId xmlns:a16="http://schemas.microsoft.com/office/drawing/2014/main" id="{F06CC1A6-8D58-47FD-82CD-95C2FDED8302}"/>
               </a:ext>
             </a:extLst>
           </p:cNvPr>
@@ -4097,7 +6265,7 @@
           <p:cNvPr id="7" name="column-rule">
             <a:extLst xmlns:a="http://schemas.openxmlformats.org/drawingml/2006/main">
               <a:ext uri="{FF2B5EF4-FFF2-40B4-BE49-F238E27FC236}">
-                <a16:creationId xmlns:a16="http://schemas.microsoft.com/office/drawing/2014/main" id="{016DA89E-85C7-4149-ACFB-F527919BEA32}"/>
+                <a16:creationId xmlns:a16="http://schemas.microsoft.com/office/drawing/2014/main" id="{45FA0716-B819-4F30-AC23-8E1E95880D45}"/>
               </a:ext>
             </a:extLst>
           </p:cNvPr>
@@ -4130,7 +6298,7 @@
           <p:cNvPr id="8" name="section-points">
             <a:extLst xmlns:a="http://schemas.openxmlformats.org/drawingml/2006/main">
               <a:ext uri="{FF2B5EF4-FFF2-40B4-BE49-F238E27FC236}">
-                <a16:creationId xmlns:a16="http://schemas.microsoft.com/office/drawing/2014/main" id="{C774DAF5-288A-40D9-8B58-D1E925052F8C}"/>
+                <a16:creationId xmlns:a16="http://schemas.microsoft.com/office/drawing/2014/main" id="{72FAAB56-D0DB-4E74-8AE4-CD5EF988BC80}"/>
               </a:ext>
             </a:extLst>
           </p:cNvPr>
@@ -4270,7 +6438,7 @@
     </p:spTree>
     <p:extLst>
       <p:ext uri="{BB962C8B-B14F-4D97-AF65-F5344CB8AC3E}">
-        <p14:creationId xmlns:p14="http://schemas.microsoft.com/office/powerpoint/2010/main" val="489899320"/>
+        <p14:creationId xmlns:p14="http://schemas.microsoft.com/office/powerpoint/2010/main" val="1327005051"/>
       </p:ext>
     </p:extLst>
   </p:cSld>
@@ -4301,7 +6469,7 @@
           <p:cNvPr id="13" name="accent-line">
             <a:extLst xmlns:a="http://schemas.openxmlformats.org/drawingml/2006/main">
               <a:ext uri="{FF2B5EF4-FFF2-40B4-BE49-F238E27FC236}">
-                <a16:creationId xmlns:a16="http://schemas.microsoft.com/office/drawing/2014/main" id="{68DE45AB-7D14-4E01-BB4B-6BE4FD2B448B}"/>
+                <a16:creationId xmlns:a16="http://schemas.microsoft.com/office/drawing/2014/main" id="{BE898FB2-2804-4208-B7A4-042535BEE41B}"/>
               </a:ext>
             </a:extLst>
           </p:cNvPr>
@@ -4334,7 +6502,7 @@
           <p:cNvPr id="2" name="chapter-label">
             <a:extLst xmlns:a="http://schemas.openxmlformats.org/drawingml/2006/main">
               <a:ext uri="{FF2B5EF4-FFF2-40B4-BE49-F238E27FC236}">
-                <a16:creationId xmlns:a16="http://schemas.microsoft.com/office/drawing/2014/main" id="{BE4D1AAB-1CAF-4B0F-8D29-7F19CB16B733}"/>
+                <a16:creationId xmlns:a16="http://schemas.microsoft.com/office/drawing/2014/main" id="{D4031754-38FA-46CE-9A6F-E968735BBE95}"/>
               </a:ext>
             </a:extLst>
           </p:cNvPr>
@@ -4392,7 +6560,7 @@
           <p:cNvPr id="3" name="slide-number">
             <a:extLst xmlns:a="http://schemas.openxmlformats.org/drawingml/2006/main">
               <a:ext uri="{FF2B5EF4-FFF2-40B4-BE49-F238E27FC236}">
-                <a16:creationId xmlns:a16="http://schemas.microsoft.com/office/drawing/2014/main" id="{18AE1C69-1DC6-4EE2-8ED2-D0EEB1B78ABC}"/>
+                <a16:creationId xmlns:a16="http://schemas.microsoft.com/office/drawing/2014/main" id="{FBC69548-B9A3-45CB-9FC4-75D23D612FDF}"/>
               </a:ext>
             </a:extLst>
           </p:cNvPr>
@@ -4450,7 +6618,7 @@
           <p:cNvPr id="4" name="chapter-footer">
             <a:extLst xmlns:a="http://schemas.openxmlformats.org/drawingml/2006/main">
               <a:ext uri="{FF2B5EF4-FFF2-40B4-BE49-F238E27FC236}">
-                <a16:creationId xmlns:a16="http://schemas.microsoft.com/office/drawing/2014/main" id="{65A17535-4F26-481B-B211-9E80BDF17678}"/>
+                <a16:creationId xmlns:a16="http://schemas.microsoft.com/office/drawing/2014/main" id="{FCCF7E6F-C459-43F1-B0C8-687BC6BE55A0}"/>
               </a:ext>
             </a:extLst>
           </p:cNvPr>
@@ -4508,7 +6676,7 @@
           <p:cNvPr id="5" name="section-title">
             <a:extLst xmlns:a="http://schemas.openxmlformats.org/drawingml/2006/main">
               <a:ext uri="{FF2B5EF4-FFF2-40B4-BE49-F238E27FC236}">
-                <a16:creationId xmlns:a16="http://schemas.microsoft.com/office/drawing/2014/main" id="{E232477E-596B-4701-9BF2-3DF2ABBF12AC}"/>
+                <a16:creationId xmlns:a16="http://schemas.microsoft.com/office/drawing/2014/main" id="{FC449E5F-62C1-421C-9169-B285D59F00AC}"/>
               </a:ext>
             </a:extLst>
           </p:cNvPr>
@@ -4566,7 +6734,7 @@
           <p:cNvPr id="6" name="section-explanation">
             <a:extLst xmlns:a="http://schemas.openxmlformats.org/drawingml/2006/main">
               <a:ext uri="{FF2B5EF4-FFF2-40B4-BE49-F238E27FC236}">
-                <a16:creationId xmlns:a16="http://schemas.microsoft.com/office/drawing/2014/main" id="{0EB4A04F-4E5B-4267-9136-09E872745D7B}"/>
+                <a16:creationId xmlns:a16="http://schemas.microsoft.com/office/drawing/2014/main" id="{3664208D-FB3D-4233-81AB-552B50063159}"/>
               </a:ext>
             </a:extLst>
           </p:cNvPr>
@@ -4624,7 +6792,7 @@
           <p:cNvPr id="7" name="point-band-1">
             <a:extLst xmlns:a="http://schemas.openxmlformats.org/drawingml/2006/main">
               <a:ext uri="{FF2B5EF4-FFF2-40B4-BE49-F238E27FC236}">
-                <a16:creationId xmlns:a16="http://schemas.microsoft.com/office/drawing/2014/main" id="{8326D1C0-ABA4-4D97-B02D-9914042F9E85}"/>
+                <a16:creationId xmlns:a16="http://schemas.microsoft.com/office/drawing/2014/main" id="{0A68023B-2347-46D9-8F67-2B4105C001EE}"/>
               </a:ext>
             </a:extLst>
           </p:cNvPr>
@@ -4657,7 +6825,7 @@
           <p:cNvPr id="8" name="point-1">
             <a:extLst xmlns:a="http://schemas.openxmlformats.org/drawingml/2006/main">
               <a:ext uri="{FF2B5EF4-FFF2-40B4-BE49-F238E27FC236}">
-                <a16:creationId xmlns:a16="http://schemas.microsoft.com/office/drawing/2014/main" id="{EE38AAC4-AA70-4A27-888A-88B47A7EC04F}"/>
+                <a16:creationId xmlns:a16="http://schemas.microsoft.com/office/drawing/2014/main" id="{A1D46A9E-EDC0-4DD3-A0B5-0454C1312B16}"/>
               </a:ext>
             </a:extLst>
           </p:cNvPr>
@@ -4705,7 +6873,7 @@
                 <a:ea typeface="Helvetica Neue"/>
                 <a:cs typeface="Helvetica Neue"/>
               </a:rPr>
-              <a:t>Short-term memory is automatic but bounded.</a:t>
+              <a:t>The application or provider must carry the bounded conversation state.</a:t>
             </a:r>
           </a:p>
         </p:txBody>
@@ -4715,7 +6883,7 @@
           <p:cNvPr id="9" name="point-band-2">
             <a:extLst xmlns:a="http://schemas.openxmlformats.org/drawingml/2006/main">
               <a:ext uri="{FF2B5EF4-FFF2-40B4-BE49-F238E27FC236}">
-                <a16:creationId xmlns:a16="http://schemas.microsoft.com/office/drawing/2014/main" id="{804CC455-8881-4DBC-A7E8-8C1165379425}"/>
+                <a16:creationId xmlns:a16="http://schemas.microsoft.com/office/drawing/2014/main" id="{92D02319-1250-4CA6-BCDD-7D11C9EE7219}"/>
               </a:ext>
             </a:extLst>
           </p:cNvPr>
@@ -4748,7 +6916,7 @@
           <p:cNvPr id="10" name="point-2">
             <a:extLst xmlns:a="http://schemas.openxmlformats.org/drawingml/2006/main">
               <a:ext uri="{FF2B5EF4-FFF2-40B4-BE49-F238E27FC236}">
-                <a16:creationId xmlns:a16="http://schemas.microsoft.com/office/drawing/2014/main" id="{631007D9-0E1D-459D-BA4A-498EC4E3DB2D}"/>
+                <a16:creationId xmlns:a16="http://schemas.microsoft.com/office/drawing/2014/main" id="{D8CCCF68-BB25-4CB5-8995-FE8A16E6AB38}"/>
               </a:ext>
             </a:extLst>
           </p:cNvPr>
@@ -4806,7 +6974,7 @@
           <p:cNvPr id="11" name="point-band-3">
             <a:extLst xmlns:a="http://schemas.openxmlformats.org/drawingml/2006/main">
               <a:ext uri="{FF2B5EF4-FFF2-40B4-BE49-F238E27FC236}">
-                <a16:creationId xmlns:a16="http://schemas.microsoft.com/office/drawing/2014/main" id="{3AA34379-D9F7-4C7B-BC97-B5291DA8945F}"/>
+                <a16:creationId xmlns:a16="http://schemas.microsoft.com/office/drawing/2014/main" id="{06A8C556-B42B-4152-8F7D-96F065D132DD}"/>
               </a:ext>
             </a:extLst>
           </p:cNvPr>
@@ -4839,7 +7007,7 @@
           <p:cNvPr id="12" name="point-3">
             <a:extLst xmlns:a="http://schemas.openxmlformats.org/drawingml/2006/main">
               <a:ext uri="{FF2B5EF4-FFF2-40B4-BE49-F238E27FC236}">
-                <a16:creationId xmlns:a16="http://schemas.microsoft.com/office/drawing/2014/main" id="{D6D1C044-0A46-4922-A2B7-5E896B4FD556}"/>
+                <a16:creationId xmlns:a16="http://schemas.microsoft.com/office/drawing/2014/main" id="{4675BC26-B55E-40AE-8E6C-EECDD621149A}"/>
               </a:ext>
             </a:extLst>
           </p:cNvPr>
@@ -4895,7 +7063,7 @@
     </p:spTree>
     <p:extLst>
       <p:ext uri="{BB962C8B-B14F-4D97-AF65-F5344CB8AC3E}">
-        <p14:creationId xmlns:p14="http://schemas.microsoft.com/office/powerpoint/2010/main" val="550912884"/>
+        <p14:creationId xmlns:p14="http://schemas.microsoft.com/office/powerpoint/2010/main" val="849831451"/>
       </p:ext>
     </p:extLst>
   </p:cSld>
@@ -4926,7 +7094,7 @@
           <p:cNvPr id="9" name="accent-line">
             <a:extLst xmlns:a="http://schemas.openxmlformats.org/drawingml/2006/main">
               <a:ext uri="{FF2B5EF4-FFF2-40B4-BE49-F238E27FC236}">
-                <a16:creationId xmlns:a16="http://schemas.microsoft.com/office/drawing/2014/main" id="{AFF41259-4698-40EA-8213-6E6FFB129406}"/>
+                <a16:creationId xmlns:a16="http://schemas.microsoft.com/office/drawing/2014/main" id="{71E7E982-05CE-483E-9C59-8C4CD5E264C7}"/>
               </a:ext>
             </a:extLst>
           </p:cNvPr>
@@ -4959,7 +7127,7 @@
           <p:cNvPr id="2" name="chapter-label">
             <a:extLst xmlns:a="http://schemas.openxmlformats.org/drawingml/2006/main">
               <a:ext uri="{FF2B5EF4-FFF2-40B4-BE49-F238E27FC236}">
-                <a16:creationId xmlns:a16="http://schemas.microsoft.com/office/drawing/2014/main" id="{58BD8F27-4143-4E04-9FD1-37D61F56F560}"/>
+                <a16:creationId xmlns:a16="http://schemas.microsoft.com/office/drawing/2014/main" id="{6CB2F426-745F-473E-9812-AF256CC7E37B}"/>
               </a:ext>
             </a:extLst>
           </p:cNvPr>
@@ -5017,7 +7185,7 @@
           <p:cNvPr id="3" name="slide-number">
             <a:extLst xmlns:a="http://schemas.openxmlformats.org/drawingml/2006/main">
               <a:ext uri="{FF2B5EF4-FFF2-40B4-BE49-F238E27FC236}">
-                <a16:creationId xmlns:a16="http://schemas.microsoft.com/office/drawing/2014/main" id="{E8B29E83-F495-4B52-BBCC-76A26E524495}"/>
+                <a16:creationId xmlns:a16="http://schemas.microsoft.com/office/drawing/2014/main" id="{5A3BD8CC-A59A-43FC-A9FD-388CE98A2F16}"/>
               </a:ext>
             </a:extLst>
           </p:cNvPr>
@@ -5075,7 +7243,7 @@
           <p:cNvPr id="4" name="chapter-footer">
             <a:extLst xmlns:a="http://schemas.openxmlformats.org/drawingml/2006/main">
               <a:ext uri="{FF2B5EF4-FFF2-40B4-BE49-F238E27FC236}">
-                <a16:creationId xmlns:a16="http://schemas.microsoft.com/office/drawing/2014/main" id="{AB40D0C3-6850-469B-9E09-9936414E48AF}"/>
+                <a16:creationId xmlns:a16="http://schemas.microsoft.com/office/drawing/2014/main" id="{6C6A37FD-B292-460B-A420-A8A91BDF3A54}"/>
               </a:ext>
             </a:extLst>
           </p:cNvPr>
@@ -5133,7 +7301,7 @@
           <p:cNvPr id="5" name="section-title">
             <a:extLst xmlns:a="http://schemas.openxmlformats.org/drawingml/2006/main">
               <a:ext uri="{FF2B5EF4-FFF2-40B4-BE49-F238E27FC236}">
-                <a16:creationId xmlns:a16="http://schemas.microsoft.com/office/drawing/2014/main" id="{F54E4D84-7F74-4305-AD23-682995770BA9}"/>
+                <a16:creationId xmlns:a16="http://schemas.microsoft.com/office/drawing/2014/main" id="{9A8BA60F-A954-48E2-8BEF-36CDA042D22F}"/>
               </a:ext>
             </a:extLst>
           </p:cNvPr>
@@ -5191,7 +7359,7 @@
           <p:cNvPr id="6" name="section-explanation">
             <a:extLst xmlns:a="http://schemas.openxmlformats.org/drawingml/2006/main">
               <a:ext uri="{FF2B5EF4-FFF2-40B4-BE49-F238E27FC236}">
-                <a16:creationId xmlns:a16="http://schemas.microsoft.com/office/drawing/2014/main" id="{31A8E6C6-1DC9-4971-B737-C1AD4F812241}"/>
+                <a16:creationId xmlns:a16="http://schemas.microsoft.com/office/drawing/2014/main" id="{15A60C01-065E-4834-B5A1-D7AB4027A78A}"/>
               </a:ext>
             </a:extLst>
           </p:cNvPr>
@@ -5249,7 +7417,7 @@
           <p:cNvPr id="7" name="column-rule">
             <a:extLst xmlns:a="http://schemas.openxmlformats.org/drawingml/2006/main">
               <a:ext uri="{FF2B5EF4-FFF2-40B4-BE49-F238E27FC236}">
-                <a16:creationId xmlns:a16="http://schemas.microsoft.com/office/drawing/2014/main" id="{E83B2544-3E44-4FBD-969E-358D66F6EEEC}"/>
+                <a16:creationId xmlns:a16="http://schemas.microsoft.com/office/drawing/2014/main" id="{69298410-4912-4ABF-8AD9-5C4607CC2663}"/>
               </a:ext>
             </a:extLst>
           </p:cNvPr>
@@ -5282,7 +7450,7 @@
           <p:cNvPr id="8" name="section-points">
             <a:extLst xmlns:a="http://schemas.openxmlformats.org/drawingml/2006/main">
               <a:ext uri="{FF2B5EF4-FFF2-40B4-BE49-F238E27FC236}">
-                <a16:creationId xmlns:a16="http://schemas.microsoft.com/office/drawing/2014/main" id="{F4963A5B-F1B5-4961-A611-15307FCEBD14}"/>
+                <a16:creationId xmlns:a16="http://schemas.microsoft.com/office/drawing/2014/main" id="{EBCA2F07-5A3B-48C9-AAA6-9D5AE3F1125C}"/>
               </a:ext>
             </a:extLst>
           </p:cNvPr>
@@ -5394,7 +7562,7 @@
     </p:spTree>
     <p:extLst>
       <p:ext uri="{BB962C8B-B14F-4D97-AF65-F5344CB8AC3E}">
-        <p14:creationId xmlns:p14="http://schemas.microsoft.com/office/powerpoint/2010/main" val="861972508"/>
+        <p14:creationId xmlns:p14="http://schemas.microsoft.com/office/powerpoint/2010/main" val="380770517"/>
       </p:ext>
     </p:extLst>
   </p:cSld>
@@ -5425,7 +7593,7 @@
           <p:cNvPr id="13" name="accent-line">
             <a:extLst xmlns:a="http://schemas.openxmlformats.org/drawingml/2006/main">
               <a:ext uri="{FF2B5EF4-FFF2-40B4-BE49-F238E27FC236}">
-                <a16:creationId xmlns:a16="http://schemas.microsoft.com/office/drawing/2014/main" id="{1DE624DC-6F2A-4202-AADB-84A5C7D24E1F}"/>
+                <a16:creationId xmlns:a16="http://schemas.microsoft.com/office/drawing/2014/main" id="{5A996D4F-8B69-4D27-B548-DA4A0668F70B}"/>
               </a:ext>
             </a:extLst>
           </p:cNvPr>
@@ -5458,7 +7626,7 @@
           <p:cNvPr id="2" name="chapter-label">
             <a:extLst xmlns:a="http://schemas.openxmlformats.org/drawingml/2006/main">
               <a:ext uri="{FF2B5EF4-FFF2-40B4-BE49-F238E27FC236}">
-                <a16:creationId xmlns:a16="http://schemas.microsoft.com/office/drawing/2014/main" id="{7E07F80A-4AC8-4690-9CA1-D282874740FC}"/>
+                <a16:creationId xmlns:a16="http://schemas.microsoft.com/office/drawing/2014/main" id="{317DCD73-51E9-44CF-819E-6CC9EEBDE026}"/>
               </a:ext>
             </a:extLst>
           </p:cNvPr>
@@ -5516,7 +7684,7 @@
           <p:cNvPr id="3" name="slide-number">
             <a:extLst xmlns:a="http://schemas.openxmlformats.org/drawingml/2006/main">
               <a:ext uri="{FF2B5EF4-FFF2-40B4-BE49-F238E27FC236}">
-                <a16:creationId xmlns:a16="http://schemas.microsoft.com/office/drawing/2014/main" id="{E4F53782-95EA-471C-AEB6-628D05A55618}"/>
+                <a16:creationId xmlns:a16="http://schemas.microsoft.com/office/drawing/2014/main" id="{FBD1461A-F3A5-4489-BA97-9C5C41963AA2}"/>
               </a:ext>
             </a:extLst>
           </p:cNvPr>
@@ -5574,7 +7742,7 @@
           <p:cNvPr id="4" name="chapter-footer">
             <a:extLst xmlns:a="http://schemas.openxmlformats.org/drawingml/2006/main">
               <a:ext uri="{FF2B5EF4-FFF2-40B4-BE49-F238E27FC236}">
-                <a16:creationId xmlns:a16="http://schemas.microsoft.com/office/drawing/2014/main" id="{CAFEBF7D-8402-45D6-B93E-3C08FEF2AE76}"/>
+                <a16:creationId xmlns:a16="http://schemas.microsoft.com/office/drawing/2014/main" id="{AF80B62F-285F-43FB-B009-051871CE719E}"/>
               </a:ext>
             </a:extLst>
           </p:cNvPr>
@@ -5632,7 +7800,7 @@
           <p:cNvPr id="5" name="section-title">
             <a:extLst xmlns:a="http://schemas.openxmlformats.org/drawingml/2006/main">
               <a:ext uri="{FF2B5EF4-FFF2-40B4-BE49-F238E27FC236}">
-                <a16:creationId xmlns:a16="http://schemas.microsoft.com/office/drawing/2014/main" id="{E66E6EF6-27B5-43AB-90D5-EA8C022A2FF1}"/>
+                <a16:creationId xmlns:a16="http://schemas.microsoft.com/office/drawing/2014/main" id="{65FA1101-E954-496E-BD86-1FFAB6EDA50B}"/>
               </a:ext>
             </a:extLst>
           </p:cNvPr>
@@ -5690,7 +7858,7 @@
           <p:cNvPr id="6" name="section-explanation">
             <a:extLst xmlns:a="http://schemas.openxmlformats.org/drawingml/2006/main">
               <a:ext uri="{FF2B5EF4-FFF2-40B4-BE49-F238E27FC236}">
-                <a16:creationId xmlns:a16="http://schemas.microsoft.com/office/drawing/2014/main" id="{7041DFD5-191D-40D9-BD8D-54542648FDA5}"/>
+                <a16:creationId xmlns:a16="http://schemas.microsoft.com/office/drawing/2014/main" id="{F229465E-45C1-4967-971F-348CADD78572}"/>
               </a:ext>
             </a:extLst>
           </p:cNvPr>
@@ -5748,7 +7916,7 @@
           <p:cNvPr id="7" name="point-band-1">
             <a:extLst xmlns:a="http://schemas.openxmlformats.org/drawingml/2006/main">
               <a:ext uri="{FF2B5EF4-FFF2-40B4-BE49-F238E27FC236}">
-                <a16:creationId xmlns:a16="http://schemas.microsoft.com/office/drawing/2014/main" id="{AA132544-4625-4D57-8308-A96315865D70}"/>
+                <a16:creationId xmlns:a16="http://schemas.microsoft.com/office/drawing/2014/main" id="{2911EC2A-75B0-453F-B44A-D9A4CEE632EC}"/>
               </a:ext>
             </a:extLst>
           </p:cNvPr>
@@ -5781,7 +7949,7 @@
           <p:cNvPr id="8" name="point-1">
             <a:extLst xmlns:a="http://schemas.openxmlformats.org/drawingml/2006/main">
               <a:ext uri="{FF2B5EF4-FFF2-40B4-BE49-F238E27FC236}">
-                <a16:creationId xmlns:a16="http://schemas.microsoft.com/office/drawing/2014/main" id="{B564FB1A-C7B0-4885-847E-E478EA8431D0}"/>
+                <a16:creationId xmlns:a16="http://schemas.microsoft.com/office/drawing/2014/main" id="{1ADCBF69-78E5-4D18-B528-AA39F5DCCB55}"/>
               </a:ext>
             </a:extLst>
           </p:cNvPr>
@@ -5829,7 +7997,7 @@
                 <a:ea typeface="Helvetica Neue"/>
                 <a:cs typeface="Helvetica Neue"/>
               </a:rPr>
-              <a:t>Use stop sequences in a text protocol.</a:t>
+              <a:t>Use supported stop sequences as format controls in text protocols.</a:t>
             </a:r>
           </a:p>
         </p:txBody>
@@ -5839,7 +8007,7 @@
           <p:cNvPr id="9" name="point-band-2">
             <a:extLst xmlns:a="http://schemas.openxmlformats.org/drawingml/2006/main">
               <a:ext uri="{FF2B5EF4-FFF2-40B4-BE49-F238E27FC236}">
-                <a16:creationId xmlns:a16="http://schemas.microsoft.com/office/drawing/2014/main" id="{882BBA5A-4867-46B9-95FC-4D4EFD95FB5E}"/>
+                <a16:creationId xmlns:a16="http://schemas.microsoft.com/office/drawing/2014/main" id="{8D9AAAE2-95F3-42AA-821F-013BC8839BEA}"/>
               </a:ext>
             </a:extLst>
           </p:cNvPr>
@@ -5872,7 +8040,7 @@
           <p:cNvPr id="10" name="point-2">
             <a:extLst xmlns:a="http://schemas.openxmlformats.org/drawingml/2006/main">
               <a:ext uri="{FF2B5EF4-FFF2-40B4-BE49-F238E27FC236}">
-                <a16:creationId xmlns:a16="http://schemas.microsoft.com/office/drawing/2014/main" id="{E0278373-FB95-41B9-AF19-9732028B1B39}"/>
+                <a16:creationId xmlns:a16="http://schemas.microsoft.com/office/drawing/2014/main" id="{F9E44AE0-14E7-437C-9755-87493AF96DA9}"/>
               </a:ext>
             </a:extLst>
           </p:cNvPr>
@@ -5930,7 +8098,7 @@
           <p:cNvPr id="11" name="point-band-3">
             <a:extLst xmlns:a="http://schemas.openxmlformats.org/drawingml/2006/main">
               <a:ext uri="{FF2B5EF4-FFF2-40B4-BE49-F238E27FC236}">
-                <a16:creationId xmlns:a16="http://schemas.microsoft.com/office/drawing/2014/main" id="{A34B7926-CAFC-4A25-9476-BA75A266D43D}"/>
+                <a16:creationId xmlns:a16="http://schemas.microsoft.com/office/drawing/2014/main" id="{8036F4A2-3DF2-4CB5-BD8B-1063A30B405F}"/>
               </a:ext>
             </a:extLst>
           </p:cNvPr>
@@ -5963,7 +8131,7 @@
           <p:cNvPr id="12" name="point-3">
             <a:extLst xmlns:a="http://schemas.openxmlformats.org/drawingml/2006/main">
               <a:ext uri="{FF2B5EF4-FFF2-40B4-BE49-F238E27FC236}">
-                <a16:creationId xmlns:a16="http://schemas.microsoft.com/office/drawing/2014/main" id="{97408EBC-1BED-4701-B7B0-78D65524E193}"/>
+                <a16:creationId xmlns:a16="http://schemas.microsoft.com/office/drawing/2014/main" id="{8A4EF78E-CF22-4225-B239-3B58E87F387F}"/>
               </a:ext>
             </a:extLst>
           </p:cNvPr>
@@ -6019,7 +8187,7 @@
     </p:spTree>
     <p:extLst>
       <p:ext uri="{BB962C8B-B14F-4D97-AF65-F5344CB8AC3E}">
-        <p14:creationId xmlns:p14="http://schemas.microsoft.com/office/powerpoint/2010/main" val="312108034"/>
+        <p14:creationId xmlns:p14="http://schemas.microsoft.com/office/powerpoint/2010/main" val="182900061"/>
       </p:ext>
     </p:extLst>
   </p:cSld>
@@ -6050,7 +8218,7 @@
           <p:cNvPr id="9" name="accent-line">
             <a:extLst xmlns:a="http://schemas.openxmlformats.org/drawingml/2006/main">
               <a:ext uri="{FF2B5EF4-FFF2-40B4-BE49-F238E27FC236}">
-                <a16:creationId xmlns:a16="http://schemas.microsoft.com/office/drawing/2014/main" id="{CD15358B-9C6E-4A36-A566-254FE7E9A77A}"/>
+                <a16:creationId xmlns:a16="http://schemas.microsoft.com/office/drawing/2014/main" id="{E24262E0-DD81-43D3-8E76-F05F8616D555}"/>
               </a:ext>
             </a:extLst>
           </p:cNvPr>
@@ -6083,7 +8251,7 @@
           <p:cNvPr id="2" name="chapter-label">
             <a:extLst xmlns:a="http://schemas.openxmlformats.org/drawingml/2006/main">
               <a:ext uri="{FF2B5EF4-FFF2-40B4-BE49-F238E27FC236}">
-                <a16:creationId xmlns:a16="http://schemas.microsoft.com/office/drawing/2014/main" id="{6E4B2A37-0450-409F-A207-B9485827F7E1}"/>
+                <a16:creationId xmlns:a16="http://schemas.microsoft.com/office/drawing/2014/main" id="{4D441705-FD0D-43A8-8E0D-0FBE5ABD91C8}"/>
               </a:ext>
             </a:extLst>
           </p:cNvPr>
@@ -6141,7 +8309,7 @@
           <p:cNvPr id="3" name="slide-number">
             <a:extLst xmlns:a="http://schemas.openxmlformats.org/drawingml/2006/main">
               <a:ext uri="{FF2B5EF4-FFF2-40B4-BE49-F238E27FC236}">
-                <a16:creationId xmlns:a16="http://schemas.microsoft.com/office/drawing/2014/main" id="{F02B8AA7-DEF9-448F-AB16-6229297D2F51}"/>
+                <a16:creationId xmlns:a16="http://schemas.microsoft.com/office/drawing/2014/main" id="{AB5D810A-5CAE-40F3-8BE5-0945075D7900}"/>
               </a:ext>
             </a:extLst>
           </p:cNvPr>
@@ -6199,7 +8367,7 @@
           <p:cNvPr id="4" name="chapter-footer">
             <a:extLst xmlns:a="http://schemas.openxmlformats.org/drawingml/2006/main">
               <a:ext uri="{FF2B5EF4-FFF2-40B4-BE49-F238E27FC236}">
-                <a16:creationId xmlns:a16="http://schemas.microsoft.com/office/drawing/2014/main" id="{F6C8C530-7AD0-4DC4-B7BE-0EE0ACD032DE}"/>
+                <a16:creationId xmlns:a16="http://schemas.microsoft.com/office/drawing/2014/main" id="{1E033608-593F-48BF-BE98-208323BF1B4E}"/>
               </a:ext>
             </a:extLst>
           </p:cNvPr>
@@ -6257,7 +8425,7 @@
           <p:cNvPr id="5" name="section-title">
             <a:extLst xmlns:a="http://schemas.openxmlformats.org/drawingml/2006/main">
               <a:ext uri="{FF2B5EF4-FFF2-40B4-BE49-F238E27FC236}">
-                <a16:creationId xmlns:a16="http://schemas.microsoft.com/office/drawing/2014/main" id="{B931563E-0F25-4A62-9A18-B1E1408EDB72}"/>
+                <a16:creationId xmlns:a16="http://schemas.microsoft.com/office/drawing/2014/main" id="{20A5B537-5AAA-42B2-8D0F-BEEDACD0266F}"/>
               </a:ext>
             </a:extLst>
           </p:cNvPr>
@@ -6315,7 +8483,7 @@
           <p:cNvPr id="6" name="section-explanation">
             <a:extLst xmlns:a="http://schemas.openxmlformats.org/drawingml/2006/main">
               <a:ext uri="{FF2B5EF4-FFF2-40B4-BE49-F238E27FC236}">
-                <a16:creationId xmlns:a16="http://schemas.microsoft.com/office/drawing/2014/main" id="{9128873D-4853-4F82-9B13-4039DD2B8BEB}"/>
+                <a16:creationId xmlns:a16="http://schemas.microsoft.com/office/drawing/2014/main" id="{5E90B82D-339E-472E-8306-8AF5CCB00450}"/>
               </a:ext>
             </a:extLst>
           </p:cNvPr>
@@ -6373,7 +8541,7 @@
           <p:cNvPr id="7" name="column-rule">
             <a:extLst xmlns:a="http://schemas.openxmlformats.org/drawingml/2006/main">
               <a:ext uri="{FF2B5EF4-FFF2-40B4-BE49-F238E27FC236}">
-                <a16:creationId xmlns:a16="http://schemas.microsoft.com/office/drawing/2014/main" id="{64AAE558-EC43-46C1-B8AB-C1AB1CF6687F}"/>
+                <a16:creationId xmlns:a16="http://schemas.microsoft.com/office/drawing/2014/main" id="{9619A366-AA7C-4FC7-92B4-F7D99A5FEC2D}"/>
               </a:ext>
             </a:extLst>
           </p:cNvPr>
@@ -6406,7 +8574,7 @@
           <p:cNvPr id="8" name="section-points">
             <a:extLst xmlns:a="http://schemas.openxmlformats.org/drawingml/2006/main">
               <a:ext uri="{FF2B5EF4-FFF2-40B4-BE49-F238E27FC236}">
-                <a16:creationId xmlns:a16="http://schemas.microsoft.com/office/drawing/2014/main" id="{418E4B2F-E6D0-4034-A53C-9035C46DCEA4}"/>
+                <a16:creationId xmlns:a16="http://schemas.microsoft.com/office/drawing/2014/main" id="{5DF78D0F-1156-46CA-8D0A-C78D6A439555}"/>
               </a:ext>
             </a:extLst>
           </p:cNvPr>
@@ -6546,7 +8714,7 @@
     </p:spTree>
     <p:extLst>
       <p:ext uri="{BB962C8B-B14F-4D97-AF65-F5344CB8AC3E}">
-        <p14:creationId xmlns:p14="http://schemas.microsoft.com/office/powerpoint/2010/main" val="1241718743"/>
+        <p14:creationId xmlns:p14="http://schemas.microsoft.com/office/powerpoint/2010/main" val="41858364"/>
       </p:ext>
     </p:extLst>
   </p:cSld>
@@ -6577,7 +8745,7 @@
           <p:cNvPr id="15" name="accent-line">
             <a:extLst xmlns:a="http://schemas.openxmlformats.org/drawingml/2006/main">
               <a:ext uri="{FF2B5EF4-FFF2-40B4-BE49-F238E27FC236}">
-                <a16:creationId xmlns:a16="http://schemas.microsoft.com/office/drawing/2014/main" id="{7A39787B-0F21-433B-8241-69AE0F1C0DE5}"/>
+                <a16:creationId xmlns:a16="http://schemas.microsoft.com/office/drawing/2014/main" id="{967B54B4-BB0D-4430-82B1-31D2E1DD92D2}"/>
               </a:ext>
             </a:extLst>
           </p:cNvPr>
@@ -6610,7 +8778,7 @@
           <p:cNvPr id="2" name="chapter-label">
             <a:extLst xmlns:a="http://schemas.openxmlformats.org/drawingml/2006/main">
               <a:ext uri="{FF2B5EF4-FFF2-40B4-BE49-F238E27FC236}">
-                <a16:creationId xmlns:a16="http://schemas.microsoft.com/office/drawing/2014/main" id="{0F3147C2-0F3D-499F-BF76-611DD97B23F4}"/>
+                <a16:creationId xmlns:a16="http://schemas.microsoft.com/office/drawing/2014/main" id="{1B94C411-7DA4-4EB0-9C7D-61DF16FE25A3}"/>
               </a:ext>
             </a:extLst>
           </p:cNvPr>
@@ -6668,7 +8836,7 @@
           <p:cNvPr id="3" name="slide-number">
             <a:extLst xmlns:a="http://schemas.openxmlformats.org/drawingml/2006/main">
               <a:ext uri="{FF2B5EF4-FFF2-40B4-BE49-F238E27FC236}">
-                <a16:creationId xmlns:a16="http://schemas.microsoft.com/office/drawing/2014/main" id="{CEABB4CB-ED40-4A46-9383-5944CFA978D6}"/>
+                <a16:creationId xmlns:a16="http://schemas.microsoft.com/office/drawing/2014/main" id="{88216326-86E2-4219-B927-AC0381C44494}"/>
               </a:ext>
             </a:extLst>
           </p:cNvPr>
@@ -6726,7 +8894,7 @@
           <p:cNvPr id="4" name="chapter-footer">
             <a:extLst xmlns:a="http://schemas.openxmlformats.org/drawingml/2006/main">
               <a:ext uri="{FF2B5EF4-FFF2-40B4-BE49-F238E27FC236}">
-                <a16:creationId xmlns:a16="http://schemas.microsoft.com/office/drawing/2014/main" id="{7C503A2A-C279-46FE-AD3A-0F3E8D823995}"/>
+                <a16:creationId xmlns:a16="http://schemas.microsoft.com/office/drawing/2014/main" id="{40FDBDCF-38EC-4786-A8A4-6254D597D5C0}"/>
               </a:ext>
             </a:extLst>
           </p:cNvPr>
@@ -6784,7 +8952,7 @@
           <p:cNvPr id="5" name="section-title">
             <a:extLst xmlns:a="http://schemas.openxmlformats.org/drawingml/2006/main">
               <a:ext uri="{FF2B5EF4-FFF2-40B4-BE49-F238E27FC236}">
-                <a16:creationId xmlns:a16="http://schemas.microsoft.com/office/drawing/2014/main" id="{FE093084-CB2A-402C-9913-6D6564E44E14}"/>
+                <a16:creationId xmlns:a16="http://schemas.microsoft.com/office/drawing/2014/main" id="{D823C39A-16E0-4468-9C15-2771BCFBB9F1}"/>
               </a:ext>
             </a:extLst>
           </p:cNvPr>
@@ -6842,7 +9010,7 @@
           <p:cNvPr id="6" name="section-explanation">
             <a:extLst xmlns:a="http://schemas.openxmlformats.org/drawingml/2006/main">
               <a:ext uri="{FF2B5EF4-FFF2-40B4-BE49-F238E27FC236}">
-                <a16:creationId xmlns:a16="http://schemas.microsoft.com/office/drawing/2014/main" id="{9F75104B-58B2-4A48-9AB4-3F22DEE3ECDC}"/>
+                <a16:creationId xmlns:a16="http://schemas.microsoft.com/office/drawing/2014/main" id="{BDC5AD94-40E5-4F24-AADD-C9C158A65688}"/>
               </a:ext>
             </a:extLst>
           </p:cNvPr>
@@ -6900,7 +9068,7 @@
           <p:cNvPr id="7" name="point-band-1">
             <a:extLst xmlns:a="http://schemas.openxmlformats.org/drawingml/2006/main">
               <a:ext uri="{FF2B5EF4-FFF2-40B4-BE49-F238E27FC236}">
-                <a16:creationId xmlns:a16="http://schemas.microsoft.com/office/drawing/2014/main" id="{1E395769-B71B-4F79-871C-8C2CA8FE84A3}"/>
+                <a16:creationId xmlns:a16="http://schemas.microsoft.com/office/drawing/2014/main" id="{106B5BF9-5CD1-4872-ADDD-1F1BFBC6AF9C}"/>
               </a:ext>
             </a:extLst>
           </p:cNvPr>
@@ -6933,7 +9101,7 @@
           <p:cNvPr id="8" name="point-1">
             <a:extLst xmlns:a="http://schemas.openxmlformats.org/drawingml/2006/main">
               <a:ext uri="{FF2B5EF4-FFF2-40B4-BE49-F238E27FC236}">
-                <a16:creationId xmlns:a16="http://schemas.microsoft.com/office/drawing/2014/main" id="{E199744C-08BC-48A3-AB97-2110E50AB7E6}"/>
+                <a16:creationId xmlns:a16="http://schemas.microsoft.com/office/drawing/2014/main" id="{946FDB9D-F07D-47AB-8DCF-FB5C2CB0AFF3}"/>
               </a:ext>
             </a:extLst>
           </p:cNvPr>
@@ -6991,7 +9159,7 @@
           <p:cNvPr id="9" name="point-band-2">
             <a:extLst xmlns:a="http://schemas.openxmlformats.org/drawingml/2006/main">
               <a:ext uri="{FF2B5EF4-FFF2-40B4-BE49-F238E27FC236}">
-                <a16:creationId xmlns:a16="http://schemas.microsoft.com/office/drawing/2014/main" id="{45713723-10E2-42B3-B8F0-171BC7AFE1B2}"/>
+                <a16:creationId xmlns:a16="http://schemas.microsoft.com/office/drawing/2014/main" id="{B056C847-875B-4EAC-B766-049C82B236D8}"/>
               </a:ext>
             </a:extLst>
           </p:cNvPr>
@@ -7024,7 +9192,7 @@
           <p:cNvPr id="10" name="point-2">
             <a:extLst xmlns:a="http://schemas.openxmlformats.org/drawingml/2006/main">
               <a:ext uri="{FF2B5EF4-FFF2-40B4-BE49-F238E27FC236}">
-                <a16:creationId xmlns:a16="http://schemas.microsoft.com/office/drawing/2014/main" id="{6DABEA2A-36F8-46F6-B644-C17718BC12D0}"/>
+                <a16:creationId xmlns:a16="http://schemas.microsoft.com/office/drawing/2014/main" id="{0B570425-8219-4952-B108-E2C805B6BFA3}"/>
               </a:ext>
             </a:extLst>
           </p:cNvPr>
@@ -7082,7 +9250,7 @@
           <p:cNvPr id="11" name="point-band-3">
             <a:extLst xmlns:a="http://schemas.openxmlformats.org/drawingml/2006/main">
               <a:ext uri="{FF2B5EF4-FFF2-40B4-BE49-F238E27FC236}">
-                <a16:creationId xmlns:a16="http://schemas.microsoft.com/office/drawing/2014/main" id="{81D74CE8-6ED6-4348-AB12-B3EDAF3E0629}"/>
+                <a16:creationId xmlns:a16="http://schemas.microsoft.com/office/drawing/2014/main" id="{4F2B912B-6CCD-4AD0-A7D7-2250B25736CB}"/>
               </a:ext>
             </a:extLst>
           </p:cNvPr>
@@ -7115,7 +9283,7 @@
           <p:cNvPr id="12" name="point-3">
             <a:extLst xmlns:a="http://schemas.openxmlformats.org/drawingml/2006/main">
               <a:ext uri="{FF2B5EF4-FFF2-40B4-BE49-F238E27FC236}">
-                <a16:creationId xmlns:a16="http://schemas.microsoft.com/office/drawing/2014/main" id="{173652AE-9C84-434D-BA1C-5FDA7C094083}"/>
+                <a16:creationId xmlns:a16="http://schemas.microsoft.com/office/drawing/2014/main" id="{A89B682A-3417-4A7E-BCA8-9FA588F3EEA4}"/>
               </a:ext>
             </a:extLst>
           </p:cNvPr>
@@ -7173,7 +9341,7 @@
           <p:cNvPr id="13" name="point-band-4">
             <a:extLst xmlns:a="http://schemas.openxmlformats.org/drawingml/2006/main">
               <a:ext uri="{FF2B5EF4-FFF2-40B4-BE49-F238E27FC236}">
-                <a16:creationId xmlns:a16="http://schemas.microsoft.com/office/drawing/2014/main" id="{35F5DEEB-006E-4DE9-9C06-7716916329F6}"/>
+                <a16:creationId xmlns:a16="http://schemas.microsoft.com/office/drawing/2014/main" id="{ED81ABEF-6287-4552-AB84-176A263E7E5D}"/>
               </a:ext>
             </a:extLst>
           </p:cNvPr>
@@ -7206,7 +9374,7 @@
           <p:cNvPr id="14" name="point-4">
             <a:extLst xmlns:a="http://schemas.openxmlformats.org/drawingml/2006/main">
               <a:ext uri="{FF2B5EF4-FFF2-40B4-BE49-F238E27FC236}">
-                <a16:creationId xmlns:a16="http://schemas.microsoft.com/office/drawing/2014/main" id="{48350493-F508-4FC7-991C-5C92BF43BC04}"/>
+                <a16:creationId xmlns:a16="http://schemas.microsoft.com/office/drawing/2014/main" id="{09F51DCB-7A5C-4343-83B3-4A2C6E260A6A}"/>
               </a:ext>
             </a:extLst>
           </p:cNvPr>
@@ -7262,7 +9430,7 @@
     </p:spTree>
     <p:extLst>
       <p:ext uri="{BB962C8B-B14F-4D97-AF65-F5344CB8AC3E}">
-        <p14:creationId xmlns:p14="http://schemas.microsoft.com/office/powerpoint/2010/main" val="1454232347"/>
+        <p14:creationId xmlns:p14="http://schemas.microsoft.com/office/powerpoint/2010/main" val="1847514828"/>
       </p:ext>
     </p:extLst>
   </p:cSld>
@@ -7290,10 +9458,10 @@
       </p:grpSpPr>
       <p:sp>
         <p:nvSpPr>
-          <p:cNvPr id="18" name="accent-line">
-            <a:extLst xmlns:a="http://schemas.openxmlformats.org/drawingml/2006/main">
-              <a:ext uri="{FF2B5EF4-FFF2-40B4-BE49-F238E27FC236}">
-                <a16:creationId xmlns:a16="http://schemas.microsoft.com/office/drawing/2014/main" id="{16011D7D-0080-4A44-AD44-FE0F0828D4C2}"/>
+          <p:cNvPr id="9" name="accent-line">
+            <a:extLst xmlns:a="http://schemas.openxmlformats.org/drawingml/2006/main">
+              <a:ext uri="{FF2B5EF4-FFF2-40B4-BE49-F238E27FC236}">
+                <a16:creationId xmlns:a16="http://schemas.microsoft.com/office/drawing/2014/main" id="{B386783E-E193-495B-B9C1-24A4B8094A6C}"/>
               </a:ext>
             </a:extLst>
           </p:cNvPr>
@@ -7326,7 +9494,7 @@
           <p:cNvPr id="2" name="chapter-label">
             <a:extLst xmlns:a="http://schemas.openxmlformats.org/drawingml/2006/main">
               <a:ext uri="{FF2B5EF4-FFF2-40B4-BE49-F238E27FC236}">
-                <a16:creationId xmlns:a16="http://schemas.microsoft.com/office/drawing/2014/main" id="{F3A20409-F56B-4B8D-8070-AA3DF6EF1B3D}"/>
+                <a16:creationId xmlns:a16="http://schemas.microsoft.com/office/drawing/2014/main" id="{085B5CA2-1909-4260-A642-7AD9B155858B}"/>
               </a:ext>
             </a:extLst>
           </p:cNvPr>
@@ -7374,7 +9542,7 @@
                 <a:ea typeface="Helvetica Neue"/>
                 <a:cs typeface="Helvetica Neue"/>
               </a:rPr>
-              <a:t>EXAM CHECK  /  03</a:t>
+              <a:t>CORE IDEA 07  /  03</a:t>
             </a:r>
           </a:p>
         </p:txBody>
@@ -7384,7 +9552,7 @@
           <p:cNvPr id="3" name="slide-number">
             <a:extLst xmlns:a="http://schemas.openxmlformats.org/drawingml/2006/main">
               <a:ext uri="{FF2B5EF4-FFF2-40B4-BE49-F238E27FC236}">
-                <a16:creationId xmlns:a16="http://schemas.microsoft.com/office/drawing/2014/main" id="{01FBD3ED-A0C7-44B5-A105-2923AA760496}"/>
+                <a16:creationId xmlns:a16="http://schemas.microsoft.com/office/drawing/2014/main" id="{CB8B9207-5634-455A-94A4-777D621B0979}"/>
               </a:ext>
             </a:extLst>
           </p:cNvPr>
@@ -7442,7 +9610,7 @@
           <p:cNvPr id="4" name="chapter-footer">
             <a:extLst xmlns:a="http://schemas.openxmlformats.org/drawingml/2006/main">
               <a:ext uri="{FF2B5EF4-FFF2-40B4-BE49-F238E27FC236}">
-                <a16:creationId xmlns:a16="http://schemas.microsoft.com/office/drawing/2014/main" id="{AC64C58E-046B-4B95-AFFF-AFF7F21479FA}"/>
+                <a16:creationId xmlns:a16="http://schemas.microsoft.com/office/drawing/2014/main" id="{818D9A8F-6A4C-4F1C-BBA6-4FF747C080DF}"/>
               </a:ext>
             </a:extLst>
           </p:cNvPr>
@@ -7497,138 +9665,22 @@
       </p:sp>
       <p:sp>
         <p:nvSpPr>
-          <p:cNvPr id="5" name="exam-title">
-            <a:extLst xmlns:a="http://schemas.openxmlformats.org/drawingml/2006/main">
-              <a:ext uri="{FF2B5EF4-FFF2-40B4-BE49-F238E27FC236}">
-                <a16:creationId xmlns:a16="http://schemas.microsoft.com/office/drawing/2014/main" id="{AEE9AD2F-E939-44B0-A291-F5AE3D4C4895}"/>
-              </a:ext>
-            </a:extLst>
-          </p:cNvPr>
-          <p:cNvSpPr>
-            <a:spLocks xmlns:a="http://schemas.openxmlformats.org/drawingml/2006/main" noGrp="1"/>
-          </p:cNvSpPr>
-          <p:nvPr/>
-        </p:nvSpPr>
-        <p:spPr>
-          <a:xfrm xmlns:a="http://schemas.openxmlformats.org/drawingml/2006/main">
-            <a:off x="390525" y="981075"/>
-            <a:ext cx="10668000" cy="781050"/>
-          </a:xfrm>
-          <a:prstGeom xmlns:a="http://schemas.openxmlformats.org/drawingml/2006/main" prst="rect">
-            <a:avLst/>
-          </a:prstGeom>
-          <a:noFill xmlns:a="http://schemas.openxmlformats.org/drawingml/2006/main"/>
-          <a:ln xmlns:a="http://schemas.openxmlformats.org/drawingml/2006/main" w="0">
-            <a:noFill/>
-            <a:prstDash val="solid"/>
-          </a:ln>
-        </p:spPr>
-        <p:txBody>
-          <a:bodyPr xmlns:a="http://schemas.openxmlformats.org/drawingml/2006/main" anchor="t">
-            <a:noAutofit/>
-          </a:bodyPr>
-          <a:lstStyle xmlns:a="http://schemas.openxmlformats.org/drawingml/2006/main"/>
-          <a:p xmlns:a="http://schemas.openxmlformats.org/drawingml/2006/main">
-            <a:pPr algn="l">
-              <a:defRPr sz="3150" b="1">
-                <a:solidFill>
-                  <a:srgbClr val="111111"/>
-                </a:solidFill>
-                <a:latin typeface="Helvetica Neue"/>
-                <a:ea typeface="Helvetica Neue"/>
-                <a:cs typeface="Helvetica Neue"/>
-              </a:defRPr>
-            </a:pPr>
-            <a:r>
-              <a:rPr sz="3150" b="1">
-                <a:solidFill>
-                  <a:srgbClr val="111111"/>
-                </a:solidFill>
-                <a:latin typeface="Helvetica Neue"/>
-                <a:ea typeface="Helvetica Neue"/>
-                <a:cs typeface="Helvetica Neue"/>
-              </a:rPr>
-              <a:t>Can you answer these without notes?</a:t>
-            </a:r>
-          </a:p>
-        </p:txBody>
-      </p:sp>
-      <p:sp>
-        <p:nvSpPr>
-          <p:cNvPr id="6" name="exam-number-1">
-            <a:extLst xmlns:a="http://schemas.openxmlformats.org/drawingml/2006/main">
-              <a:ext uri="{FF2B5EF4-FFF2-40B4-BE49-F238E27FC236}">
-                <a16:creationId xmlns:a16="http://schemas.microsoft.com/office/drawing/2014/main" id="{ECDB6192-9ABA-4C8B-BB87-2B67DB67C05D}"/>
-              </a:ext>
-            </a:extLst>
-          </p:cNvPr>
-          <p:cNvSpPr>
-            <a:spLocks xmlns:a="http://schemas.openxmlformats.org/drawingml/2006/main" noGrp="1"/>
-          </p:cNvSpPr>
-          <p:nvPr/>
-        </p:nvSpPr>
-        <p:spPr>
-          <a:xfrm xmlns:a="http://schemas.openxmlformats.org/drawingml/2006/main">
-            <a:off x="390525" y="2238375"/>
-            <a:ext cx="590550" cy="400050"/>
-          </a:xfrm>
-          <a:prstGeom xmlns:a="http://schemas.openxmlformats.org/drawingml/2006/main" prst="rect">
-            <a:avLst/>
-          </a:prstGeom>
-          <a:noFill xmlns:a="http://schemas.openxmlformats.org/drawingml/2006/main"/>
-          <a:ln xmlns:a="http://schemas.openxmlformats.org/drawingml/2006/main" w="0">
-            <a:noFill/>
-            <a:prstDash val="solid"/>
-          </a:ln>
-        </p:spPr>
-        <p:txBody>
-          <a:bodyPr xmlns:a="http://schemas.openxmlformats.org/drawingml/2006/main" anchor="t">
-            <a:noAutofit/>
-          </a:bodyPr>
-          <a:lstStyle xmlns:a="http://schemas.openxmlformats.org/drawingml/2006/main"/>
-          <a:p xmlns:a="http://schemas.openxmlformats.org/drawingml/2006/main">
-            <a:pPr algn="l">
-              <a:defRPr sz="1725" b="1">
-                <a:solidFill>
-                  <a:srgbClr val="B9F15B"/>
-                </a:solidFill>
-                <a:latin typeface="Helvetica Neue"/>
-                <a:ea typeface="Helvetica Neue"/>
-                <a:cs typeface="Helvetica Neue"/>
-              </a:defRPr>
-            </a:pPr>
-            <a:r>
-              <a:rPr sz="1725" b="1">
-                <a:solidFill>
-                  <a:srgbClr val="B9F15B"/>
-                </a:solidFill>
-                <a:latin typeface="Helvetica Neue"/>
-                <a:ea typeface="Helvetica Neue"/>
-                <a:cs typeface="Helvetica Neue"/>
-              </a:rPr>
-              <a:t>01</a:t>
-            </a:r>
-          </a:p>
-        </p:txBody>
-      </p:sp>
-      <p:sp>
-        <p:nvSpPr>
-          <p:cNvPr id="7" name="exam-question-1">
-            <a:extLst xmlns:a="http://schemas.openxmlformats.org/drawingml/2006/main">
-              <a:ext uri="{FF2B5EF4-FFF2-40B4-BE49-F238E27FC236}">
-                <a16:creationId xmlns:a16="http://schemas.microsoft.com/office/drawing/2014/main" id="{F2750767-E884-4949-8B4C-55D6F6373057}"/>
-              </a:ext>
-            </a:extLst>
-          </p:cNvPr>
-          <p:cNvSpPr>
-            <a:spLocks xmlns:a="http://schemas.openxmlformats.org/drawingml/2006/main" noGrp="1"/>
-          </p:cNvSpPr>
-          <p:nvPr/>
-        </p:nvSpPr>
-        <p:spPr>
-          <a:xfrm xmlns:a="http://schemas.openxmlformats.org/drawingml/2006/main">
-            <a:off x="1076325" y="2238375"/>
-            <a:ext cx="4762500" cy="895350"/>
+          <p:cNvPr id="5" name="section-title">
+            <a:extLst xmlns:a="http://schemas.openxmlformats.org/drawingml/2006/main">
+              <a:ext uri="{FF2B5EF4-FFF2-40B4-BE49-F238E27FC236}">
+                <a16:creationId xmlns:a16="http://schemas.microsoft.com/office/drawing/2014/main" id="{DF8FF8A5-B98B-4D68-82F3-3890F01B061F}"/>
+              </a:ext>
+            </a:extLst>
+          </p:cNvPr>
+          <p:cNvSpPr>
+            <a:spLocks xmlns:a="http://schemas.openxmlformats.org/drawingml/2006/main" noGrp="1"/>
+          </p:cNvSpPr>
+          <p:nvPr/>
+        </p:nvSpPr>
+        <p:spPr>
+          <a:xfrm xmlns:a="http://schemas.openxmlformats.org/drawingml/2006/main">
+            <a:off x="390525" y="971550"/>
+            <a:ext cx="11144250" cy="971550"/>
           </a:xfrm>
           <a:prstGeom xmlns:a="http://schemas.openxmlformats.org/drawingml/2006/main" prst="rect">
             <a:avLst/>
@@ -7646,105 +9698,47 @@
           <a:lstStyle xmlns:a="http://schemas.openxmlformats.org/drawingml/2006/main"/>
           <a:p xmlns:a="http://schemas.openxmlformats.org/drawingml/2006/main">
             <a:pPr algn="l">
-              <a:defRPr sz="1575" b="1">
-                <a:solidFill>
-                  <a:srgbClr val="111111"/>
-                </a:solidFill>
-                <a:latin typeface="Helvetica Neue"/>
-                <a:ea typeface="Helvetica Neue"/>
-                <a:cs typeface="Helvetica Neue"/>
-              </a:defRPr>
-            </a:pPr>
-            <a:r>
-              <a:rPr sz="1575" b="1">
-                <a:solidFill>
-                  <a:srgbClr val="111111"/>
-                </a:solidFill>
-                <a:latin typeface="Helvetica Neue"/>
-                <a:ea typeface="Helvetica Neue"/>
-                <a:cs typeface="Helvetica Neue"/>
-              </a:rPr>
-              <a:t>What belongs in a robust agent profile?</a:t>
-            </a:r>
-          </a:p>
-        </p:txBody>
-      </p:sp>
-      <p:sp>
-        <p:nvSpPr>
-          <p:cNvPr id="8" name="exam-number-2">
-            <a:extLst xmlns:a="http://schemas.openxmlformats.org/drawingml/2006/main">
-              <a:ext uri="{FF2B5EF4-FFF2-40B4-BE49-F238E27FC236}">
-                <a16:creationId xmlns:a16="http://schemas.microsoft.com/office/drawing/2014/main" id="{4B961064-3A99-4540-809E-8F828E8A9D51}"/>
-              </a:ext>
-            </a:extLst>
-          </p:cNvPr>
-          <p:cNvSpPr>
-            <a:spLocks xmlns:a="http://schemas.openxmlformats.org/drawingml/2006/main" noGrp="1"/>
-          </p:cNvSpPr>
-          <p:nvPr/>
-        </p:nvSpPr>
-        <p:spPr>
-          <a:xfrm xmlns:a="http://schemas.openxmlformats.org/drawingml/2006/main">
-            <a:off x="6191250" y="2238375"/>
-            <a:ext cx="590550" cy="400050"/>
-          </a:xfrm>
-          <a:prstGeom xmlns:a="http://schemas.openxmlformats.org/drawingml/2006/main" prst="rect">
-            <a:avLst/>
-          </a:prstGeom>
-          <a:noFill xmlns:a="http://schemas.openxmlformats.org/drawingml/2006/main"/>
-          <a:ln xmlns:a="http://schemas.openxmlformats.org/drawingml/2006/main" w="0">
-            <a:noFill/>
-            <a:prstDash val="solid"/>
-          </a:ln>
-        </p:spPr>
-        <p:txBody>
-          <a:bodyPr xmlns:a="http://schemas.openxmlformats.org/drawingml/2006/main" anchor="t">
-            <a:noAutofit/>
-          </a:bodyPr>
-          <a:lstStyle xmlns:a="http://schemas.openxmlformats.org/drawingml/2006/main"/>
-          <a:p xmlns:a="http://schemas.openxmlformats.org/drawingml/2006/main">
-            <a:pPr algn="l">
-              <a:defRPr sz="1725" b="1">
-                <a:solidFill>
-                  <a:srgbClr val="B9F15B"/>
-                </a:solidFill>
-                <a:latin typeface="Helvetica Neue"/>
-                <a:ea typeface="Helvetica Neue"/>
-                <a:cs typeface="Helvetica Neue"/>
-              </a:defRPr>
-            </a:pPr>
-            <a:r>
-              <a:rPr sz="1725" b="1">
-                <a:solidFill>
-                  <a:srgbClr val="B9F15B"/>
-                </a:solidFill>
-                <a:latin typeface="Helvetica Neue"/>
-                <a:ea typeface="Helvetica Neue"/>
-                <a:cs typeface="Helvetica Neue"/>
-              </a:rPr>
-              <a:t>02</a:t>
-            </a:r>
-          </a:p>
-        </p:txBody>
-      </p:sp>
-      <p:sp>
-        <p:nvSpPr>
-          <p:cNvPr id="9" name="exam-question-2">
-            <a:extLst xmlns:a="http://schemas.openxmlformats.org/drawingml/2006/main">
-              <a:ext uri="{FF2B5EF4-FFF2-40B4-BE49-F238E27FC236}">
-                <a16:creationId xmlns:a16="http://schemas.microsoft.com/office/drawing/2014/main" id="{7E25CA55-29D8-4737-9AB0-DD9C46532C63}"/>
-              </a:ext>
-            </a:extLst>
-          </p:cNvPr>
-          <p:cNvSpPr>
-            <a:spLocks xmlns:a="http://schemas.openxmlformats.org/drawingml/2006/main" noGrp="1"/>
-          </p:cNvSpPr>
-          <p:nvPr/>
-        </p:nvSpPr>
-        <p:spPr>
-          <a:xfrm xmlns:a="http://schemas.openxmlformats.org/drawingml/2006/main">
-            <a:off x="6877050" y="2238375"/>
-            <a:ext cx="4762500" cy="895350"/>
+              <a:defRPr sz="3000" b="1">
+                <a:solidFill>
+                  <a:srgbClr val="111111"/>
+                </a:solidFill>
+                <a:latin typeface="Helvetica Neue"/>
+                <a:ea typeface="Helvetica Neue"/>
+                <a:cs typeface="Helvetica Neue"/>
+              </a:defRPr>
+            </a:pPr>
+            <a:r>
+              <a:rPr sz="3000" b="1">
+                <a:solidFill>
+                  <a:srgbClr val="111111"/>
+                </a:solidFill>
+                <a:latin typeface="Helvetica Neue"/>
+                <a:ea typeface="Helvetica Neue"/>
+                <a:cs typeface="Helvetica Neue"/>
+              </a:rPr>
+              <a:t>A complete tool cycle returns observed results</a:t>
+            </a:r>
+          </a:p>
+        </p:txBody>
+      </p:sp>
+      <p:sp>
+        <p:nvSpPr>
+          <p:cNvPr id="6" name="section-explanation">
+            <a:extLst xmlns:a="http://schemas.openxmlformats.org/drawingml/2006/main">
+              <a:ext uri="{FF2B5EF4-FFF2-40B4-BE49-F238E27FC236}">
+                <a16:creationId xmlns:a16="http://schemas.microsoft.com/office/drawing/2014/main" id="{5E8382D5-116A-42FD-897D-8DA95634E5A4}"/>
+              </a:ext>
+            </a:extLst>
+          </p:cNvPr>
+          <p:cNvSpPr>
+            <a:spLocks xmlns:a="http://schemas.openxmlformats.org/drawingml/2006/main" noGrp="1"/>
+          </p:cNvSpPr>
+          <p:nvPr/>
+        </p:nvSpPr>
+        <p:spPr>
+          <a:xfrm xmlns:a="http://schemas.openxmlformats.org/drawingml/2006/main">
+            <a:off x="390525" y="2381250"/>
+            <a:ext cx="4524375" cy="2905125"/>
           </a:xfrm>
           <a:prstGeom xmlns:a="http://schemas.openxmlformats.org/drawingml/2006/main" prst="rect">
             <a:avLst/>
@@ -7762,105 +9756,80 @@
           <a:lstStyle xmlns:a="http://schemas.openxmlformats.org/drawingml/2006/main"/>
           <a:p xmlns:a="http://schemas.openxmlformats.org/drawingml/2006/main">
             <a:pPr algn="l">
-              <a:defRPr sz="1575" b="1">
-                <a:solidFill>
-                  <a:srgbClr val="111111"/>
-                </a:solidFill>
-                <a:latin typeface="Helvetica Neue"/>
-                <a:ea typeface="Helvetica Neue"/>
-                <a:cs typeface="Helvetica Neue"/>
-              </a:defRPr>
-            </a:pPr>
-            <a:r>
-              <a:rPr sz="1575" b="1">
-                <a:solidFill>
-                  <a:srgbClr val="111111"/>
-                </a:solidFill>
-                <a:latin typeface="Helvetica Neue"/>
-                <a:ea typeface="Helvetica Neue"/>
-                <a:cs typeface="Helvetica Neue"/>
-              </a:rPr>
-              <a:t>Who produces each part of Thought-Action-Observation?</a:t>
-            </a:r>
-          </a:p>
-        </p:txBody>
-      </p:sp>
-      <p:sp>
-        <p:nvSpPr>
-          <p:cNvPr id="10" name="exam-number-3">
-            <a:extLst xmlns:a="http://schemas.openxmlformats.org/drawingml/2006/main">
-              <a:ext uri="{FF2B5EF4-FFF2-40B4-BE49-F238E27FC236}">
-                <a16:creationId xmlns:a16="http://schemas.microsoft.com/office/drawing/2014/main" id="{744FDB8C-1D9E-44F1-B106-4969FBB1646E}"/>
-              </a:ext>
-            </a:extLst>
-          </p:cNvPr>
-          <p:cNvSpPr>
-            <a:spLocks xmlns:a="http://schemas.openxmlformats.org/drawingml/2006/main" noGrp="1"/>
-          </p:cNvSpPr>
-          <p:nvPr/>
-        </p:nvSpPr>
-        <p:spPr>
-          <a:xfrm xmlns:a="http://schemas.openxmlformats.org/drawingml/2006/main">
-            <a:off x="390525" y="3495675"/>
-            <a:ext cx="590550" cy="400050"/>
-          </a:xfrm>
-          <a:prstGeom xmlns:a="http://schemas.openxmlformats.org/drawingml/2006/main" prst="rect">
-            <a:avLst/>
-          </a:prstGeom>
-          <a:noFill xmlns:a="http://schemas.openxmlformats.org/drawingml/2006/main"/>
-          <a:ln xmlns:a="http://schemas.openxmlformats.org/drawingml/2006/main" w="0">
-            <a:noFill/>
-            <a:prstDash val="solid"/>
-          </a:ln>
-        </p:spPr>
-        <p:txBody>
-          <a:bodyPr xmlns:a="http://schemas.openxmlformats.org/drawingml/2006/main" anchor="t">
-            <a:noAutofit/>
-          </a:bodyPr>
-          <a:lstStyle xmlns:a="http://schemas.openxmlformats.org/drawingml/2006/main"/>
-          <a:p xmlns:a="http://schemas.openxmlformats.org/drawingml/2006/main">
-            <a:pPr algn="l">
-              <a:defRPr sz="1725" b="1">
-                <a:solidFill>
-                  <a:srgbClr val="B9F15B"/>
-                </a:solidFill>
-                <a:latin typeface="Helvetica Neue"/>
-                <a:ea typeface="Helvetica Neue"/>
-                <a:cs typeface="Helvetica Neue"/>
-              </a:defRPr>
-            </a:pPr>
-            <a:r>
-              <a:rPr sz="1725" b="1">
-                <a:solidFill>
-                  <a:srgbClr val="B9F15B"/>
-                </a:solidFill>
-                <a:latin typeface="Helvetica Neue"/>
-                <a:ea typeface="Helvetica Neue"/>
-                <a:cs typeface="Helvetica Neue"/>
-              </a:rPr>
-              <a:t>03</a:t>
-            </a:r>
-          </a:p>
-        </p:txBody>
-      </p:sp>
-      <p:sp>
-        <p:nvSpPr>
-          <p:cNvPr id="11" name="exam-question-3">
-            <a:extLst xmlns:a="http://schemas.openxmlformats.org/drawingml/2006/main">
-              <a:ext uri="{FF2B5EF4-FFF2-40B4-BE49-F238E27FC236}">
-                <a16:creationId xmlns:a16="http://schemas.microsoft.com/office/drawing/2014/main" id="{EA737C02-564E-4B62-82E2-D8ACBB62F569}"/>
-              </a:ext>
-            </a:extLst>
-          </p:cNvPr>
-          <p:cNvSpPr>
-            <a:spLocks xmlns:a="http://schemas.openxmlformats.org/drawingml/2006/main" noGrp="1"/>
-          </p:cNvSpPr>
-          <p:nvPr/>
-        </p:nvSpPr>
-        <p:spPr>
-          <a:xfrm xmlns:a="http://schemas.openxmlformats.org/drawingml/2006/main">
-            <a:off x="1076325" y="3495675"/>
-            <a:ext cx="4762500" cy="895350"/>
+              <a:defRPr sz="1875" b="0">
+                <a:solidFill>
+                  <a:srgbClr val="5B5B57"/>
+                </a:solidFill>
+                <a:latin typeface="Helvetica Neue"/>
+                <a:ea typeface="Helvetica Neue"/>
+                <a:cs typeface="Helvetica Neue"/>
+              </a:defRPr>
+            </a:pPr>
+            <a:r>
+              <a:rPr sz="1875" b="0">
+                <a:solidFill>
+                  <a:srgbClr val="5B5B57"/>
+                </a:solidFill>
+                <a:latin typeface="Helvetica Neue"/>
+                <a:ea typeface="Helvetica Neue"/>
+                <a:cs typeface="Helvetica Neue"/>
+              </a:rPr>
+              <a:t>A native tool request is only part of the protocol. After validation, the runtime returns each result with the matching call identity and continues the model exchange. Preserve the provider's complete response content and cap the loop.</a:t>
+            </a:r>
+          </a:p>
+        </p:txBody>
+      </p:sp>
+      <p:sp>
+        <p:nvSpPr>
+          <p:cNvPr id="7" name="column-rule">
+            <a:extLst xmlns:a="http://schemas.openxmlformats.org/drawingml/2006/main">
+              <a:ext uri="{FF2B5EF4-FFF2-40B4-BE49-F238E27FC236}">
+                <a16:creationId xmlns:a16="http://schemas.microsoft.com/office/drawing/2014/main" id="{DDA33B8B-F855-4514-BADD-20D6E925D3F7}"/>
+              </a:ext>
+            </a:extLst>
+          </p:cNvPr>
+          <p:cNvSpPr>
+            <a:spLocks xmlns:a="http://schemas.openxmlformats.org/drawingml/2006/main" noGrp="1"/>
+          </p:cNvSpPr>
+          <p:nvPr/>
+        </p:nvSpPr>
+        <p:spPr>
+          <a:xfrm xmlns:a="http://schemas.openxmlformats.org/drawingml/2006/main">
+            <a:off x="5334000" y="2343150"/>
+            <a:ext cx="47625" cy="3257550"/>
+          </a:xfrm>
+          <a:prstGeom xmlns:a="http://schemas.openxmlformats.org/drawingml/2006/main" prst="rect">
+            <a:avLst/>
+          </a:prstGeom>
+          <a:solidFill xmlns:a="http://schemas.openxmlformats.org/drawingml/2006/main">
+            <a:srgbClr val="B9F15B"/>
+          </a:solidFill>
+          <a:ln xmlns:a="http://schemas.openxmlformats.org/drawingml/2006/main" w="0">
+            <a:solidFill>
+              <a:srgbClr val="B9F15B"/>
+            </a:solidFill>
+            <a:prstDash val="solid"/>
+          </a:ln>
+        </p:spPr>
+      </p:sp>
+      <p:sp>
+        <p:nvSpPr>
+          <p:cNvPr id="8" name="section-points">
+            <a:extLst xmlns:a="http://schemas.openxmlformats.org/drawingml/2006/main">
+              <a:ext uri="{FF2B5EF4-FFF2-40B4-BE49-F238E27FC236}">
+                <a16:creationId xmlns:a16="http://schemas.microsoft.com/office/drawing/2014/main" id="{1683657E-C268-4576-BF1B-70A1EBE91877}"/>
+              </a:ext>
+            </a:extLst>
+          </p:cNvPr>
+          <p:cNvSpPr>
+            <a:spLocks xmlns:a="http://schemas.openxmlformats.org/drawingml/2006/main" noGrp="1"/>
+          </p:cNvSpPr>
+          <p:nvPr/>
+        </p:nvSpPr>
+        <p:spPr>
+          <a:xfrm xmlns:a="http://schemas.openxmlformats.org/drawingml/2006/main">
+            <a:off x="5857875" y="2343150"/>
+            <a:ext cx="5572125" cy="3429000"/>
           </a:xfrm>
           <a:prstGeom xmlns:a="http://schemas.openxmlformats.org/drawingml/2006/main" prst="rect">
             <a:avLst/>
@@ -7878,67 +9847,37 @@
           <a:lstStyle xmlns:a="http://schemas.openxmlformats.org/drawingml/2006/main"/>
           <a:p xmlns:a="http://schemas.openxmlformats.org/drawingml/2006/main">
             <a:pPr algn="l">
-              <a:defRPr sz="1575" b="1">
-                <a:solidFill>
-                  <a:srgbClr val="111111"/>
-                </a:solidFill>
-                <a:latin typeface="Helvetica Neue"/>
-                <a:ea typeface="Helvetica Neue"/>
-                <a:cs typeface="Helvetica Neue"/>
-              </a:defRPr>
-            </a:pPr>
-            <a:r>
-              <a:rPr sz="1575" b="1">
-                <a:solidFill>
-                  <a:srgbClr val="111111"/>
-                </a:solidFill>
-                <a:latin typeface="Helvetica Neue"/>
-                <a:ea typeface="Helvetica Neue"/>
-                <a:cs typeface="Helvetica Neue"/>
-              </a:rPr>
-              <a:t>Why is a stop sequence needed in text ReAct?</a:t>
-            </a:r>
-          </a:p>
-        </p:txBody>
-      </p:sp>
-      <p:sp>
-        <p:nvSpPr>
-          <p:cNvPr id="12" name="exam-number-4">
-            <a:extLst xmlns:a="http://schemas.openxmlformats.org/drawingml/2006/main">
-              <a:ext uri="{FF2B5EF4-FFF2-40B4-BE49-F238E27FC236}">
-                <a16:creationId xmlns:a16="http://schemas.microsoft.com/office/drawing/2014/main" id="{9D3936F2-73ED-4D32-8741-3175EA3FFFE2}"/>
-              </a:ext>
-            </a:extLst>
-          </p:cNvPr>
-          <p:cNvSpPr>
-            <a:spLocks xmlns:a="http://schemas.openxmlformats.org/drawingml/2006/main" noGrp="1"/>
-          </p:cNvSpPr>
-          <p:nvPr/>
-        </p:nvSpPr>
-        <p:spPr>
-          <a:xfrm xmlns:a="http://schemas.openxmlformats.org/drawingml/2006/main">
-            <a:off x="6191250" y="3495675"/>
-            <a:ext cx="590550" cy="400050"/>
-          </a:xfrm>
-          <a:prstGeom xmlns:a="http://schemas.openxmlformats.org/drawingml/2006/main" prst="rect">
-            <a:avLst/>
-          </a:prstGeom>
-          <a:noFill xmlns:a="http://schemas.openxmlformats.org/drawingml/2006/main"/>
-          <a:ln xmlns:a="http://schemas.openxmlformats.org/drawingml/2006/main" w="0">
-            <a:noFill/>
-            <a:prstDash val="solid"/>
-          </a:ln>
-        </p:spPr>
-        <p:txBody>
-          <a:bodyPr xmlns:a="http://schemas.openxmlformats.org/drawingml/2006/main" anchor="t">
-            <a:noAutofit/>
-          </a:bodyPr>
-          <a:lstStyle xmlns:a="http://schemas.openxmlformats.org/drawingml/2006/main"/>
+              <a:defRPr sz="1725" b="1">
+                <a:solidFill>
+                  <a:srgbClr val="111111"/>
+                </a:solidFill>
+                <a:latin typeface="Helvetica Neue"/>
+                <a:ea typeface="Helvetica Neue"/>
+                <a:cs typeface="Helvetica Neue"/>
+              </a:defRPr>
+            </a:pPr>
+            <a:r>
+              <a:rPr sz="1725" b="1">
+                <a:solidFill>
+                  <a:srgbClr val="111111"/>
+                </a:solidFill>
+                <a:latin typeface="Helvetica Neue"/>
+                <a:ea typeface="Helvetica Neue"/>
+                <a:cs typeface="Helvetica Neue"/>
+              </a:rPr>
+              <a:t>01  Dispatch through the supplied tool registry.</a:t>
+            </a:r>
+          </a:p>
+          <a:p xmlns:a="http://schemas.openxmlformats.org/drawingml/2006/main">
+            <a:r>
+              <a:t/>
+            </a:r>
+          </a:p>
           <a:p xmlns:a="http://schemas.openxmlformats.org/drawingml/2006/main">
             <a:pPr algn="l">
               <a:defRPr sz="1725" b="1">
                 <a:solidFill>
-                  <a:srgbClr val="B9F15B"/>
+                  <a:srgbClr val="111111"/>
                 </a:solidFill>
                 <a:latin typeface="Helvetica Neue"/>
                 <a:ea typeface="Helvetica Neue"/>
@@ -7948,113 +9887,25 @@
             <a:r>
               <a:rPr sz="1725" b="1">
                 <a:solidFill>
-                  <a:srgbClr val="B9F15B"/>
-                </a:solidFill>
-                <a:latin typeface="Helvetica Neue"/>
-                <a:ea typeface="Helvetica Neue"/>
-                <a:cs typeface="Helvetica Neue"/>
-              </a:rPr>
-              <a:t>04</a:t>
-            </a:r>
-          </a:p>
-        </p:txBody>
-      </p:sp>
-      <p:sp>
-        <p:nvSpPr>
-          <p:cNvPr id="13" name="exam-question-4">
-            <a:extLst xmlns:a="http://schemas.openxmlformats.org/drawingml/2006/main">
-              <a:ext uri="{FF2B5EF4-FFF2-40B4-BE49-F238E27FC236}">
-                <a16:creationId xmlns:a16="http://schemas.microsoft.com/office/drawing/2014/main" id="{8EB45503-5E2B-45E6-BEE3-AB997C6F5D81}"/>
-              </a:ext>
-            </a:extLst>
-          </p:cNvPr>
-          <p:cNvSpPr>
-            <a:spLocks xmlns:a="http://schemas.openxmlformats.org/drawingml/2006/main" noGrp="1"/>
-          </p:cNvSpPr>
-          <p:nvPr/>
-        </p:nvSpPr>
-        <p:spPr>
-          <a:xfrm xmlns:a="http://schemas.openxmlformats.org/drawingml/2006/main">
-            <a:off x="6877050" y="3495675"/>
-            <a:ext cx="4762500" cy="895350"/>
-          </a:xfrm>
-          <a:prstGeom xmlns:a="http://schemas.openxmlformats.org/drawingml/2006/main" prst="rect">
-            <a:avLst/>
-          </a:prstGeom>
-          <a:noFill xmlns:a="http://schemas.openxmlformats.org/drawingml/2006/main"/>
-          <a:ln xmlns:a="http://schemas.openxmlformats.org/drawingml/2006/main" w="0">
-            <a:noFill/>
-            <a:prstDash val="solid"/>
-          </a:ln>
-        </p:spPr>
-        <p:txBody>
-          <a:bodyPr xmlns:a="http://schemas.openxmlformats.org/drawingml/2006/main" anchor="t">
-            <a:normAutofit fontScale="100000"/>
-          </a:bodyPr>
-          <a:lstStyle xmlns:a="http://schemas.openxmlformats.org/drawingml/2006/main"/>
-          <a:p xmlns:a="http://schemas.openxmlformats.org/drawingml/2006/main">
-            <a:pPr algn="l">
-              <a:defRPr sz="1575" b="1">
-                <a:solidFill>
-                  <a:srgbClr val="111111"/>
-                </a:solidFill>
-                <a:latin typeface="Helvetica Neue"/>
-                <a:ea typeface="Helvetica Neue"/>
-                <a:cs typeface="Helvetica Neue"/>
-              </a:defRPr>
-            </a:pPr>
-            <a:r>
-              <a:rPr sz="1575" b="1">
-                <a:solidFill>
-                  <a:srgbClr val="111111"/>
-                </a:solidFill>
-                <a:latin typeface="Helvetica Neue"/>
-                <a:ea typeface="Helvetica Neue"/>
-                <a:cs typeface="Helvetica Neue"/>
-              </a:rPr>
-              <a:t>Compare text parsing with native function calling.</a:t>
-            </a:r>
-          </a:p>
-        </p:txBody>
-      </p:sp>
-      <p:sp>
-        <p:nvSpPr>
-          <p:cNvPr id="14" name="exam-number-5">
-            <a:extLst xmlns:a="http://schemas.openxmlformats.org/drawingml/2006/main">
-              <a:ext uri="{FF2B5EF4-FFF2-40B4-BE49-F238E27FC236}">
-                <a16:creationId xmlns:a16="http://schemas.microsoft.com/office/drawing/2014/main" id="{2E654E0C-5FD2-449E-B7DF-CE87CD41036C}"/>
-              </a:ext>
-            </a:extLst>
-          </p:cNvPr>
-          <p:cNvSpPr>
-            <a:spLocks xmlns:a="http://schemas.openxmlformats.org/drawingml/2006/main" noGrp="1"/>
-          </p:cNvSpPr>
-          <p:nvPr/>
-        </p:nvSpPr>
-        <p:spPr>
-          <a:xfrm xmlns:a="http://schemas.openxmlformats.org/drawingml/2006/main">
-            <a:off x="390525" y="4752975"/>
-            <a:ext cx="590550" cy="400050"/>
-          </a:xfrm>
-          <a:prstGeom xmlns:a="http://schemas.openxmlformats.org/drawingml/2006/main" prst="rect">
-            <a:avLst/>
-          </a:prstGeom>
-          <a:noFill xmlns:a="http://schemas.openxmlformats.org/drawingml/2006/main"/>
-          <a:ln xmlns:a="http://schemas.openxmlformats.org/drawingml/2006/main" w="0">
-            <a:noFill/>
-            <a:prstDash val="solid"/>
-          </a:ln>
-        </p:spPr>
-        <p:txBody>
-          <a:bodyPr xmlns:a="http://schemas.openxmlformats.org/drawingml/2006/main" anchor="t">
-            <a:noAutofit/>
-          </a:bodyPr>
-          <a:lstStyle xmlns:a="http://schemas.openxmlformats.org/drawingml/2006/main"/>
+                  <a:srgbClr val="111111"/>
+                </a:solidFill>
+                <a:latin typeface="Helvetica Neue"/>
+                <a:ea typeface="Helvetica Neue"/>
+                <a:cs typeface="Helvetica Neue"/>
+              </a:rPr>
+              <a:t>02  Keep model rounds and tool calls as separate budgets.</a:t>
+            </a:r>
+          </a:p>
+          <a:p xmlns:a="http://schemas.openxmlformats.org/drawingml/2006/main">
+            <a:r>
+              <a:t/>
+            </a:r>
+          </a:p>
           <a:p xmlns:a="http://schemas.openxmlformats.org/drawingml/2006/main">
             <a:pPr algn="l">
               <a:defRPr sz="1725" b="1">
                 <a:solidFill>
-                  <a:srgbClr val="B9F15B"/>
+                  <a:srgbClr val="111111"/>
                 </a:solidFill>
                 <a:latin typeface="Helvetica Neue"/>
                 <a:ea typeface="Helvetica Neue"/>
@@ -8064,187 +9915,13 @@
             <a:r>
               <a:rPr sz="1725" b="1">
                 <a:solidFill>
-                  <a:srgbClr val="B9F15B"/>
-                </a:solidFill>
-                <a:latin typeface="Helvetica Neue"/>
-                <a:ea typeface="Helvetica Neue"/>
-                <a:cs typeface="Helvetica Neue"/>
-              </a:rPr>
-              <a:t>05</a:t>
-            </a:r>
-          </a:p>
-        </p:txBody>
-      </p:sp>
-      <p:sp>
-        <p:nvSpPr>
-          <p:cNvPr id="15" name="exam-question-5">
-            <a:extLst xmlns:a="http://schemas.openxmlformats.org/drawingml/2006/main">
-              <a:ext uri="{FF2B5EF4-FFF2-40B4-BE49-F238E27FC236}">
-                <a16:creationId xmlns:a16="http://schemas.microsoft.com/office/drawing/2014/main" id="{671A1790-E73B-4F11-A6AA-0211E9DC12D4}"/>
-              </a:ext>
-            </a:extLst>
-          </p:cNvPr>
-          <p:cNvSpPr>
-            <a:spLocks xmlns:a="http://schemas.openxmlformats.org/drawingml/2006/main" noGrp="1"/>
-          </p:cNvSpPr>
-          <p:nvPr/>
-        </p:nvSpPr>
-        <p:spPr>
-          <a:xfrm xmlns:a="http://schemas.openxmlformats.org/drawingml/2006/main">
-            <a:off x="1076325" y="4752975"/>
-            <a:ext cx="4762500" cy="895350"/>
-          </a:xfrm>
-          <a:prstGeom xmlns:a="http://schemas.openxmlformats.org/drawingml/2006/main" prst="rect">
-            <a:avLst/>
-          </a:prstGeom>
-          <a:noFill xmlns:a="http://schemas.openxmlformats.org/drawingml/2006/main"/>
-          <a:ln xmlns:a="http://schemas.openxmlformats.org/drawingml/2006/main" w="0">
-            <a:noFill/>
-            <a:prstDash val="solid"/>
-          </a:ln>
-        </p:spPr>
-        <p:txBody>
-          <a:bodyPr xmlns:a="http://schemas.openxmlformats.org/drawingml/2006/main" anchor="t">
-            <a:normAutofit fontScale="100000"/>
-          </a:bodyPr>
-          <a:lstStyle xmlns:a="http://schemas.openxmlformats.org/drawingml/2006/main"/>
-          <a:p xmlns:a="http://schemas.openxmlformats.org/drawingml/2006/main">
-            <a:pPr algn="l">
-              <a:defRPr sz="1575" b="1">
-                <a:solidFill>
-                  <a:srgbClr val="111111"/>
-                </a:solidFill>
-                <a:latin typeface="Helvetica Neue"/>
-                <a:ea typeface="Helvetica Neue"/>
-                <a:cs typeface="Helvetica Neue"/>
-              </a:defRPr>
-            </a:pPr>
-            <a:r>
-              <a:rPr sz="1575" b="1">
-                <a:solidFill>
-                  <a:srgbClr val="111111"/>
-                </a:solidFill>
-                <a:latin typeface="Helvetica Neue"/>
-                <a:ea typeface="Helvetica Neue"/>
-                <a:cs typeface="Helvetica Neue"/>
-              </a:rPr>
-              <a:t>List the required termination conditions for a safe loop.</a:t>
-            </a:r>
-          </a:p>
-        </p:txBody>
-      </p:sp>
-      <p:sp>
-        <p:nvSpPr>
-          <p:cNvPr id="16" name="exam-number-6">
-            <a:extLst xmlns:a="http://schemas.openxmlformats.org/drawingml/2006/main">
-              <a:ext uri="{FF2B5EF4-FFF2-40B4-BE49-F238E27FC236}">
-                <a16:creationId xmlns:a16="http://schemas.microsoft.com/office/drawing/2014/main" id="{D395B7A3-E0E8-47F1-9C65-2840910D674F}"/>
-              </a:ext>
-            </a:extLst>
-          </p:cNvPr>
-          <p:cNvSpPr>
-            <a:spLocks xmlns:a="http://schemas.openxmlformats.org/drawingml/2006/main" noGrp="1"/>
-          </p:cNvSpPr>
-          <p:nvPr/>
-        </p:nvSpPr>
-        <p:spPr>
-          <a:xfrm xmlns:a="http://schemas.openxmlformats.org/drawingml/2006/main">
-            <a:off x="6191250" y="4752975"/>
-            <a:ext cx="590550" cy="400050"/>
-          </a:xfrm>
-          <a:prstGeom xmlns:a="http://schemas.openxmlformats.org/drawingml/2006/main" prst="rect">
-            <a:avLst/>
-          </a:prstGeom>
-          <a:noFill xmlns:a="http://schemas.openxmlformats.org/drawingml/2006/main"/>
-          <a:ln xmlns:a="http://schemas.openxmlformats.org/drawingml/2006/main" w="0">
-            <a:noFill/>
-            <a:prstDash val="solid"/>
-          </a:ln>
-        </p:spPr>
-        <p:txBody>
-          <a:bodyPr xmlns:a="http://schemas.openxmlformats.org/drawingml/2006/main" anchor="t">
-            <a:noAutofit/>
-          </a:bodyPr>
-          <a:lstStyle xmlns:a="http://schemas.openxmlformats.org/drawingml/2006/main"/>
-          <a:p xmlns:a="http://schemas.openxmlformats.org/drawingml/2006/main">
-            <a:pPr algn="l">
-              <a:defRPr sz="1725" b="1">
-                <a:solidFill>
-                  <a:srgbClr val="B9F15B"/>
-                </a:solidFill>
-                <a:latin typeface="Helvetica Neue"/>
-                <a:ea typeface="Helvetica Neue"/>
-                <a:cs typeface="Helvetica Neue"/>
-              </a:defRPr>
-            </a:pPr>
-            <a:r>
-              <a:rPr sz="1725" b="1">
-                <a:solidFill>
-                  <a:srgbClr val="B9F15B"/>
-                </a:solidFill>
-                <a:latin typeface="Helvetica Neue"/>
-                <a:ea typeface="Helvetica Neue"/>
-                <a:cs typeface="Helvetica Neue"/>
-              </a:rPr>
-              <a:t>06</a:t>
-            </a:r>
-          </a:p>
-        </p:txBody>
-      </p:sp>
-      <p:sp>
-        <p:nvSpPr>
-          <p:cNvPr id="17" name="exam-question-6">
-            <a:extLst xmlns:a="http://schemas.openxmlformats.org/drawingml/2006/main">
-              <a:ext uri="{FF2B5EF4-FFF2-40B4-BE49-F238E27FC236}">
-                <a16:creationId xmlns:a16="http://schemas.microsoft.com/office/drawing/2014/main" id="{0FA405A9-B3C8-40D4-9E8B-96C9AA593FA5}"/>
-              </a:ext>
-            </a:extLst>
-          </p:cNvPr>
-          <p:cNvSpPr>
-            <a:spLocks xmlns:a="http://schemas.openxmlformats.org/drawingml/2006/main" noGrp="1"/>
-          </p:cNvSpPr>
-          <p:nvPr/>
-        </p:nvSpPr>
-        <p:spPr>
-          <a:xfrm xmlns:a="http://schemas.openxmlformats.org/drawingml/2006/main">
-            <a:off x="6877050" y="4752975"/>
-            <a:ext cx="4762500" cy="895350"/>
-          </a:xfrm>
-          <a:prstGeom xmlns:a="http://schemas.openxmlformats.org/drawingml/2006/main" prst="rect">
-            <a:avLst/>
-          </a:prstGeom>
-          <a:noFill xmlns:a="http://schemas.openxmlformats.org/drawingml/2006/main"/>
-          <a:ln xmlns:a="http://schemas.openxmlformats.org/drawingml/2006/main" w="0">
-            <a:noFill/>
-            <a:prstDash val="solid"/>
-          </a:ln>
-        </p:spPr>
-        <p:txBody>
-          <a:bodyPr xmlns:a="http://schemas.openxmlformats.org/drawingml/2006/main" anchor="t">
-            <a:normAutofit fontScale="100000"/>
-          </a:bodyPr>
-          <a:lstStyle xmlns:a="http://schemas.openxmlformats.org/drawingml/2006/main"/>
-          <a:p xmlns:a="http://schemas.openxmlformats.org/drawingml/2006/main">
-            <a:pPr algn="l">
-              <a:defRPr sz="1575" b="1">
-                <a:solidFill>
-                  <a:srgbClr val="111111"/>
-                </a:solidFill>
-                <a:latin typeface="Helvetica Neue"/>
-                <a:ea typeface="Helvetica Neue"/>
-                <a:cs typeface="Helvetica Neue"/>
-              </a:defRPr>
-            </a:pPr>
-            <a:r>
-              <a:rPr sz="1575" b="1">
-                <a:solidFill>
-                  <a:srgbClr val="111111"/>
-                </a:solidFill>
-                <a:latin typeface="Helvetica Neue"/>
-                <a:ea typeface="Helvetica Neue"/>
-                <a:cs typeface="Helvetica Neue"/>
-              </a:rPr>
-              <a:t>Why does ReAct reduce hallucination yet remain myopic?</a:t>
+                  <a:srgbClr val="111111"/>
+                </a:solidFill>
+                <a:latin typeface="Helvetica Neue"/>
+                <a:ea typeface="Helvetica Neue"/>
+                <a:cs typeface="Helvetica Neue"/>
+              </a:rPr>
+              <a:t>03  Test empty responses and multiple calls.</a:t>
             </a:r>
           </a:p>
         </p:txBody>
@@ -8252,7 +9929,7 @@
     </p:spTree>
     <p:extLst>
       <p:ext uri="{BB962C8B-B14F-4D97-AF65-F5344CB8AC3E}">
-        <p14:creationId xmlns:p14="http://schemas.microsoft.com/office/powerpoint/2010/main" val="278347032"/>
+        <p14:creationId xmlns:p14="http://schemas.microsoft.com/office/powerpoint/2010/main" val="216112576"/>
       </p:ext>
     </p:extLst>
   </p:cSld>
@@ -8260,9 +9937,9 @@
 </file>
 
 <file path=ppt/theme/theme1.xml><?xml version="1.0" encoding="utf-8"?>
-<a:theme xmlns:a="http://schemas.openxmlformats.org/drawingml/2006/main" name="ChatGPT">
+<a:theme xmlns:a="http://schemas.openxmlformats.org/drawingml/2006/main" name="Course">
   <a:themeElements>
-    <a:clrScheme name="ChatGPT">
+    <a:clrScheme name="Course">
       <a:dk1>
         <a:srgbClr val="000000"/>
       </a:dk1>
@@ -8312,7 +9989,7 @@
         <a:cs typeface="Calibri"/>
       </a:minorFont>
     </a:fontScheme>
-    <a:fmtScheme name="ChatGPT">
+    <a:fmtScheme name="Course">
       <a:fillStyleLst>
         <a:solidFill>
           <a:schemeClr val="phClr"/>
